--- a/tasks/bird_geb_fig3_fig4_effort_analysis/figures/fig_s3_province_model_robustness.pptx
+++ b/tasks/bird_geb_fig3_fig4_effort_analysis/figures/fig_s3_province_model_robustness.pptx
@@ -3108,10 +3108,10 @@
         </p:nvGrpSpPr>
         <p:grpSpPr>
           <a:xfrm>
-            <a:off x="1691640" y="1325721"/>
-            <a:ext cx="11704320" cy="8046720"/>
-            <a:chOff x="1691640" y="1325721"/>
-            <a:chExt cx="11704320" cy="8046720"/>
+            <a:off x="960120" y="1325721"/>
+            <a:ext cx="13167360" cy="8046720"/>
+            <a:chOff x="960120" y="1325721"/>
+            <a:chExt cx="13167360" cy="8046720"/>
           </a:xfrm>
         </p:grpSpPr>
         <p:sp>
@@ -3122,8 +3122,8 @@
           </p:nvSpPr>
           <p:spPr>
             <a:xfrm>
-              <a:off x="1691639" y="1325721"/>
-              <a:ext cx="11704319" cy="8046720"/>
+              <a:off x="960119" y="1325721"/>
+              <a:ext cx="13167360" cy="8046720"/>
             </a:xfrm>
             <a:prstGeom prst="rect">
               <a:avLst/>
@@ -3157,8 +3157,8 @@
           </p:nvSpPr>
           <p:spPr>
             <a:xfrm>
-              <a:off x="13395960" y="1325721"/>
-              <a:ext cx="0" cy="8046720"/>
+              <a:off x="960120" y="1325721"/>
+              <a:ext cx="13167359" cy="8046719"/>
             </a:xfrm>
             <a:prstGeom prst="rect">
               <a:avLst/>
@@ -3192,8 +3192,8 @@
           </p:nvSpPr>
           <p:spPr>
             <a:xfrm>
-              <a:off x="1761229" y="1395310"/>
-              <a:ext cx="5456695" cy="4193187"/>
+              <a:off x="1029709" y="1395310"/>
+              <a:ext cx="6510201" cy="3953770"/>
             </a:xfrm>
             <a:prstGeom prst="rect">
               <a:avLst/>
@@ -3203,7 +3203,7 @@
                 <a:alpha val="100000"/>
               </a:srgbClr>
             </a:solidFill>
-            <a:ln w="12934" cap="rnd">
+            <a:ln w="12565" cap="rnd">
               <a:solidFill>
                 <a:srgbClr val="FFFFFF">
                   <a:alpha val="100000"/>
@@ -3227,8 +3227,8 @@
           </p:nvSpPr>
           <p:spPr>
             <a:xfrm>
-              <a:off x="7217924" y="1395310"/>
-              <a:ext cx="6108446" cy="4193187"/>
+              <a:off x="7539910" y="1395310"/>
+              <a:ext cx="6517980" cy="3953770"/>
             </a:xfrm>
             <a:prstGeom prst="rect">
               <a:avLst/>
@@ -3238,7 +3238,7 @@
                 <a:alpha val="100000"/>
               </a:srgbClr>
             </a:solidFill>
-            <a:ln w="12934" cap="rnd">
+            <a:ln w="12565" cap="rnd">
               <a:solidFill>
                 <a:srgbClr val="FFFFFF">
                   <a:alpha val="100000"/>
@@ -3262,8 +3262,8 @@
           </p:nvSpPr>
           <p:spPr>
             <a:xfrm>
-              <a:off x="3023900" y="2082177"/>
-              <a:ext cx="4127598" cy="3124565"/>
+              <a:off x="2256505" y="1591591"/>
+              <a:ext cx="5218876" cy="3386642"/>
             </a:xfrm>
             <a:prstGeom prst="rect">
               <a:avLst/>
@@ -3288,15 +3288,230 @@
           </p:nvSpPr>
           <p:spPr>
             <a:xfrm>
-              <a:off x="4162149" y="2082177"/>
-              <a:ext cx="0" cy="3124565"/>
+              <a:off x="2493727" y="1591591"/>
+              <a:ext cx="0" cy="3386642"/>
             </a:xfrm>
             <a:custGeom>
               <a:avLst/>
               <a:pathLst>
-                <a:path w="0" h="3124565">
+                <a:path w="0" h="3386642">
                   <a:moveTo>
-                    <a:pt x="0" y="3124565"/>
+                    <a:pt x="0" y="3386642"/>
+                  </a:moveTo>
+                  <a:lnTo>
+                    <a:pt x="0" y="0"/>
+                  </a:lnTo>
+                  <a:lnTo>
+                    <a:pt x="0" y="0"/>
+                  </a:lnTo>
+                </a:path>
+              </a:pathLst>
+            </a:custGeom>
+            <a:ln w="8130" cap="flat">
+              <a:solidFill>
+                <a:srgbClr val="B0B0B0">
+                  <a:alpha val="34901"/>
+                </a:srgbClr>
+              </a:solidFill>
+              <a:prstDash val="solid"/>
+              <a:round/>
+            </a:ln>
+          </p:spPr>
+          <p:txBody>
+            <a:bodyPr/>
+            <a:lstStyle/>
+            <a:p/>
+          </p:txBody>
+        </p:sp>
+        <p:sp>
+          <p:nvSpPr>
+            <p:cNvPr id="9" name="pl9"/>
+            <p:cNvSpPr/>
+            <p:nvPr/>
+          </p:nvSpPr>
+          <p:spPr>
+            <a:xfrm>
+              <a:off x="3726958" y="1591591"/>
+              <a:ext cx="0" cy="3386642"/>
+            </a:xfrm>
+            <a:custGeom>
+              <a:avLst/>
+              <a:pathLst>
+                <a:path w="0" h="3386642">
+                  <a:moveTo>
+                    <a:pt x="0" y="3386642"/>
+                  </a:moveTo>
+                  <a:lnTo>
+                    <a:pt x="0" y="0"/>
+                  </a:lnTo>
+                  <a:lnTo>
+                    <a:pt x="0" y="0"/>
+                  </a:lnTo>
+                </a:path>
+              </a:pathLst>
+            </a:custGeom>
+            <a:ln w="8130" cap="flat">
+              <a:solidFill>
+                <a:srgbClr val="B0B0B0">
+                  <a:alpha val="34901"/>
+                </a:srgbClr>
+              </a:solidFill>
+              <a:prstDash val="solid"/>
+              <a:round/>
+            </a:ln>
+          </p:spPr>
+          <p:txBody>
+            <a:bodyPr/>
+            <a:lstStyle/>
+            <a:p/>
+          </p:txBody>
+        </p:sp>
+        <p:sp>
+          <p:nvSpPr>
+            <p:cNvPr id="10" name="pl10"/>
+            <p:cNvSpPr/>
+            <p:nvPr/>
+          </p:nvSpPr>
+          <p:spPr>
+            <a:xfrm>
+              <a:off x="4960189" y="1591591"/>
+              <a:ext cx="0" cy="3386642"/>
+            </a:xfrm>
+            <a:custGeom>
+              <a:avLst/>
+              <a:pathLst>
+                <a:path w="0" h="3386642">
+                  <a:moveTo>
+                    <a:pt x="0" y="3386642"/>
+                  </a:moveTo>
+                  <a:lnTo>
+                    <a:pt x="0" y="0"/>
+                  </a:lnTo>
+                  <a:lnTo>
+                    <a:pt x="0" y="0"/>
+                  </a:lnTo>
+                </a:path>
+              </a:pathLst>
+            </a:custGeom>
+            <a:ln w="8130" cap="flat">
+              <a:solidFill>
+                <a:srgbClr val="B0B0B0">
+                  <a:alpha val="34901"/>
+                </a:srgbClr>
+              </a:solidFill>
+              <a:prstDash val="solid"/>
+              <a:round/>
+            </a:ln>
+          </p:spPr>
+          <p:txBody>
+            <a:bodyPr/>
+            <a:lstStyle/>
+            <a:p/>
+          </p:txBody>
+        </p:sp>
+        <p:sp>
+          <p:nvSpPr>
+            <p:cNvPr id="11" name="pl11"/>
+            <p:cNvSpPr/>
+            <p:nvPr/>
+          </p:nvSpPr>
+          <p:spPr>
+            <a:xfrm>
+              <a:off x="6193421" y="1591591"/>
+              <a:ext cx="0" cy="3386642"/>
+            </a:xfrm>
+            <a:custGeom>
+              <a:avLst/>
+              <a:pathLst>
+                <a:path w="0" h="3386642">
+                  <a:moveTo>
+                    <a:pt x="0" y="3386642"/>
+                  </a:moveTo>
+                  <a:lnTo>
+                    <a:pt x="0" y="0"/>
+                  </a:lnTo>
+                  <a:lnTo>
+                    <a:pt x="0" y="0"/>
+                  </a:lnTo>
+                </a:path>
+              </a:pathLst>
+            </a:custGeom>
+            <a:ln w="8130" cap="flat">
+              <a:solidFill>
+                <a:srgbClr val="B0B0B0">
+                  <a:alpha val="34901"/>
+                </a:srgbClr>
+              </a:solidFill>
+              <a:prstDash val="solid"/>
+              <a:round/>
+            </a:ln>
+          </p:spPr>
+          <p:txBody>
+            <a:bodyPr/>
+            <a:lstStyle/>
+            <a:p/>
+          </p:txBody>
+        </p:sp>
+        <p:sp>
+          <p:nvSpPr>
+            <p:cNvPr id="12" name="pl12"/>
+            <p:cNvSpPr/>
+            <p:nvPr/>
+          </p:nvSpPr>
+          <p:spPr>
+            <a:xfrm>
+              <a:off x="7426652" y="1591591"/>
+              <a:ext cx="0" cy="3386642"/>
+            </a:xfrm>
+            <a:custGeom>
+              <a:avLst/>
+              <a:pathLst>
+                <a:path w="0" h="3386642">
+                  <a:moveTo>
+                    <a:pt x="0" y="3386642"/>
+                  </a:moveTo>
+                  <a:lnTo>
+                    <a:pt x="0" y="0"/>
+                  </a:lnTo>
+                  <a:lnTo>
+                    <a:pt x="0" y="0"/>
+                  </a:lnTo>
+                </a:path>
+              </a:pathLst>
+            </a:custGeom>
+            <a:ln w="8130" cap="flat">
+              <a:solidFill>
+                <a:srgbClr val="B0B0B0">
+                  <a:alpha val="34901"/>
+                </a:srgbClr>
+              </a:solidFill>
+              <a:prstDash val="solid"/>
+              <a:round/>
+            </a:ln>
+          </p:spPr>
+          <p:txBody>
+            <a:bodyPr/>
+            <a:lstStyle/>
+            <a:p/>
+          </p:txBody>
+        </p:sp>
+        <p:sp>
+          <p:nvSpPr>
+            <p:cNvPr id="13" name="pl13"/>
+            <p:cNvSpPr/>
+            <p:nvPr/>
+          </p:nvSpPr>
+          <p:spPr>
+            <a:xfrm>
+              <a:off x="2493727" y="1591591"/>
+              <a:ext cx="0" cy="3386642"/>
+            </a:xfrm>
+            <a:custGeom>
+              <a:avLst/>
+              <a:pathLst>
+                <a:path w="0" h="3386642">
+                  <a:moveTo>
+                    <a:pt x="0" y="3386642"/>
                   </a:moveTo>
                   <a:lnTo>
                     <a:pt x="0" y="0"/>
@@ -3325,26 +3540,31 @@
         </p:sp>
         <p:sp>
           <p:nvSpPr>
-            <p:cNvPr id="9" name="pt9"/>
-            <p:cNvSpPr/>
-            <p:nvPr/>
-          </p:nvSpPr>
-          <p:spPr>
-            <a:xfrm>
-              <a:off x="4139079" y="2770685"/>
-              <a:ext cx="84474" cy="84474"/>
-            </a:xfrm>
-            <a:prstGeom prst="ellipse">
-              <a:avLst/>
-            </a:prstGeom>
-            <a:solidFill>
-              <a:srgbClr val="2C7FB8">
-                <a:alpha val="100000"/>
-              </a:srgbClr>
-            </a:solidFill>
-            <a:ln w="8590" cap="rnd">
+            <p:cNvPr id="14" name="pl14"/>
+            <p:cNvSpPr/>
+            <p:nvPr/>
+          </p:nvSpPr>
+          <p:spPr>
+            <a:xfrm>
+              <a:off x="7238160" y="4535365"/>
+              <a:ext cx="0" cy="104204"/>
+            </a:xfrm>
+            <a:custGeom>
+              <a:avLst/>
+              <a:pathLst>
+                <a:path w="0" h="104204">
+                  <a:moveTo>
+                    <a:pt x="0" y="104204"/>
+                  </a:moveTo>
+                  <a:lnTo>
+                    <a:pt x="0" y="0"/>
+                  </a:lnTo>
+                </a:path>
+              </a:pathLst>
+            </a:custGeom>
+            <a:ln w="23036" cap="flat">
               <a:solidFill>
-                <a:srgbClr val="2C7FB8">
+                <a:srgbClr val="FB9A99">
                   <a:alpha val="100000"/>
                 </a:srgbClr>
               </a:solidFill>
@@ -3360,26 +3580,31 @@
         </p:sp>
         <p:sp>
           <p:nvSpPr>
-            <p:cNvPr id="10" name="pt10"/>
-            <p:cNvSpPr/>
-            <p:nvPr/>
-          </p:nvSpPr>
-          <p:spPr>
-            <a:xfrm>
-              <a:off x="4256592" y="4301471"/>
-              <a:ext cx="84474" cy="84474"/>
-            </a:xfrm>
-            <a:prstGeom prst="ellipse">
-              <a:avLst/>
-            </a:prstGeom>
-            <a:solidFill>
-              <a:srgbClr val="2C7FB8">
-                <a:alpha val="100000"/>
-              </a:srgbClr>
-            </a:solidFill>
-            <a:ln w="8590" cap="rnd">
+            <p:cNvPr id="15" name="pl15"/>
+            <p:cNvSpPr/>
+            <p:nvPr/>
+          </p:nvSpPr>
+          <p:spPr>
+            <a:xfrm>
+              <a:off x="3954506" y="4587467"/>
+              <a:ext cx="3283654" cy="0"/>
+            </a:xfrm>
+            <a:custGeom>
+              <a:avLst/>
+              <a:pathLst>
+                <a:path w="3283654" h="0">
+                  <a:moveTo>
+                    <a:pt x="3283654" y="0"/>
+                  </a:moveTo>
+                  <a:lnTo>
+                    <a:pt x="0" y="0"/>
+                  </a:lnTo>
+                </a:path>
+              </a:pathLst>
+            </a:custGeom>
+            <a:ln w="23036" cap="flat">
               <a:solidFill>
-                <a:srgbClr val="2C7FB8">
+                <a:srgbClr val="FB9A99">
                   <a:alpha val="100000"/>
                 </a:srgbClr>
               </a:solidFill>
@@ -3395,26 +3620,31 @@
         </p:sp>
         <p:sp>
           <p:nvSpPr>
-            <p:cNvPr id="11" name="pt11"/>
-            <p:cNvSpPr/>
-            <p:nvPr/>
-          </p:nvSpPr>
-          <p:spPr>
-            <a:xfrm>
-              <a:off x="4161288" y="2266723"/>
-              <a:ext cx="84474" cy="84474"/>
-            </a:xfrm>
-            <a:prstGeom prst="ellipse">
-              <a:avLst/>
-            </a:prstGeom>
-            <a:solidFill>
-              <a:srgbClr val="2C7FB8">
-                <a:alpha val="100000"/>
-              </a:srgbClr>
-            </a:solidFill>
-            <a:ln w="8590" cap="rnd">
+            <p:cNvPr id="16" name="pl16"/>
+            <p:cNvSpPr/>
+            <p:nvPr/>
+          </p:nvSpPr>
+          <p:spPr>
+            <a:xfrm>
+              <a:off x="3954506" y="4535365"/>
+              <a:ext cx="0" cy="104204"/>
+            </a:xfrm>
+            <a:custGeom>
+              <a:avLst/>
+              <a:pathLst>
+                <a:path w="0" h="104204">
+                  <a:moveTo>
+                    <a:pt x="0" y="104204"/>
+                  </a:moveTo>
+                  <a:lnTo>
+                    <a:pt x="0" y="0"/>
+                  </a:lnTo>
+                </a:path>
+              </a:pathLst>
+            </a:custGeom>
+            <a:ln w="23036" cap="flat">
               <a:solidFill>
-                <a:srgbClr val="2C7FB8">
+                <a:srgbClr val="FB9A99">
                   <a:alpha val="100000"/>
                 </a:srgbClr>
               </a:solidFill>
@@ -3430,26 +3660,31 @@
         </p:sp>
         <p:sp>
           <p:nvSpPr>
-            <p:cNvPr id="12" name="pt12"/>
-            <p:cNvSpPr/>
-            <p:nvPr/>
-          </p:nvSpPr>
-          <p:spPr>
-            <a:xfrm>
-              <a:off x="3940651" y="4786534"/>
-              <a:ext cx="84474" cy="84474"/>
-            </a:xfrm>
-            <a:prstGeom prst="ellipse">
-              <a:avLst/>
-            </a:prstGeom>
-            <a:solidFill>
-              <a:srgbClr val="2C7FB8">
-                <a:alpha val="100000"/>
-              </a:srgbClr>
-            </a:solidFill>
-            <a:ln w="8590" cap="rnd">
+            <p:cNvPr id="17" name="pl17"/>
+            <p:cNvSpPr/>
+            <p:nvPr/>
+          </p:nvSpPr>
+          <p:spPr>
+            <a:xfrm>
+              <a:off x="5492504" y="3884087"/>
+              <a:ext cx="0" cy="104204"/>
+            </a:xfrm>
+            <a:custGeom>
+              <a:avLst/>
+              <a:pathLst>
+                <a:path w="0" h="104204">
+                  <a:moveTo>
+                    <a:pt x="0" y="104204"/>
+                  </a:moveTo>
+                  <a:lnTo>
+                    <a:pt x="0" y="0"/>
+                  </a:lnTo>
+                </a:path>
+              </a:pathLst>
+            </a:custGeom>
+            <a:ln w="23036" cap="flat">
               <a:solidFill>
-                <a:srgbClr val="2C7FB8">
+                <a:srgbClr val="1F78B4">
                   <a:alpha val="100000"/>
                 </a:srgbClr>
               </a:solidFill>
@@ -3465,26 +3700,31 @@
         </p:sp>
         <p:sp>
           <p:nvSpPr>
-            <p:cNvPr id="13" name="pt13"/>
-            <p:cNvSpPr/>
-            <p:nvPr/>
-          </p:nvSpPr>
-          <p:spPr>
-            <a:xfrm>
-              <a:off x="4105501" y="3274647"/>
-              <a:ext cx="84474" cy="84474"/>
-            </a:xfrm>
-            <a:prstGeom prst="ellipse">
-              <a:avLst/>
-            </a:prstGeom>
-            <a:solidFill>
-              <a:srgbClr val="2C7FB8">
-                <a:alpha val="100000"/>
-              </a:srgbClr>
-            </a:solidFill>
-            <a:ln w="8590" cap="rnd">
+            <p:cNvPr id="18" name="pl18"/>
+            <p:cNvSpPr/>
+            <p:nvPr/>
+          </p:nvSpPr>
+          <p:spPr>
+            <a:xfrm>
+              <a:off x="3075052" y="3936190"/>
+              <a:ext cx="2417452" cy="0"/>
+            </a:xfrm>
+            <a:custGeom>
+              <a:avLst/>
+              <a:pathLst>
+                <a:path w="2417452" h="0">
+                  <a:moveTo>
+                    <a:pt x="2417452" y="0"/>
+                  </a:moveTo>
+                  <a:lnTo>
+                    <a:pt x="0" y="0"/>
+                  </a:lnTo>
+                </a:path>
+              </a:pathLst>
+            </a:custGeom>
+            <a:ln w="23036" cap="flat">
               <a:solidFill>
-                <a:srgbClr val="2C7FB8">
+                <a:srgbClr val="1F78B4">
                   <a:alpha val="100000"/>
                 </a:srgbClr>
               </a:solidFill>
@@ -3500,26 +3740,31 @@
         </p:sp>
         <p:sp>
           <p:nvSpPr>
-            <p:cNvPr id="14" name="pt14"/>
-            <p:cNvSpPr/>
-            <p:nvPr/>
-          </p:nvSpPr>
-          <p:spPr>
-            <a:xfrm>
-              <a:off x="4142283" y="2921874"/>
-              <a:ext cx="84474" cy="84474"/>
-            </a:xfrm>
-            <a:prstGeom prst="ellipse">
-              <a:avLst/>
-            </a:prstGeom>
-            <a:solidFill>
-              <a:srgbClr val="FC8D59">
-                <a:alpha val="100000"/>
-              </a:srgbClr>
-            </a:solidFill>
-            <a:ln w="8590" cap="rnd">
+            <p:cNvPr id="19" name="pl19"/>
+            <p:cNvSpPr/>
+            <p:nvPr/>
+          </p:nvSpPr>
+          <p:spPr>
+            <a:xfrm>
+              <a:off x="3075052" y="3884087"/>
+              <a:ext cx="0" cy="104204"/>
+            </a:xfrm>
+            <a:custGeom>
+              <a:avLst/>
+              <a:pathLst>
+                <a:path w="0" h="104204">
+                  <a:moveTo>
+                    <a:pt x="0" y="104204"/>
+                  </a:moveTo>
+                  <a:lnTo>
+                    <a:pt x="0" y="0"/>
+                  </a:lnTo>
+                </a:path>
+              </a:pathLst>
+            </a:custGeom>
+            <a:ln w="23036" cap="flat">
               <a:solidFill>
-                <a:srgbClr val="FC8D59">
+                <a:srgbClr val="1F78B4">
                   <a:alpha val="100000"/>
                 </a:srgbClr>
               </a:solidFill>
@@ -3535,26 +3780,31 @@
         </p:sp>
         <p:sp>
           <p:nvSpPr>
-            <p:cNvPr id="15" name="pt15"/>
-            <p:cNvSpPr/>
-            <p:nvPr/>
-          </p:nvSpPr>
-          <p:spPr>
-            <a:xfrm>
-              <a:off x="4269752" y="3854204"/>
-              <a:ext cx="84474" cy="84474"/>
-            </a:xfrm>
-            <a:prstGeom prst="ellipse">
-              <a:avLst/>
-            </a:prstGeom>
-            <a:solidFill>
-              <a:srgbClr val="FC8D59">
-                <a:alpha val="100000"/>
-              </a:srgbClr>
-            </a:solidFill>
-            <a:ln w="8590" cap="rnd">
+            <p:cNvPr id="20" name="pl20"/>
+            <p:cNvSpPr/>
+            <p:nvPr/>
+          </p:nvSpPr>
+          <p:spPr>
+            <a:xfrm>
+              <a:off x="4822090" y="1930255"/>
+              <a:ext cx="0" cy="104204"/>
+            </a:xfrm>
+            <a:custGeom>
+              <a:avLst/>
+              <a:pathLst>
+                <a:path w="0" h="104204">
+                  <a:moveTo>
+                    <a:pt x="0" y="104204"/>
+                  </a:moveTo>
+                  <a:lnTo>
+                    <a:pt x="0" y="0"/>
+                  </a:lnTo>
+                </a:path>
+              </a:pathLst>
+            </a:custGeom>
+            <a:ln w="23036" cap="flat">
               <a:solidFill>
-                <a:srgbClr val="FC8D59">
+                <a:srgbClr val="33A02C">
                   <a:alpha val="100000"/>
                 </a:srgbClr>
               </a:solidFill>
@@ -3570,26 +3820,31 @@
         </p:sp>
         <p:sp>
           <p:nvSpPr>
-            <p:cNvPr id="16" name="pt16"/>
-            <p:cNvSpPr/>
-            <p:nvPr/>
-          </p:nvSpPr>
-          <p:spPr>
-            <a:xfrm>
-              <a:off x="4150977" y="2417912"/>
-              <a:ext cx="84474" cy="84474"/>
-            </a:xfrm>
-            <a:prstGeom prst="ellipse">
-              <a:avLst/>
-            </a:prstGeom>
-            <a:solidFill>
-              <a:srgbClr val="FC8D59">
-                <a:alpha val="100000"/>
-              </a:srgbClr>
-            </a:solidFill>
-            <a:ln w="8590" cap="rnd">
+            <p:cNvPr id="21" name="pl21"/>
+            <p:cNvSpPr/>
+            <p:nvPr/>
+          </p:nvSpPr>
+          <p:spPr>
+            <a:xfrm>
+              <a:off x="2749108" y="1982357"/>
+              <a:ext cx="2072981" cy="0"/>
+            </a:xfrm>
+            <a:custGeom>
+              <a:avLst/>
+              <a:pathLst>
+                <a:path w="2072981" h="0">
+                  <a:moveTo>
+                    <a:pt x="2072981" y="0"/>
+                  </a:moveTo>
+                  <a:lnTo>
+                    <a:pt x="0" y="0"/>
+                  </a:lnTo>
+                </a:path>
+              </a:pathLst>
+            </a:custGeom>
+            <a:ln w="23036" cap="flat">
               <a:solidFill>
-                <a:srgbClr val="FC8D59">
+                <a:srgbClr val="33A02C">
                   <a:alpha val="100000"/>
                 </a:srgbClr>
               </a:solidFill>
@@ -3605,26 +3860,31 @@
         </p:sp>
         <p:sp>
           <p:nvSpPr>
-            <p:cNvPr id="17" name="pt17"/>
-            <p:cNvSpPr/>
-            <p:nvPr/>
-          </p:nvSpPr>
-          <p:spPr>
-            <a:xfrm>
-              <a:off x="3943884" y="4937723"/>
-              <a:ext cx="84474" cy="84474"/>
-            </a:xfrm>
-            <a:prstGeom prst="ellipse">
-              <a:avLst/>
-            </a:prstGeom>
-            <a:solidFill>
-              <a:srgbClr val="FC8D59">
-                <a:alpha val="100000"/>
-              </a:srgbClr>
-            </a:solidFill>
-            <a:ln w="8590" cap="rnd">
+            <p:cNvPr id="22" name="pl22"/>
+            <p:cNvSpPr/>
+            <p:nvPr/>
+          </p:nvSpPr>
+          <p:spPr>
+            <a:xfrm>
+              <a:off x="2749108" y="1930255"/>
+              <a:ext cx="0" cy="104204"/>
+            </a:xfrm>
+            <a:custGeom>
+              <a:avLst/>
+              <a:pathLst>
+                <a:path w="0" h="104204">
+                  <a:moveTo>
+                    <a:pt x="0" y="104204"/>
+                  </a:moveTo>
+                  <a:lnTo>
+                    <a:pt x="0" y="0"/>
+                  </a:lnTo>
+                </a:path>
+              </a:pathLst>
+            </a:custGeom>
+            <a:ln w="23036" cap="flat">
               <a:solidFill>
-                <a:srgbClr val="FC8D59">
+                <a:srgbClr val="33A02C">
                   <a:alpha val="100000"/>
                 </a:srgbClr>
               </a:solidFill>
@@ -3640,26 +3900,31 @@
         </p:sp>
         <p:sp>
           <p:nvSpPr>
-            <p:cNvPr id="18" name="pt18"/>
-            <p:cNvSpPr/>
-            <p:nvPr/>
-          </p:nvSpPr>
-          <p:spPr>
-            <a:xfrm>
-              <a:off x="4108760" y="3425836"/>
-              <a:ext cx="84474" cy="84474"/>
-            </a:xfrm>
-            <a:prstGeom prst="ellipse">
-              <a:avLst/>
-            </a:prstGeom>
-            <a:solidFill>
-              <a:srgbClr val="FC8D59">
-                <a:alpha val="100000"/>
-              </a:srgbClr>
-            </a:solidFill>
-            <a:ln w="8590" cap="rnd">
+            <p:cNvPr id="23" name="pl23"/>
+            <p:cNvSpPr/>
+            <p:nvPr/>
+          </p:nvSpPr>
+          <p:spPr>
+            <a:xfrm>
+              <a:off x="3205629" y="3232810"/>
+              <a:ext cx="0" cy="104204"/>
+            </a:xfrm>
+            <a:custGeom>
+              <a:avLst/>
+              <a:pathLst>
+                <a:path w="0" h="104204">
+                  <a:moveTo>
+                    <a:pt x="0" y="104204"/>
+                  </a:moveTo>
+                  <a:lnTo>
+                    <a:pt x="0" y="0"/>
+                  </a:lnTo>
+                </a:path>
+              </a:pathLst>
+            </a:custGeom>
+            <a:ln w="23036" cap="flat">
               <a:solidFill>
-                <a:srgbClr val="FC8D59">
+                <a:srgbClr val="6A3D9A">
                   <a:alpha val="100000"/>
                 </a:srgbClr>
               </a:solidFill>
@@ -3675,26 +3940,31 @@
         </p:sp>
         <p:sp>
           <p:nvSpPr>
-            <p:cNvPr id="19" name="pt19"/>
-            <p:cNvSpPr/>
-            <p:nvPr/>
-          </p:nvSpPr>
-          <p:spPr>
-            <a:xfrm>
-              <a:off x="5045462" y="2846280"/>
-              <a:ext cx="84474" cy="84474"/>
-            </a:xfrm>
-            <a:prstGeom prst="ellipse">
-              <a:avLst/>
-            </a:prstGeom>
-            <a:solidFill>
-              <a:srgbClr val="31A354">
-                <a:alpha val="100000"/>
-              </a:srgbClr>
-            </a:solidFill>
-            <a:ln w="8590" cap="rnd">
+            <p:cNvPr id="24" name="pl24"/>
+            <p:cNvSpPr/>
+            <p:nvPr/>
+          </p:nvSpPr>
+          <p:spPr>
+            <a:xfrm>
+              <a:off x="2512848" y="3284912"/>
+              <a:ext cx="692781" cy="0"/>
+            </a:xfrm>
+            <a:custGeom>
+              <a:avLst/>
+              <a:pathLst>
+                <a:path w="692781" h="0">
+                  <a:moveTo>
+                    <a:pt x="692781" y="0"/>
+                  </a:moveTo>
+                  <a:lnTo>
+                    <a:pt x="0" y="0"/>
+                  </a:lnTo>
+                </a:path>
+              </a:pathLst>
+            </a:custGeom>
+            <a:ln w="23036" cap="flat">
               <a:solidFill>
-                <a:srgbClr val="31A354">
+                <a:srgbClr val="6A3D9A">
                   <a:alpha val="100000"/>
                 </a:srgbClr>
               </a:solidFill>
@@ -3710,26 +3980,31 @@
         </p:sp>
         <p:sp>
           <p:nvSpPr>
-            <p:cNvPr id="20" name="pt20"/>
-            <p:cNvSpPr/>
-            <p:nvPr/>
-          </p:nvSpPr>
-          <p:spPr>
-            <a:xfrm>
-              <a:off x="4304607" y="4414862"/>
-              <a:ext cx="84474" cy="84474"/>
-            </a:xfrm>
-            <a:prstGeom prst="ellipse">
-              <a:avLst/>
-            </a:prstGeom>
-            <a:solidFill>
-              <a:srgbClr val="31A354">
-                <a:alpha val="100000"/>
-              </a:srgbClr>
-            </a:solidFill>
-            <a:ln w="8590" cap="rnd">
+            <p:cNvPr id="25" name="pl25"/>
+            <p:cNvSpPr/>
+            <p:nvPr/>
+          </p:nvSpPr>
+          <p:spPr>
+            <a:xfrm>
+              <a:off x="2512848" y="3232810"/>
+              <a:ext cx="0" cy="104204"/>
+            </a:xfrm>
+            <a:custGeom>
+              <a:avLst/>
+              <a:pathLst>
+                <a:path w="0" h="104204">
+                  <a:moveTo>
+                    <a:pt x="0" y="104204"/>
+                  </a:moveTo>
+                  <a:lnTo>
+                    <a:pt x="0" y="0"/>
+                  </a:lnTo>
+                </a:path>
+              </a:pathLst>
+            </a:custGeom>
+            <a:ln w="23036" cap="flat">
               <a:solidFill>
-                <a:srgbClr val="31A354">
+                <a:srgbClr val="6A3D9A">
                   <a:alpha val="100000"/>
                 </a:srgbClr>
               </a:solidFill>
@@ -3745,26 +4020,31 @@
         </p:sp>
         <p:sp>
           <p:nvSpPr>
-            <p:cNvPr id="21" name="pt21"/>
-            <p:cNvSpPr/>
-            <p:nvPr/>
-          </p:nvSpPr>
-          <p:spPr>
-            <a:xfrm>
-              <a:off x="4106576" y="2342317"/>
-              <a:ext cx="84474" cy="84474"/>
-            </a:xfrm>
-            <a:prstGeom prst="ellipse">
-              <a:avLst/>
-            </a:prstGeom>
-            <a:solidFill>
-              <a:srgbClr val="31A354">
-                <a:alpha val="100000"/>
-              </a:srgbClr>
-            </a:solidFill>
-            <a:ln w="8590" cap="rnd">
+            <p:cNvPr id="26" name="pl26"/>
+            <p:cNvSpPr/>
+            <p:nvPr/>
+          </p:nvSpPr>
+          <p:spPr>
+            <a:xfrm>
+              <a:off x="3218237" y="2581532"/>
+              <a:ext cx="0" cy="104204"/>
+            </a:xfrm>
+            <a:custGeom>
+              <a:avLst/>
+              <a:pathLst>
+                <a:path w="0" h="104204">
+                  <a:moveTo>
+                    <a:pt x="0" y="104204"/>
+                  </a:moveTo>
+                  <a:lnTo>
+                    <a:pt x="0" y="0"/>
+                  </a:lnTo>
+                </a:path>
+              </a:pathLst>
+            </a:custGeom>
+            <a:ln w="23036" cap="flat">
               <a:solidFill>
-                <a:srgbClr val="31A354">
+                <a:srgbClr val="A6CEE3">
                   <a:alpha val="100000"/>
                 </a:srgbClr>
               </a:solidFill>
@@ -3780,26 +4060,31 @@
         </p:sp>
         <p:sp>
           <p:nvSpPr>
-            <p:cNvPr id="22" name="pt22"/>
-            <p:cNvSpPr/>
-            <p:nvPr/>
-          </p:nvSpPr>
-          <p:spPr>
-            <a:xfrm>
-              <a:off x="3940030" y="4862128"/>
-              <a:ext cx="84474" cy="84474"/>
-            </a:xfrm>
-            <a:prstGeom prst="ellipse">
-              <a:avLst/>
-            </a:prstGeom>
-            <a:solidFill>
-              <a:srgbClr val="31A354">
-                <a:alpha val="100000"/>
-              </a:srgbClr>
-            </a:solidFill>
-            <a:ln w="8590" cap="rnd">
+            <p:cNvPr id="27" name="pl27"/>
+            <p:cNvSpPr/>
+            <p:nvPr/>
+          </p:nvSpPr>
+          <p:spPr>
+            <a:xfrm>
+              <a:off x="2493727" y="2633635"/>
+              <a:ext cx="724510" cy="0"/>
+            </a:xfrm>
+            <a:custGeom>
+              <a:avLst/>
+              <a:pathLst>
+                <a:path w="724510" h="0">
+                  <a:moveTo>
+                    <a:pt x="724510" y="0"/>
+                  </a:moveTo>
+                  <a:lnTo>
+                    <a:pt x="0" y="0"/>
+                  </a:lnTo>
+                </a:path>
+              </a:pathLst>
+            </a:custGeom>
+            <a:ln w="23036" cap="flat">
               <a:solidFill>
-                <a:srgbClr val="31A354">
+                <a:srgbClr val="A6CEE3">
                   <a:alpha val="100000"/>
                 </a:srgbClr>
               </a:solidFill>
@@ -3815,26 +4100,31 @@
         </p:sp>
         <p:sp>
           <p:nvSpPr>
-            <p:cNvPr id="23" name="pt23"/>
-            <p:cNvSpPr/>
-            <p:nvPr/>
-          </p:nvSpPr>
-          <p:spPr>
-            <a:xfrm>
-              <a:off x="4139249" y="3350242"/>
-              <a:ext cx="84474" cy="84474"/>
-            </a:xfrm>
-            <a:prstGeom prst="ellipse">
-              <a:avLst/>
-            </a:prstGeom>
-            <a:solidFill>
-              <a:srgbClr val="31A354">
-                <a:alpha val="100000"/>
-              </a:srgbClr>
-            </a:solidFill>
-            <a:ln w="8590" cap="rnd">
+            <p:cNvPr id="28" name="pl28"/>
+            <p:cNvSpPr/>
+            <p:nvPr/>
+          </p:nvSpPr>
+          <p:spPr>
+            <a:xfrm>
+              <a:off x="2493727" y="2581532"/>
+              <a:ext cx="0" cy="104204"/>
+            </a:xfrm>
+            <a:custGeom>
+              <a:avLst/>
+              <a:pathLst>
+                <a:path w="0" h="104204">
+                  <a:moveTo>
+                    <a:pt x="0" y="104204"/>
+                  </a:moveTo>
+                  <a:lnTo>
+                    <a:pt x="0" y="0"/>
+                  </a:lnTo>
+                </a:path>
+              </a:pathLst>
+            </a:custGeom>
+            <a:ln w="23036" cap="flat">
               <a:solidFill>
-                <a:srgbClr val="31A354">
+                <a:srgbClr val="A6CEE3">
                   <a:alpha val="100000"/>
                 </a:srgbClr>
               </a:solidFill>
@@ -3850,31 +4140,26 @@
         </p:sp>
         <p:sp>
           <p:nvSpPr>
-            <p:cNvPr id="24" name="pl24"/>
-            <p:cNvSpPr/>
-            <p:nvPr/>
-          </p:nvSpPr>
-          <p:spPr>
-            <a:xfrm>
-              <a:off x="4263869" y="2801163"/>
-              <a:ext cx="0" cy="23518"/>
-            </a:xfrm>
-            <a:custGeom>
-              <a:avLst/>
-              <a:pathLst>
-                <a:path w="0" h="23518">
-                  <a:moveTo>
-                    <a:pt x="0" y="23518"/>
-                  </a:moveTo>
-                  <a:lnTo>
-                    <a:pt x="0" y="0"/>
-                  </a:lnTo>
-                </a:path>
-              </a:pathLst>
-            </a:custGeom>
-            <a:ln w="20325" cap="flat">
+            <p:cNvPr id="29" name="pt29"/>
+            <p:cNvSpPr/>
+            <p:nvPr/>
+          </p:nvSpPr>
+          <p:spPr>
+            <a:xfrm>
+              <a:off x="5313494" y="4539932"/>
+              <a:ext cx="95069" cy="95069"/>
+            </a:xfrm>
+            <a:prstGeom prst="ellipse">
+              <a:avLst/>
+            </a:prstGeom>
+            <a:solidFill>
+              <a:srgbClr val="FB9A99">
+                <a:alpha val="100000"/>
+              </a:srgbClr>
+            </a:solidFill>
+            <a:ln w="8345" cap="rnd">
               <a:solidFill>
-                <a:srgbClr val="2C7FB8">
+                <a:srgbClr val="FB9A99">
                   <a:alpha val="100000"/>
                 </a:srgbClr>
               </a:solidFill>
@@ -3890,31 +4175,26 @@
         </p:sp>
         <p:sp>
           <p:nvSpPr>
-            <p:cNvPr id="25" name="pl25"/>
-            <p:cNvSpPr/>
-            <p:nvPr/>
-          </p:nvSpPr>
-          <p:spPr>
-            <a:xfrm>
-              <a:off x="4098764" y="2812922"/>
-              <a:ext cx="165105" cy="0"/>
-            </a:xfrm>
-            <a:custGeom>
-              <a:avLst/>
-              <a:pathLst>
-                <a:path w="165105" h="0">
-                  <a:moveTo>
-                    <a:pt x="165105" y="0"/>
-                  </a:moveTo>
-                  <a:lnTo>
-                    <a:pt x="0" y="0"/>
-                  </a:lnTo>
-                </a:path>
-              </a:pathLst>
-            </a:custGeom>
-            <a:ln w="20325" cap="flat">
+            <p:cNvPr id="30" name="pt30"/>
+            <p:cNvSpPr/>
+            <p:nvPr/>
+          </p:nvSpPr>
+          <p:spPr>
+            <a:xfrm>
+              <a:off x="4112762" y="3888655"/>
+              <a:ext cx="95069" cy="95069"/>
+            </a:xfrm>
+            <a:prstGeom prst="ellipse">
+              <a:avLst/>
+            </a:prstGeom>
+            <a:solidFill>
+              <a:srgbClr val="1F78B4">
+                <a:alpha val="100000"/>
+              </a:srgbClr>
+            </a:solidFill>
+            <a:ln w="8345" cap="rnd">
               <a:solidFill>
-                <a:srgbClr val="2C7FB8">
+                <a:srgbClr val="1F78B4">
                   <a:alpha val="100000"/>
                 </a:srgbClr>
               </a:solidFill>
@@ -3930,31 +4210,26 @@
         </p:sp>
         <p:sp>
           <p:nvSpPr>
-            <p:cNvPr id="26" name="pl26"/>
-            <p:cNvSpPr/>
-            <p:nvPr/>
-          </p:nvSpPr>
-          <p:spPr>
-            <a:xfrm>
-              <a:off x="4098764" y="2801163"/>
-              <a:ext cx="0" cy="23518"/>
-            </a:xfrm>
-            <a:custGeom>
-              <a:avLst/>
-              <a:pathLst>
-                <a:path w="0" h="23518">
-                  <a:moveTo>
-                    <a:pt x="0" y="23518"/>
-                  </a:moveTo>
-                  <a:lnTo>
-                    <a:pt x="0" y="0"/>
-                  </a:lnTo>
-                </a:path>
-              </a:pathLst>
-            </a:custGeom>
-            <a:ln w="20325" cap="flat">
+            <p:cNvPr id="31" name="pt31"/>
+            <p:cNvSpPr/>
+            <p:nvPr/>
+          </p:nvSpPr>
+          <p:spPr>
+            <a:xfrm>
+              <a:off x="3691665" y="1934822"/>
+              <a:ext cx="95069" cy="95069"/>
+            </a:xfrm>
+            <a:prstGeom prst="ellipse">
+              <a:avLst/>
+            </a:prstGeom>
+            <a:solidFill>
+              <a:srgbClr val="33A02C">
+                <a:alpha val="100000"/>
+              </a:srgbClr>
+            </a:solidFill>
+            <a:ln w="8345" cap="rnd">
               <a:solidFill>
-                <a:srgbClr val="2C7FB8">
+                <a:srgbClr val="33A02C">
                   <a:alpha val="100000"/>
                 </a:srgbClr>
               </a:solidFill>
@@ -3970,31 +4245,26 @@
         </p:sp>
         <p:sp>
           <p:nvSpPr>
-            <p:cNvPr id="27" name="pl27"/>
-            <p:cNvSpPr/>
-            <p:nvPr/>
-          </p:nvSpPr>
-          <p:spPr>
-            <a:xfrm>
-              <a:off x="4415584" y="4326069"/>
-              <a:ext cx="0" cy="35277"/>
-            </a:xfrm>
-            <a:custGeom>
-              <a:avLst/>
-              <a:pathLst>
-                <a:path w="0" h="35277">
-                  <a:moveTo>
-                    <a:pt x="0" y="35277"/>
-                  </a:moveTo>
-                  <a:lnTo>
-                    <a:pt x="0" y="0"/>
-                  </a:lnTo>
-                </a:path>
-              </a:pathLst>
-            </a:custGeom>
-            <a:ln w="20325" cap="flat">
+            <p:cNvPr id="32" name="pt32"/>
+            <p:cNvSpPr/>
+            <p:nvPr/>
+          </p:nvSpPr>
+          <p:spPr>
+            <a:xfrm>
+              <a:off x="2637642" y="3237377"/>
+              <a:ext cx="95069" cy="95069"/>
+            </a:xfrm>
+            <a:prstGeom prst="ellipse">
+              <a:avLst/>
+            </a:prstGeom>
+            <a:solidFill>
+              <a:srgbClr val="6A3D9A">
+                <a:alpha val="100000"/>
+              </a:srgbClr>
+            </a:solidFill>
+            <a:ln w="8345" cap="rnd">
               <a:solidFill>
-                <a:srgbClr val="2C7FB8">
+                <a:srgbClr val="6A3D9A">
                   <a:alpha val="100000"/>
                 </a:srgbClr>
               </a:solidFill>
@@ -4010,31 +4280,26 @@
         </p:sp>
         <p:sp>
           <p:nvSpPr>
-            <p:cNvPr id="28" name="pl28"/>
-            <p:cNvSpPr/>
-            <p:nvPr/>
-          </p:nvSpPr>
-          <p:spPr>
-            <a:xfrm>
-              <a:off x="4182074" y="4343708"/>
-              <a:ext cx="233510" cy="0"/>
-            </a:xfrm>
-            <a:custGeom>
-              <a:avLst/>
-              <a:pathLst>
-                <a:path w="233510" h="0">
-                  <a:moveTo>
-                    <a:pt x="233510" y="0"/>
-                  </a:moveTo>
-                  <a:lnTo>
-                    <a:pt x="0" y="0"/>
-                  </a:lnTo>
-                </a:path>
-              </a:pathLst>
-            </a:custGeom>
-            <a:ln w="20325" cap="flat">
+            <p:cNvPr id="33" name="pt33"/>
+            <p:cNvSpPr/>
+            <p:nvPr/>
+          </p:nvSpPr>
+          <p:spPr>
+            <a:xfrm>
+              <a:off x="2641555" y="2586100"/>
+              <a:ext cx="95069" cy="95069"/>
+            </a:xfrm>
+            <a:prstGeom prst="ellipse">
+              <a:avLst/>
+            </a:prstGeom>
+            <a:solidFill>
+              <a:srgbClr val="A6CEE3">
+                <a:alpha val="100000"/>
+              </a:srgbClr>
+            </a:solidFill>
+            <a:ln w="8345" cap="rnd">
               <a:solidFill>
-                <a:srgbClr val="2C7FB8">
+                <a:srgbClr val="A6CEE3">
                   <a:alpha val="100000"/>
                 </a:srgbClr>
               </a:solidFill>
@@ -4050,21 +4315,21 @@
         </p:sp>
         <p:sp>
           <p:nvSpPr>
-            <p:cNvPr id="29" name="pl29"/>
-            <p:cNvSpPr/>
-            <p:nvPr/>
-          </p:nvSpPr>
-          <p:spPr>
-            <a:xfrm>
-              <a:off x="4182074" y="4326069"/>
-              <a:ext cx="0" cy="35277"/>
+            <p:cNvPr id="34" name="pl34"/>
+            <p:cNvSpPr/>
+            <p:nvPr/>
+          </p:nvSpPr>
+          <p:spPr>
+            <a:xfrm>
+              <a:off x="2256505" y="1591591"/>
+              <a:ext cx="0" cy="3386642"/>
             </a:xfrm>
             <a:custGeom>
               <a:avLst/>
               <a:pathLst>
-                <a:path w="0" h="35277">
+                <a:path w="0" h="3386642">
                   <a:moveTo>
-                    <a:pt x="0" y="35277"/>
+                    <a:pt x="0" y="3386642"/>
                   </a:moveTo>
                   <a:lnTo>
                     <a:pt x="0" y="0"/>
@@ -4072,1607 +4337,7 @@
                 </a:path>
               </a:pathLst>
             </a:custGeom>
-            <a:ln w="20325" cap="flat">
-              <a:solidFill>
-                <a:srgbClr val="2C7FB8">
-                  <a:alpha val="100000"/>
-                </a:srgbClr>
-              </a:solidFill>
-              <a:prstDash val="solid"/>
-              <a:round/>
-            </a:ln>
-          </p:spPr>
-          <p:txBody>
-            <a:bodyPr/>
-            <a:lstStyle/>
-            <a:p/>
-          </p:txBody>
-        </p:sp>
-        <p:sp>
-          <p:nvSpPr>
-            <p:cNvPr id="30" name="pl30"/>
-            <p:cNvSpPr/>
-            <p:nvPr/>
-          </p:nvSpPr>
-          <p:spPr>
-            <a:xfrm>
-              <a:off x="4325256" y="2297201"/>
-              <a:ext cx="0" cy="23518"/>
-            </a:xfrm>
-            <a:custGeom>
-              <a:avLst/>
-              <a:pathLst>
-                <a:path w="0" h="23518">
-                  <a:moveTo>
-                    <a:pt x="0" y="23518"/>
-                  </a:moveTo>
-                  <a:lnTo>
-                    <a:pt x="0" y="0"/>
-                  </a:lnTo>
-                </a:path>
-              </a:pathLst>
-            </a:custGeom>
-            <a:ln w="20325" cap="flat">
-              <a:solidFill>
-                <a:srgbClr val="2C7FB8">
-                  <a:alpha val="100000"/>
-                </a:srgbClr>
-              </a:solidFill>
-              <a:prstDash val="solid"/>
-              <a:round/>
-            </a:ln>
-          </p:spPr>
-          <p:txBody>
-            <a:bodyPr/>
-            <a:lstStyle/>
-            <a:p/>
-          </p:txBody>
-        </p:sp>
-        <p:sp>
-          <p:nvSpPr>
-            <p:cNvPr id="31" name="pl31"/>
-            <p:cNvSpPr/>
-            <p:nvPr/>
-          </p:nvSpPr>
-          <p:spPr>
-            <a:xfrm>
-              <a:off x="4081794" y="2308960"/>
-              <a:ext cx="243462" cy="0"/>
-            </a:xfrm>
-            <a:custGeom>
-              <a:avLst/>
-              <a:pathLst>
-                <a:path w="243462" h="0">
-                  <a:moveTo>
-                    <a:pt x="243462" y="0"/>
-                  </a:moveTo>
-                  <a:lnTo>
-                    <a:pt x="0" y="0"/>
-                  </a:lnTo>
-                </a:path>
-              </a:pathLst>
-            </a:custGeom>
-            <a:ln w="20325" cap="flat">
-              <a:solidFill>
-                <a:srgbClr val="2C7FB8">
-                  <a:alpha val="100000"/>
-                </a:srgbClr>
-              </a:solidFill>
-              <a:prstDash val="solid"/>
-              <a:round/>
-            </a:ln>
-          </p:spPr>
-          <p:txBody>
-            <a:bodyPr/>
-            <a:lstStyle/>
-            <a:p/>
-          </p:txBody>
-        </p:sp>
-        <p:sp>
-          <p:nvSpPr>
-            <p:cNvPr id="32" name="pl32"/>
-            <p:cNvSpPr/>
-            <p:nvPr/>
-          </p:nvSpPr>
-          <p:spPr>
-            <a:xfrm>
-              <a:off x="4081794" y="2297201"/>
-              <a:ext cx="0" cy="23518"/>
-            </a:xfrm>
-            <a:custGeom>
-              <a:avLst/>
-              <a:pathLst>
-                <a:path w="0" h="23518">
-                  <a:moveTo>
-                    <a:pt x="0" y="23518"/>
-                  </a:moveTo>
-                  <a:lnTo>
-                    <a:pt x="0" y="0"/>
-                  </a:lnTo>
-                </a:path>
-              </a:pathLst>
-            </a:custGeom>
-            <a:ln w="20325" cap="flat">
-              <a:solidFill>
-                <a:srgbClr val="2C7FB8">
-                  <a:alpha val="100000"/>
-                </a:srgbClr>
-              </a:solidFill>
-              <a:prstDash val="solid"/>
-              <a:round/>
-            </a:ln>
-          </p:spPr>
-          <p:txBody>
-            <a:bodyPr/>
-            <a:lstStyle/>
-            <a:p/>
-          </p:txBody>
-        </p:sp>
-        <p:sp>
-          <p:nvSpPr>
-            <p:cNvPr id="33" name="pl33"/>
-            <p:cNvSpPr/>
-            <p:nvPr/>
-          </p:nvSpPr>
-          <p:spPr>
-            <a:xfrm>
-              <a:off x="4056884" y="4817012"/>
-              <a:ext cx="0" cy="23518"/>
-            </a:xfrm>
-            <a:custGeom>
-              <a:avLst/>
-              <a:pathLst>
-                <a:path w="0" h="23518">
-                  <a:moveTo>
-                    <a:pt x="0" y="23518"/>
-                  </a:moveTo>
-                  <a:lnTo>
-                    <a:pt x="0" y="0"/>
-                  </a:lnTo>
-                </a:path>
-              </a:pathLst>
-            </a:custGeom>
-            <a:ln w="20325" cap="flat">
-              <a:solidFill>
-                <a:srgbClr val="2C7FB8">
-                  <a:alpha val="100000"/>
-                </a:srgbClr>
-              </a:solidFill>
-              <a:prstDash val="solid"/>
-              <a:round/>
-            </a:ln>
-          </p:spPr>
-          <p:txBody>
-            <a:bodyPr/>
-            <a:lstStyle/>
-            <a:p/>
-          </p:txBody>
-        </p:sp>
-        <p:sp>
-          <p:nvSpPr>
-            <p:cNvPr id="34" name="pl34"/>
-            <p:cNvSpPr/>
-            <p:nvPr/>
-          </p:nvSpPr>
-          <p:spPr>
-            <a:xfrm>
-              <a:off x="3908892" y="4828771"/>
-              <a:ext cx="147992" cy="0"/>
-            </a:xfrm>
-            <a:custGeom>
-              <a:avLst/>
-              <a:pathLst>
-                <a:path w="147992" h="0">
-                  <a:moveTo>
-                    <a:pt x="147992" y="0"/>
-                  </a:moveTo>
-                  <a:lnTo>
-                    <a:pt x="0" y="0"/>
-                  </a:lnTo>
-                </a:path>
-              </a:pathLst>
-            </a:custGeom>
-            <a:ln w="20325" cap="flat">
-              <a:solidFill>
-                <a:srgbClr val="2C7FB8">
-                  <a:alpha val="100000"/>
-                </a:srgbClr>
-              </a:solidFill>
-              <a:prstDash val="solid"/>
-              <a:round/>
-            </a:ln>
-          </p:spPr>
-          <p:txBody>
-            <a:bodyPr/>
-            <a:lstStyle/>
-            <a:p/>
-          </p:txBody>
-        </p:sp>
-        <p:sp>
-          <p:nvSpPr>
-            <p:cNvPr id="35" name="pl35"/>
-            <p:cNvSpPr/>
-            <p:nvPr/>
-          </p:nvSpPr>
-          <p:spPr>
-            <a:xfrm>
-              <a:off x="3908892" y="4817012"/>
-              <a:ext cx="0" cy="23518"/>
-            </a:xfrm>
-            <a:custGeom>
-              <a:avLst/>
-              <a:pathLst>
-                <a:path w="0" h="23518">
-                  <a:moveTo>
-                    <a:pt x="0" y="23518"/>
-                  </a:moveTo>
-                  <a:lnTo>
-                    <a:pt x="0" y="0"/>
-                  </a:lnTo>
-                </a:path>
-              </a:pathLst>
-            </a:custGeom>
-            <a:ln w="20325" cap="flat">
-              <a:solidFill>
-                <a:srgbClr val="2C7FB8">
-                  <a:alpha val="100000"/>
-                </a:srgbClr>
-              </a:solidFill>
-              <a:prstDash val="solid"/>
-              <a:round/>
-            </a:ln>
-          </p:spPr>
-          <p:txBody>
-            <a:bodyPr/>
-            <a:lstStyle/>
-            <a:p/>
-          </p:txBody>
-        </p:sp>
-        <p:sp>
-          <p:nvSpPr>
-            <p:cNvPr id="36" name="pl36"/>
-            <p:cNvSpPr/>
-            <p:nvPr/>
-          </p:nvSpPr>
-          <p:spPr>
-            <a:xfrm>
-              <a:off x="4222309" y="3305126"/>
-              <a:ext cx="0" cy="23518"/>
-            </a:xfrm>
-            <a:custGeom>
-              <a:avLst/>
-              <a:pathLst>
-                <a:path w="0" h="23518">
-                  <a:moveTo>
-                    <a:pt x="0" y="23518"/>
-                  </a:moveTo>
-                  <a:lnTo>
-                    <a:pt x="0" y="0"/>
-                  </a:lnTo>
-                </a:path>
-              </a:pathLst>
-            </a:custGeom>
-            <a:ln w="20325" cap="flat">
-              <a:solidFill>
-                <a:srgbClr val="2C7FB8">
-                  <a:alpha val="100000"/>
-                </a:srgbClr>
-              </a:solidFill>
-              <a:prstDash val="solid"/>
-              <a:round/>
-            </a:ln>
-          </p:spPr>
-          <p:txBody>
-            <a:bodyPr/>
-            <a:lstStyle/>
-            <a:p/>
-          </p:txBody>
-        </p:sp>
-        <p:sp>
-          <p:nvSpPr>
-            <p:cNvPr id="37" name="pl37"/>
-            <p:cNvSpPr/>
-            <p:nvPr/>
-          </p:nvSpPr>
-          <p:spPr>
-            <a:xfrm>
-              <a:off x="4073168" y="3316885"/>
-              <a:ext cx="149141" cy="0"/>
-            </a:xfrm>
-            <a:custGeom>
-              <a:avLst/>
-              <a:pathLst>
-                <a:path w="149141" h="0">
-                  <a:moveTo>
-                    <a:pt x="149141" y="0"/>
-                  </a:moveTo>
-                  <a:lnTo>
-                    <a:pt x="0" y="0"/>
-                  </a:lnTo>
-                </a:path>
-              </a:pathLst>
-            </a:custGeom>
-            <a:ln w="20325" cap="flat">
-              <a:solidFill>
-                <a:srgbClr val="2C7FB8">
-                  <a:alpha val="100000"/>
-                </a:srgbClr>
-              </a:solidFill>
-              <a:prstDash val="solid"/>
-              <a:round/>
-            </a:ln>
-          </p:spPr>
-          <p:txBody>
-            <a:bodyPr/>
-            <a:lstStyle/>
-            <a:p/>
-          </p:txBody>
-        </p:sp>
-        <p:sp>
-          <p:nvSpPr>
-            <p:cNvPr id="38" name="pl38"/>
-            <p:cNvSpPr/>
-            <p:nvPr/>
-          </p:nvSpPr>
-          <p:spPr>
-            <a:xfrm>
-              <a:off x="4073168" y="3305126"/>
-              <a:ext cx="0" cy="23518"/>
-            </a:xfrm>
-            <a:custGeom>
-              <a:avLst/>
-              <a:pathLst>
-                <a:path w="0" h="23518">
-                  <a:moveTo>
-                    <a:pt x="0" y="23518"/>
-                  </a:moveTo>
-                  <a:lnTo>
-                    <a:pt x="0" y="0"/>
-                  </a:lnTo>
-                </a:path>
-              </a:pathLst>
-            </a:custGeom>
-            <a:ln w="20325" cap="flat">
-              <a:solidFill>
-                <a:srgbClr val="2C7FB8">
-                  <a:alpha val="100000"/>
-                </a:srgbClr>
-              </a:solidFill>
-              <a:prstDash val="solid"/>
-              <a:round/>
-            </a:ln>
-          </p:spPr>
-          <p:txBody>
-            <a:bodyPr/>
-            <a:lstStyle/>
-            <a:p/>
-          </p:txBody>
-        </p:sp>
-        <p:sp>
-          <p:nvSpPr>
-            <p:cNvPr id="39" name="pl39"/>
-            <p:cNvSpPr/>
-            <p:nvPr/>
-          </p:nvSpPr>
-          <p:spPr>
-            <a:xfrm>
-              <a:off x="4265601" y="2952352"/>
-              <a:ext cx="0" cy="23518"/>
-            </a:xfrm>
-            <a:custGeom>
-              <a:avLst/>
-              <a:pathLst>
-                <a:path w="0" h="23518">
-                  <a:moveTo>
-                    <a:pt x="0" y="23518"/>
-                  </a:moveTo>
-                  <a:lnTo>
-                    <a:pt x="0" y="0"/>
-                  </a:lnTo>
-                </a:path>
-              </a:pathLst>
-            </a:custGeom>
-            <a:ln w="20325" cap="flat">
-              <a:solidFill>
-                <a:srgbClr val="FC8D59">
-                  <a:alpha val="100000"/>
-                </a:srgbClr>
-              </a:solidFill>
-              <a:prstDash val="solid"/>
-              <a:round/>
-            </a:ln>
-          </p:spPr>
-          <p:txBody>
-            <a:bodyPr/>
-            <a:lstStyle/>
-            <a:p/>
-          </p:txBody>
-        </p:sp>
-        <p:sp>
-          <p:nvSpPr>
-            <p:cNvPr id="40" name="pl40"/>
-            <p:cNvSpPr/>
-            <p:nvPr/>
-          </p:nvSpPr>
-          <p:spPr>
-            <a:xfrm>
-              <a:off x="4103440" y="2964111"/>
-              <a:ext cx="162161" cy="0"/>
-            </a:xfrm>
-            <a:custGeom>
-              <a:avLst/>
-              <a:pathLst>
-                <a:path w="162161" h="0">
-                  <a:moveTo>
-                    <a:pt x="162161" y="0"/>
-                  </a:moveTo>
-                  <a:lnTo>
-                    <a:pt x="0" y="0"/>
-                  </a:lnTo>
-                </a:path>
-              </a:pathLst>
-            </a:custGeom>
-            <a:ln w="20325" cap="flat">
-              <a:solidFill>
-                <a:srgbClr val="FC8D59">
-                  <a:alpha val="100000"/>
-                </a:srgbClr>
-              </a:solidFill>
-              <a:prstDash val="solid"/>
-              <a:round/>
-            </a:ln>
-          </p:spPr>
-          <p:txBody>
-            <a:bodyPr/>
-            <a:lstStyle/>
-            <a:p/>
-          </p:txBody>
-        </p:sp>
-        <p:sp>
-          <p:nvSpPr>
-            <p:cNvPr id="41" name="pl41"/>
-            <p:cNvSpPr/>
-            <p:nvPr/>
-          </p:nvSpPr>
-          <p:spPr>
-            <a:xfrm>
-              <a:off x="4103440" y="2952352"/>
-              <a:ext cx="0" cy="23518"/>
-            </a:xfrm>
-            <a:custGeom>
-              <a:avLst/>
-              <a:pathLst>
-                <a:path w="0" h="23518">
-                  <a:moveTo>
-                    <a:pt x="0" y="23518"/>
-                  </a:moveTo>
-                  <a:lnTo>
-                    <a:pt x="0" y="0"/>
-                  </a:lnTo>
-                </a:path>
-              </a:pathLst>
-            </a:custGeom>
-            <a:ln w="20325" cap="flat">
-              <a:solidFill>
-                <a:srgbClr val="FC8D59">
-                  <a:alpha val="100000"/>
-                </a:srgbClr>
-              </a:solidFill>
-              <a:prstDash val="solid"/>
-              <a:round/>
-            </a:ln>
-          </p:spPr>
-          <p:txBody>
-            <a:bodyPr/>
-            <a:lstStyle/>
-            <a:p/>
-          </p:txBody>
-        </p:sp>
-        <p:sp>
-          <p:nvSpPr>
-            <p:cNvPr id="42" name="pl42"/>
-            <p:cNvSpPr/>
-            <p:nvPr/>
-          </p:nvSpPr>
-          <p:spPr>
-            <a:xfrm>
-              <a:off x="4428417" y="3861164"/>
-              <a:ext cx="0" cy="70554"/>
-            </a:xfrm>
-            <a:custGeom>
-              <a:avLst/>
-              <a:pathLst>
-                <a:path w="0" h="70554">
-                  <a:moveTo>
-                    <a:pt x="0" y="70554"/>
-                  </a:moveTo>
-                  <a:lnTo>
-                    <a:pt x="0" y="0"/>
-                  </a:lnTo>
-                </a:path>
-              </a:pathLst>
-            </a:custGeom>
-            <a:ln w="20325" cap="flat">
-              <a:solidFill>
-                <a:srgbClr val="FC8D59">
-                  <a:alpha val="100000"/>
-                </a:srgbClr>
-              </a:solidFill>
-              <a:prstDash val="solid"/>
-              <a:round/>
-            </a:ln>
-          </p:spPr>
-          <p:txBody>
-            <a:bodyPr/>
-            <a:lstStyle/>
-            <a:p/>
-          </p:txBody>
-        </p:sp>
-        <p:sp>
-          <p:nvSpPr>
-            <p:cNvPr id="43" name="pl43"/>
-            <p:cNvSpPr/>
-            <p:nvPr/>
-          </p:nvSpPr>
-          <p:spPr>
-            <a:xfrm>
-              <a:off x="4195562" y="3896441"/>
-              <a:ext cx="232854" cy="0"/>
-            </a:xfrm>
-            <a:custGeom>
-              <a:avLst/>
-              <a:pathLst>
-                <a:path w="232854" h="0">
-                  <a:moveTo>
-                    <a:pt x="232854" y="0"/>
-                  </a:moveTo>
-                  <a:lnTo>
-                    <a:pt x="0" y="0"/>
-                  </a:lnTo>
-                </a:path>
-              </a:pathLst>
-            </a:custGeom>
-            <a:ln w="20325" cap="flat">
-              <a:solidFill>
-                <a:srgbClr val="FC8D59">
-                  <a:alpha val="100000"/>
-                </a:srgbClr>
-              </a:solidFill>
-              <a:prstDash val="solid"/>
-              <a:round/>
-            </a:ln>
-          </p:spPr>
-          <p:txBody>
-            <a:bodyPr/>
-            <a:lstStyle/>
-            <a:p/>
-          </p:txBody>
-        </p:sp>
-        <p:sp>
-          <p:nvSpPr>
-            <p:cNvPr id="44" name="pl44"/>
-            <p:cNvSpPr/>
-            <p:nvPr/>
-          </p:nvSpPr>
-          <p:spPr>
-            <a:xfrm>
-              <a:off x="4195562" y="3861164"/>
-              <a:ext cx="0" cy="70554"/>
-            </a:xfrm>
-            <a:custGeom>
-              <a:avLst/>
-              <a:pathLst>
-                <a:path w="0" h="70554">
-                  <a:moveTo>
-                    <a:pt x="0" y="70554"/>
-                  </a:moveTo>
-                  <a:lnTo>
-                    <a:pt x="0" y="0"/>
-                  </a:lnTo>
-                </a:path>
-              </a:pathLst>
-            </a:custGeom>
-            <a:ln w="20325" cap="flat">
-              <a:solidFill>
-                <a:srgbClr val="FC8D59">
-                  <a:alpha val="100000"/>
-                </a:srgbClr>
-              </a:solidFill>
-              <a:prstDash val="solid"/>
-              <a:round/>
-            </a:ln>
-          </p:spPr>
-          <p:txBody>
-            <a:bodyPr/>
-            <a:lstStyle/>
-            <a:p/>
-          </p:txBody>
-        </p:sp>
-        <p:sp>
-          <p:nvSpPr>
-            <p:cNvPr id="45" name="pl45"/>
-            <p:cNvSpPr/>
-            <p:nvPr/>
-          </p:nvSpPr>
-          <p:spPr>
-            <a:xfrm>
-              <a:off x="4313721" y="2448390"/>
-              <a:ext cx="0" cy="23518"/>
-            </a:xfrm>
-            <a:custGeom>
-              <a:avLst/>
-              <a:pathLst>
-                <a:path w="0" h="23518">
-                  <a:moveTo>
-                    <a:pt x="0" y="23518"/>
-                  </a:moveTo>
-                  <a:lnTo>
-                    <a:pt x="0" y="0"/>
-                  </a:lnTo>
-                </a:path>
-              </a:pathLst>
-            </a:custGeom>
-            <a:ln w="20325" cap="flat">
-              <a:solidFill>
-                <a:srgbClr val="FC8D59">
-                  <a:alpha val="100000"/>
-                </a:srgbClr>
-              </a:solidFill>
-              <a:prstDash val="solid"/>
-              <a:round/>
-            </a:ln>
-          </p:spPr>
-          <p:txBody>
-            <a:bodyPr/>
-            <a:lstStyle/>
-            <a:p/>
-          </p:txBody>
-        </p:sp>
-        <p:sp>
-          <p:nvSpPr>
-            <p:cNvPr id="46" name="pl46"/>
-            <p:cNvSpPr/>
-            <p:nvPr/>
-          </p:nvSpPr>
-          <p:spPr>
-            <a:xfrm>
-              <a:off x="4072708" y="2460149"/>
-              <a:ext cx="241013" cy="0"/>
-            </a:xfrm>
-            <a:custGeom>
-              <a:avLst/>
-              <a:pathLst>
-                <a:path w="241013" h="0">
-                  <a:moveTo>
-                    <a:pt x="241013" y="0"/>
-                  </a:moveTo>
-                  <a:lnTo>
-                    <a:pt x="0" y="0"/>
-                  </a:lnTo>
-                </a:path>
-              </a:pathLst>
-            </a:custGeom>
-            <a:ln w="20325" cap="flat">
-              <a:solidFill>
-                <a:srgbClr val="FC8D59">
-                  <a:alpha val="100000"/>
-                </a:srgbClr>
-              </a:solidFill>
-              <a:prstDash val="solid"/>
-              <a:round/>
-            </a:ln>
-          </p:spPr>
-          <p:txBody>
-            <a:bodyPr/>
-            <a:lstStyle/>
-            <a:p/>
-          </p:txBody>
-        </p:sp>
-        <p:sp>
-          <p:nvSpPr>
-            <p:cNvPr id="47" name="pl47"/>
-            <p:cNvSpPr/>
-            <p:nvPr/>
-          </p:nvSpPr>
-          <p:spPr>
-            <a:xfrm>
-              <a:off x="4072708" y="2448390"/>
-              <a:ext cx="0" cy="23518"/>
-            </a:xfrm>
-            <a:custGeom>
-              <a:avLst/>
-              <a:pathLst>
-                <a:path w="0" h="23518">
-                  <a:moveTo>
-                    <a:pt x="0" y="23518"/>
-                  </a:moveTo>
-                  <a:lnTo>
-                    <a:pt x="0" y="0"/>
-                  </a:lnTo>
-                </a:path>
-              </a:pathLst>
-            </a:custGeom>
-            <a:ln w="20325" cap="flat">
-              <a:solidFill>
-                <a:srgbClr val="FC8D59">
-                  <a:alpha val="100000"/>
-                </a:srgbClr>
-              </a:solidFill>
-              <a:prstDash val="solid"/>
-              <a:round/>
-            </a:ln>
-          </p:spPr>
-          <p:txBody>
-            <a:bodyPr/>
-            <a:lstStyle/>
-            <a:p/>
-          </p:txBody>
-        </p:sp>
-        <p:sp>
-          <p:nvSpPr>
-            <p:cNvPr id="48" name="pl48"/>
-            <p:cNvSpPr/>
-            <p:nvPr/>
-          </p:nvSpPr>
-          <p:spPr>
-            <a:xfrm>
-              <a:off x="4058890" y="4968201"/>
-              <a:ext cx="0" cy="23518"/>
-            </a:xfrm>
-            <a:custGeom>
-              <a:avLst/>
-              <a:pathLst>
-                <a:path w="0" h="23518">
-                  <a:moveTo>
-                    <a:pt x="0" y="23518"/>
-                  </a:moveTo>
-                  <a:lnTo>
-                    <a:pt x="0" y="0"/>
-                  </a:lnTo>
-                </a:path>
-              </a:pathLst>
-            </a:custGeom>
-            <a:ln w="20325" cap="flat">
-              <a:solidFill>
-                <a:srgbClr val="FC8D59">
-                  <a:alpha val="100000"/>
-                </a:srgbClr>
-              </a:solidFill>
-              <a:prstDash val="solid"/>
-              <a:round/>
-            </a:ln>
-          </p:spPr>
-          <p:txBody>
-            <a:bodyPr/>
-            <a:lstStyle/>
-            <a:p/>
-          </p:txBody>
-        </p:sp>
-        <p:sp>
-          <p:nvSpPr>
-            <p:cNvPr id="49" name="pl49"/>
-            <p:cNvSpPr/>
-            <p:nvPr/>
-          </p:nvSpPr>
-          <p:spPr>
-            <a:xfrm>
-              <a:off x="3913352" y="4979960"/>
-              <a:ext cx="145538" cy="0"/>
-            </a:xfrm>
-            <a:custGeom>
-              <a:avLst/>
-              <a:pathLst>
-                <a:path w="145538" h="0">
-                  <a:moveTo>
-                    <a:pt x="145538" y="0"/>
-                  </a:moveTo>
-                  <a:lnTo>
-                    <a:pt x="0" y="0"/>
-                  </a:lnTo>
-                </a:path>
-              </a:pathLst>
-            </a:custGeom>
-            <a:ln w="20325" cap="flat">
-              <a:solidFill>
-                <a:srgbClr val="FC8D59">
-                  <a:alpha val="100000"/>
-                </a:srgbClr>
-              </a:solidFill>
-              <a:prstDash val="solid"/>
-              <a:round/>
-            </a:ln>
-          </p:spPr>
-          <p:txBody>
-            <a:bodyPr/>
-            <a:lstStyle/>
-            <a:p/>
-          </p:txBody>
-        </p:sp>
-        <p:sp>
-          <p:nvSpPr>
-            <p:cNvPr id="50" name="pl50"/>
-            <p:cNvSpPr/>
-            <p:nvPr/>
-          </p:nvSpPr>
-          <p:spPr>
-            <a:xfrm>
-              <a:off x="3913352" y="4968201"/>
-              <a:ext cx="0" cy="23518"/>
-            </a:xfrm>
-            <a:custGeom>
-              <a:avLst/>
-              <a:pathLst>
-                <a:path w="0" h="23518">
-                  <a:moveTo>
-                    <a:pt x="0" y="23518"/>
-                  </a:moveTo>
-                  <a:lnTo>
-                    <a:pt x="0" y="0"/>
-                  </a:lnTo>
-                </a:path>
-              </a:pathLst>
-            </a:custGeom>
-            <a:ln w="20325" cap="flat">
-              <a:solidFill>
-                <a:srgbClr val="FC8D59">
-                  <a:alpha val="100000"/>
-                </a:srgbClr>
-              </a:solidFill>
-              <a:prstDash val="solid"/>
-              <a:round/>
-            </a:ln>
-          </p:spPr>
-          <p:txBody>
-            <a:bodyPr/>
-            <a:lstStyle/>
-            <a:p/>
-          </p:txBody>
-        </p:sp>
-        <p:sp>
-          <p:nvSpPr>
-            <p:cNvPr id="51" name="pl51"/>
-            <p:cNvSpPr/>
-            <p:nvPr/>
-          </p:nvSpPr>
-          <p:spPr>
-            <a:xfrm>
-              <a:off x="4224552" y="3456314"/>
-              <a:ext cx="0" cy="23518"/>
-            </a:xfrm>
-            <a:custGeom>
-              <a:avLst/>
-              <a:pathLst>
-                <a:path w="0" h="23518">
-                  <a:moveTo>
-                    <a:pt x="0" y="23518"/>
-                  </a:moveTo>
-                  <a:lnTo>
-                    <a:pt x="0" y="0"/>
-                  </a:lnTo>
-                </a:path>
-              </a:pathLst>
-            </a:custGeom>
-            <a:ln w="20325" cap="flat">
-              <a:solidFill>
-                <a:srgbClr val="FC8D59">
-                  <a:alpha val="100000"/>
-                </a:srgbClr>
-              </a:solidFill>
-              <a:prstDash val="solid"/>
-              <a:round/>
-            </a:ln>
-          </p:spPr>
-          <p:txBody>
-            <a:bodyPr/>
-            <a:lstStyle/>
-            <a:p/>
-          </p:txBody>
-        </p:sp>
-        <p:sp>
-          <p:nvSpPr>
-            <p:cNvPr id="52" name="pl52"/>
-            <p:cNvSpPr/>
-            <p:nvPr/>
-          </p:nvSpPr>
-          <p:spPr>
-            <a:xfrm>
-              <a:off x="4077442" y="3468073"/>
-              <a:ext cx="147109" cy="0"/>
-            </a:xfrm>
-            <a:custGeom>
-              <a:avLst/>
-              <a:pathLst>
-                <a:path w="147109" h="0">
-                  <a:moveTo>
-                    <a:pt x="147109" y="0"/>
-                  </a:moveTo>
-                  <a:lnTo>
-                    <a:pt x="0" y="0"/>
-                  </a:lnTo>
-                </a:path>
-              </a:pathLst>
-            </a:custGeom>
-            <a:ln w="20325" cap="flat">
-              <a:solidFill>
-                <a:srgbClr val="FC8D59">
-                  <a:alpha val="100000"/>
-                </a:srgbClr>
-              </a:solidFill>
-              <a:prstDash val="solid"/>
-              <a:round/>
-            </a:ln>
-          </p:spPr>
-          <p:txBody>
-            <a:bodyPr/>
-            <a:lstStyle/>
-            <a:p/>
-          </p:txBody>
-        </p:sp>
-        <p:sp>
-          <p:nvSpPr>
-            <p:cNvPr id="53" name="pl53"/>
-            <p:cNvSpPr/>
-            <p:nvPr/>
-          </p:nvSpPr>
-          <p:spPr>
-            <a:xfrm>
-              <a:off x="4077442" y="3456314"/>
-              <a:ext cx="0" cy="23518"/>
-            </a:xfrm>
-            <a:custGeom>
-              <a:avLst/>
-              <a:pathLst>
-                <a:path w="0" h="23518">
-                  <a:moveTo>
-                    <a:pt x="0" y="23518"/>
-                  </a:moveTo>
-                  <a:lnTo>
-                    <a:pt x="0" y="0"/>
-                  </a:lnTo>
-                </a:path>
-              </a:pathLst>
-            </a:custGeom>
-            <a:ln w="20325" cap="flat">
-              <a:solidFill>
-                <a:srgbClr val="FC8D59">
-                  <a:alpha val="100000"/>
-                </a:srgbClr>
-              </a:solidFill>
-              <a:prstDash val="solid"/>
-              <a:round/>
-            </a:ln>
-          </p:spPr>
-          <p:txBody>
-            <a:bodyPr/>
-            <a:lstStyle/>
-            <a:p/>
-          </p:txBody>
-        </p:sp>
-        <p:sp>
-          <p:nvSpPr>
-            <p:cNvPr id="54" name="pl54"/>
-            <p:cNvSpPr/>
-            <p:nvPr/>
-          </p:nvSpPr>
-          <p:spPr>
-            <a:xfrm>
-              <a:off x="6963880" y="2876758"/>
-              <a:ext cx="0" cy="23518"/>
-            </a:xfrm>
-            <a:custGeom>
-              <a:avLst/>
-              <a:pathLst>
-                <a:path w="0" h="23518">
-                  <a:moveTo>
-                    <a:pt x="0" y="23518"/>
-                  </a:moveTo>
-                  <a:lnTo>
-                    <a:pt x="0" y="0"/>
-                  </a:lnTo>
-                </a:path>
-              </a:pathLst>
-            </a:custGeom>
-            <a:ln w="20325" cap="flat">
-              <a:solidFill>
-                <a:srgbClr val="31A354">
-                  <a:alpha val="100000"/>
-                </a:srgbClr>
-              </a:solidFill>
-              <a:prstDash val="solid"/>
-              <a:round/>
-            </a:ln>
-          </p:spPr>
-          <p:txBody>
-            <a:bodyPr/>
-            <a:lstStyle/>
-            <a:p/>
-          </p:txBody>
-        </p:sp>
-        <p:sp>
-          <p:nvSpPr>
-            <p:cNvPr id="55" name="pl55"/>
-            <p:cNvSpPr/>
-            <p:nvPr/>
-          </p:nvSpPr>
-          <p:spPr>
-            <a:xfrm>
-              <a:off x="3211518" y="2888517"/>
-              <a:ext cx="3752361" cy="0"/>
-            </a:xfrm>
-            <a:custGeom>
-              <a:avLst/>
-              <a:pathLst>
-                <a:path w="3752361" h="0">
-                  <a:moveTo>
-                    <a:pt x="3752361" y="0"/>
-                  </a:moveTo>
-                  <a:lnTo>
-                    <a:pt x="0" y="0"/>
-                  </a:lnTo>
-                </a:path>
-              </a:pathLst>
-            </a:custGeom>
-            <a:ln w="20325" cap="flat">
-              <a:solidFill>
-                <a:srgbClr val="31A354">
-                  <a:alpha val="100000"/>
-                </a:srgbClr>
-              </a:solidFill>
-              <a:prstDash val="solid"/>
-              <a:round/>
-            </a:ln>
-          </p:spPr>
-          <p:txBody>
-            <a:bodyPr/>
-            <a:lstStyle/>
-            <a:p/>
-          </p:txBody>
-        </p:sp>
-        <p:sp>
-          <p:nvSpPr>
-            <p:cNvPr id="56" name="pl56"/>
-            <p:cNvSpPr/>
-            <p:nvPr/>
-          </p:nvSpPr>
-          <p:spPr>
-            <a:xfrm>
-              <a:off x="3211518" y="2876758"/>
-              <a:ext cx="0" cy="23518"/>
-            </a:xfrm>
-            <a:custGeom>
-              <a:avLst/>
-              <a:pathLst>
-                <a:path w="0" h="23518">
-                  <a:moveTo>
-                    <a:pt x="0" y="23518"/>
-                  </a:moveTo>
-                  <a:lnTo>
-                    <a:pt x="0" y="0"/>
-                  </a:lnTo>
-                </a:path>
-              </a:pathLst>
-            </a:custGeom>
-            <a:ln w="20325" cap="flat">
-              <a:solidFill>
-                <a:srgbClr val="31A354">
-                  <a:alpha val="100000"/>
-                </a:srgbClr>
-              </a:solidFill>
-              <a:prstDash val="solid"/>
-              <a:round/>
-            </a:ln>
-          </p:spPr>
-          <p:txBody>
-            <a:bodyPr/>
-            <a:lstStyle/>
-            <a:p/>
-          </p:txBody>
-        </p:sp>
-        <p:sp>
-          <p:nvSpPr>
-            <p:cNvPr id="57" name="pl57"/>
-            <p:cNvSpPr/>
-            <p:nvPr/>
-          </p:nvSpPr>
-          <p:spPr>
-            <a:xfrm>
-              <a:off x="4447503" y="4439461"/>
-              <a:ext cx="0" cy="35277"/>
-            </a:xfrm>
-            <a:custGeom>
-              <a:avLst/>
-              <a:pathLst>
-                <a:path w="0" h="35277">
-                  <a:moveTo>
-                    <a:pt x="0" y="35277"/>
-                  </a:moveTo>
-                  <a:lnTo>
-                    <a:pt x="0" y="0"/>
-                  </a:lnTo>
-                </a:path>
-              </a:pathLst>
-            </a:custGeom>
-            <a:ln w="20325" cap="flat">
-              <a:solidFill>
-                <a:srgbClr val="31A354">
-                  <a:alpha val="100000"/>
-                </a:srgbClr>
-              </a:solidFill>
-              <a:prstDash val="solid"/>
-              <a:round/>
-            </a:ln>
-          </p:spPr>
-          <p:txBody>
-            <a:bodyPr/>
-            <a:lstStyle/>
-            <a:p/>
-          </p:txBody>
-        </p:sp>
-        <p:sp>
-          <p:nvSpPr>
-            <p:cNvPr id="58" name="pl58"/>
-            <p:cNvSpPr/>
-            <p:nvPr/>
-          </p:nvSpPr>
-          <p:spPr>
-            <a:xfrm>
-              <a:off x="4246187" y="4457099"/>
-              <a:ext cx="201316" cy="0"/>
-            </a:xfrm>
-            <a:custGeom>
-              <a:avLst/>
-              <a:pathLst>
-                <a:path w="201316" h="0">
-                  <a:moveTo>
-                    <a:pt x="201316" y="0"/>
-                  </a:moveTo>
-                  <a:lnTo>
-                    <a:pt x="0" y="0"/>
-                  </a:lnTo>
-                </a:path>
-              </a:pathLst>
-            </a:custGeom>
-            <a:ln w="20325" cap="flat">
-              <a:solidFill>
-                <a:srgbClr val="31A354">
-                  <a:alpha val="100000"/>
-                </a:srgbClr>
-              </a:solidFill>
-              <a:prstDash val="solid"/>
-              <a:round/>
-            </a:ln>
-          </p:spPr>
-          <p:txBody>
-            <a:bodyPr/>
-            <a:lstStyle/>
-            <a:p/>
-          </p:txBody>
-        </p:sp>
-        <p:sp>
-          <p:nvSpPr>
-            <p:cNvPr id="59" name="pl59"/>
-            <p:cNvSpPr/>
-            <p:nvPr/>
-          </p:nvSpPr>
-          <p:spPr>
-            <a:xfrm>
-              <a:off x="4246187" y="4439461"/>
-              <a:ext cx="0" cy="35277"/>
-            </a:xfrm>
-            <a:custGeom>
-              <a:avLst/>
-              <a:pathLst>
-                <a:path w="0" h="35277">
-                  <a:moveTo>
-                    <a:pt x="0" y="35277"/>
-                  </a:moveTo>
-                  <a:lnTo>
-                    <a:pt x="0" y="0"/>
-                  </a:lnTo>
-                </a:path>
-              </a:pathLst>
-            </a:custGeom>
-            <a:ln w="20325" cap="flat">
-              <a:solidFill>
-                <a:srgbClr val="31A354">
-                  <a:alpha val="100000"/>
-                </a:srgbClr>
-              </a:solidFill>
-              <a:prstDash val="solid"/>
-              <a:round/>
-            </a:ln>
-          </p:spPr>
-          <p:txBody>
-            <a:bodyPr/>
-            <a:lstStyle/>
-            <a:p/>
-          </p:txBody>
-        </p:sp>
-        <p:sp>
-          <p:nvSpPr>
-            <p:cNvPr id="60" name="pl60"/>
-            <p:cNvSpPr/>
-            <p:nvPr/>
-          </p:nvSpPr>
-          <p:spPr>
-            <a:xfrm>
-              <a:off x="4254547" y="2372795"/>
-              <a:ext cx="0" cy="23518"/>
-            </a:xfrm>
-            <a:custGeom>
-              <a:avLst/>
-              <a:pathLst>
-                <a:path w="0" h="23518">
-                  <a:moveTo>
-                    <a:pt x="0" y="23518"/>
-                  </a:moveTo>
-                  <a:lnTo>
-                    <a:pt x="0" y="0"/>
-                  </a:lnTo>
-                </a:path>
-              </a:pathLst>
-            </a:custGeom>
-            <a:ln w="20325" cap="flat">
-              <a:solidFill>
-                <a:srgbClr val="31A354">
-                  <a:alpha val="100000"/>
-                </a:srgbClr>
-              </a:solidFill>
-              <a:prstDash val="solid"/>
-              <a:round/>
-            </a:ln>
-          </p:spPr>
-          <p:txBody>
-            <a:bodyPr/>
-            <a:lstStyle/>
-            <a:p/>
-          </p:txBody>
-        </p:sp>
-        <p:sp>
-          <p:nvSpPr>
-            <p:cNvPr id="61" name="pl61"/>
-            <p:cNvSpPr/>
-            <p:nvPr/>
-          </p:nvSpPr>
-          <p:spPr>
-            <a:xfrm>
-              <a:off x="4043080" y="2384555"/>
-              <a:ext cx="211467" cy="0"/>
-            </a:xfrm>
-            <a:custGeom>
-              <a:avLst/>
-              <a:pathLst>
-                <a:path w="211467" h="0">
-                  <a:moveTo>
-                    <a:pt x="211467" y="0"/>
-                  </a:moveTo>
-                  <a:lnTo>
-                    <a:pt x="0" y="0"/>
-                  </a:lnTo>
-                </a:path>
-              </a:pathLst>
-            </a:custGeom>
-            <a:ln w="20325" cap="flat">
-              <a:solidFill>
-                <a:srgbClr val="31A354">
-                  <a:alpha val="100000"/>
-                </a:srgbClr>
-              </a:solidFill>
-              <a:prstDash val="solid"/>
-              <a:round/>
-            </a:ln>
-          </p:spPr>
-          <p:txBody>
-            <a:bodyPr/>
-            <a:lstStyle/>
-            <a:p/>
-          </p:txBody>
-        </p:sp>
-        <p:sp>
-          <p:nvSpPr>
-            <p:cNvPr id="62" name="pl62"/>
-            <p:cNvSpPr/>
-            <p:nvPr/>
-          </p:nvSpPr>
-          <p:spPr>
-            <a:xfrm>
-              <a:off x="4043080" y="2372795"/>
-              <a:ext cx="0" cy="23518"/>
-            </a:xfrm>
-            <a:custGeom>
-              <a:avLst/>
-              <a:pathLst>
-                <a:path w="0" h="23518">
-                  <a:moveTo>
-                    <a:pt x="0" y="23518"/>
-                  </a:moveTo>
-                  <a:lnTo>
-                    <a:pt x="0" y="0"/>
-                  </a:lnTo>
-                </a:path>
-              </a:pathLst>
-            </a:custGeom>
-            <a:ln w="20325" cap="flat">
-              <a:solidFill>
-                <a:srgbClr val="31A354">
-                  <a:alpha val="100000"/>
-                </a:srgbClr>
-              </a:solidFill>
-              <a:prstDash val="solid"/>
-              <a:round/>
-            </a:ln>
-          </p:spPr>
-          <p:txBody>
-            <a:bodyPr/>
-            <a:lstStyle/>
-            <a:p/>
-          </p:txBody>
-        </p:sp>
-        <p:sp>
-          <p:nvSpPr>
-            <p:cNvPr id="63" name="pl63"/>
-            <p:cNvSpPr/>
-            <p:nvPr/>
-          </p:nvSpPr>
-          <p:spPr>
-            <a:xfrm>
-              <a:off x="4050165" y="4892607"/>
-              <a:ext cx="0" cy="23518"/>
-            </a:xfrm>
-            <a:custGeom>
-              <a:avLst/>
-              <a:pathLst>
-                <a:path w="0" h="23518">
-                  <a:moveTo>
-                    <a:pt x="0" y="23518"/>
-                  </a:moveTo>
-                  <a:lnTo>
-                    <a:pt x="0" y="0"/>
-                  </a:lnTo>
-                </a:path>
-              </a:pathLst>
-            </a:custGeom>
-            <a:ln w="20325" cap="flat">
-              <a:solidFill>
-                <a:srgbClr val="31A354">
-                  <a:alpha val="100000"/>
-                </a:srgbClr>
-              </a:solidFill>
-              <a:prstDash val="solid"/>
-              <a:round/>
-            </a:ln>
-          </p:spPr>
-          <p:txBody>
-            <a:bodyPr/>
-            <a:lstStyle/>
-            <a:p/>
-          </p:txBody>
-        </p:sp>
-        <p:sp>
-          <p:nvSpPr>
-            <p:cNvPr id="64" name="pl64"/>
-            <p:cNvSpPr/>
-            <p:nvPr/>
-          </p:nvSpPr>
-          <p:spPr>
-            <a:xfrm>
-              <a:off x="3914369" y="4904366"/>
-              <a:ext cx="135795" cy="0"/>
-            </a:xfrm>
-            <a:custGeom>
-              <a:avLst/>
-              <a:pathLst>
-                <a:path w="135795" h="0">
-                  <a:moveTo>
-                    <a:pt x="135795" y="0"/>
-                  </a:moveTo>
-                  <a:lnTo>
-                    <a:pt x="0" y="0"/>
-                  </a:lnTo>
-                </a:path>
-              </a:pathLst>
-            </a:custGeom>
-            <a:ln w="20325" cap="flat">
-              <a:solidFill>
-                <a:srgbClr val="31A354">
-                  <a:alpha val="100000"/>
-                </a:srgbClr>
-              </a:solidFill>
-              <a:prstDash val="solid"/>
-              <a:round/>
-            </a:ln>
-          </p:spPr>
-          <p:txBody>
-            <a:bodyPr/>
-            <a:lstStyle/>
-            <a:p/>
-          </p:txBody>
-        </p:sp>
-        <p:sp>
-          <p:nvSpPr>
-            <p:cNvPr id="65" name="pl65"/>
-            <p:cNvSpPr/>
-            <p:nvPr/>
-          </p:nvSpPr>
-          <p:spPr>
-            <a:xfrm>
-              <a:off x="3914369" y="4892607"/>
-              <a:ext cx="0" cy="23518"/>
-            </a:xfrm>
-            <a:custGeom>
-              <a:avLst/>
-              <a:pathLst>
-                <a:path w="0" h="23518">
-                  <a:moveTo>
-                    <a:pt x="0" y="23518"/>
-                  </a:moveTo>
-                  <a:lnTo>
-                    <a:pt x="0" y="0"/>
-                  </a:lnTo>
-                </a:path>
-              </a:pathLst>
-            </a:custGeom>
-            <a:ln w="20325" cap="flat">
-              <a:solidFill>
-                <a:srgbClr val="31A354">
-                  <a:alpha val="100000"/>
-                </a:srgbClr>
-              </a:solidFill>
-              <a:prstDash val="solid"/>
-              <a:round/>
-            </a:ln>
-          </p:spPr>
-          <p:txBody>
-            <a:bodyPr/>
-            <a:lstStyle/>
-            <a:p/>
-          </p:txBody>
-        </p:sp>
-        <p:sp>
-          <p:nvSpPr>
-            <p:cNvPr id="66" name="pl66"/>
-            <p:cNvSpPr/>
-            <p:nvPr/>
-          </p:nvSpPr>
-          <p:spPr>
-            <a:xfrm>
-              <a:off x="4245666" y="3380720"/>
-              <a:ext cx="0" cy="23518"/>
-            </a:xfrm>
-            <a:custGeom>
-              <a:avLst/>
-              <a:pathLst>
-                <a:path w="0" h="23518">
-                  <a:moveTo>
-                    <a:pt x="0" y="23518"/>
-                  </a:moveTo>
-                  <a:lnTo>
-                    <a:pt x="0" y="0"/>
-                  </a:lnTo>
-                </a:path>
-              </a:pathLst>
-            </a:custGeom>
-            <a:ln w="20325" cap="flat">
-              <a:solidFill>
-                <a:srgbClr val="31A354">
-                  <a:alpha val="100000"/>
-                </a:srgbClr>
-              </a:solidFill>
-              <a:prstDash val="solid"/>
-              <a:round/>
-            </a:ln>
-          </p:spPr>
-          <p:txBody>
-            <a:bodyPr/>
-            <a:lstStyle/>
-            <a:p/>
-          </p:txBody>
-        </p:sp>
-        <p:sp>
-          <p:nvSpPr>
-            <p:cNvPr id="67" name="pl67"/>
-            <p:cNvSpPr/>
-            <p:nvPr/>
-          </p:nvSpPr>
-          <p:spPr>
-            <a:xfrm>
-              <a:off x="4117308" y="3392479"/>
-              <a:ext cx="128357" cy="0"/>
-            </a:xfrm>
-            <a:custGeom>
-              <a:avLst/>
-              <a:pathLst>
-                <a:path w="128357" h="0">
-                  <a:moveTo>
-                    <a:pt x="128357" y="0"/>
-                  </a:moveTo>
-                  <a:lnTo>
-                    <a:pt x="0" y="0"/>
-                  </a:lnTo>
-                </a:path>
-              </a:pathLst>
-            </a:custGeom>
-            <a:ln w="20325" cap="flat">
-              <a:solidFill>
-                <a:srgbClr val="31A354">
-                  <a:alpha val="100000"/>
-                </a:srgbClr>
-              </a:solidFill>
-              <a:prstDash val="solid"/>
-              <a:round/>
-            </a:ln>
-          </p:spPr>
-          <p:txBody>
-            <a:bodyPr/>
-            <a:lstStyle/>
-            <a:p/>
-          </p:txBody>
-        </p:sp>
-        <p:sp>
-          <p:nvSpPr>
-            <p:cNvPr id="68" name="pl68"/>
-            <p:cNvSpPr/>
-            <p:nvPr/>
-          </p:nvSpPr>
-          <p:spPr>
-            <a:xfrm>
-              <a:off x="4117308" y="3380720"/>
-              <a:ext cx="0" cy="23518"/>
-            </a:xfrm>
-            <a:custGeom>
-              <a:avLst/>
-              <a:pathLst>
-                <a:path w="0" h="23518">
-                  <a:moveTo>
-                    <a:pt x="0" y="23518"/>
-                  </a:moveTo>
-                  <a:lnTo>
-                    <a:pt x="0" y="0"/>
-                  </a:lnTo>
-                </a:path>
-              </a:pathLst>
-            </a:custGeom>
-            <a:ln w="20325" cap="flat">
-              <a:solidFill>
-                <a:srgbClr val="31A354">
-                  <a:alpha val="100000"/>
-                </a:srgbClr>
-              </a:solidFill>
-              <a:prstDash val="solid"/>
-              <a:round/>
-            </a:ln>
-          </p:spPr>
-          <p:txBody>
-            <a:bodyPr/>
-            <a:lstStyle/>
-            <a:p/>
-          </p:txBody>
-        </p:sp>
-        <p:sp>
-          <p:nvSpPr>
-            <p:cNvPr id="69" name="pl69"/>
-            <p:cNvSpPr/>
-            <p:nvPr/>
-          </p:nvSpPr>
-          <p:spPr>
-            <a:xfrm>
-              <a:off x="3023900" y="2082177"/>
-              <a:ext cx="0" cy="3124565"/>
-            </a:xfrm>
-            <a:custGeom>
-              <a:avLst/>
-              <a:pathLst>
-                <a:path w="0" h="3124565">
-                  <a:moveTo>
-                    <a:pt x="0" y="3124565"/>
-                  </a:moveTo>
-                  <a:lnTo>
-                    <a:pt x="0" y="0"/>
-                  </a:lnTo>
-                </a:path>
-              </a:pathLst>
-            </a:custGeom>
-            <a:ln w="12934" cap="sq">
+            <a:ln w="12565" cap="sq">
               <a:solidFill>
                 <a:srgbClr val="000000">
                   <a:alpha val="100000"/>
@@ -5690,14 +4355,14 @@
         </p:sp>
         <p:sp>
           <p:nvSpPr>
-            <p:cNvPr id="70" name="tx70"/>
-            <p:cNvSpPr/>
-            <p:nvPr/>
-          </p:nvSpPr>
-          <p:spPr>
-            <a:xfrm>
-              <a:off x="2738776" y="4864934"/>
-              <a:ext cx="225340" cy="77613"/>
+            <p:cNvPr id="35" name="tx35"/>
+            <p:cNvSpPr/>
+            <p:nvPr/>
+          </p:nvSpPr>
+          <p:spPr>
+            <a:xfrm>
+              <a:off x="1979528" y="4549162"/>
+              <a:ext cx="218902" cy="75396"/>
             </a:xfrm>
             <a:prstGeom prst="rect">
               <a:avLst/>
@@ -5710,7 +4375,7 @@
             <a:p>
               <a:pPr algn="l" marL="0" marR="0" indent="0">
                 <a:lnSpc>
-                  <a:spcPts val="840"/>
+                  <a:spcPts val="816"/>
                 </a:lnSpc>
                 <a:spcBef>
                   <a:spcPts val="0"/>
@@ -5720,7 +4385,7 @@
                 </a:spcAft>
               </a:pPr>
               <a:r>
-                <a:rPr sz="840">
+                <a:rPr sz="816">
                   <a:solidFill>
                     <a:srgbClr val="1A1A1A">
                       <a:alpha val="100000"/>
@@ -5736,14 +4401,14 @@
         </p:sp>
         <p:sp>
           <p:nvSpPr>
-            <p:cNvPr id="71" name="tx71"/>
-            <p:cNvSpPr/>
-            <p:nvPr/>
-          </p:nvSpPr>
-          <p:spPr>
-            <a:xfrm>
-              <a:off x="1991808" y="4338469"/>
-              <a:ext cx="972309" cy="100116"/>
+            <p:cNvPr id="36" name="tx36"/>
+            <p:cNvSpPr/>
+            <p:nvPr/>
+          </p:nvSpPr>
+          <p:spPr>
+            <a:xfrm>
+              <a:off x="1253901" y="3876024"/>
+              <a:ext cx="944528" cy="97256"/>
             </a:xfrm>
             <a:prstGeom prst="rect">
               <a:avLst/>
@@ -5756,7 +4421,7 @@
             <a:p>
               <a:pPr algn="l" marL="0" marR="0" indent="0">
                 <a:lnSpc>
-                  <a:spcPts val="840"/>
+                  <a:spcPts val="816"/>
                 </a:lnSpc>
                 <a:spcBef>
                   <a:spcPts val="0"/>
@@ -5766,7 +4431,7 @@
                 </a:spcAft>
               </a:pPr>
               <a:r>
-                <a:rPr sz="840">
+                <a:rPr sz="816">
                   <a:solidFill>
                     <a:srgbClr val="1A1A1A">
                       <a:alpha val="100000"/>
@@ -5782,14 +4447,14 @@
         </p:sp>
         <p:sp>
           <p:nvSpPr>
-            <p:cNvPr id="72" name="tx72"/>
-            <p:cNvSpPr/>
-            <p:nvPr/>
-          </p:nvSpPr>
-          <p:spPr>
-            <a:xfrm>
-              <a:off x="2098488" y="3855655"/>
-              <a:ext cx="865629" cy="78968"/>
+            <p:cNvPr id="37" name="tx37"/>
+            <p:cNvSpPr/>
+            <p:nvPr/>
+          </p:nvSpPr>
+          <p:spPr>
+            <a:xfrm>
+              <a:off x="1213268" y="3226012"/>
+              <a:ext cx="985161" cy="95991"/>
             </a:xfrm>
             <a:prstGeom prst="rect">
               <a:avLst/>
@@ -5802,7 +4467,7 @@
             <a:p>
               <a:pPr algn="l" marL="0" marR="0" indent="0">
                 <a:lnSpc>
-                  <a:spcPts val="840"/>
+                  <a:spcPts val="816"/>
                 </a:lnSpc>
                 <a:spcBef>
                   <a:spcPts val="0"/>
@@ -5812,53 +4477,7 @@
                 </a:spcAft>
               </a:pPr>
               <a:r>
-                <a:rPr sz="840">
-                  <a:solidFill>
-                    <a:srgbClr val="1A1A1A">
-                      <a:alpha val="100000"/>
-                    </a:srgbClr>
-                  </a:solidFill>
-                  <a:latin typeface="Arial"/>
-                  <a:cs typeface="Arial"/>
-                </a:rPr>
-                <a:t>Current user effort</a:t>
-              </a:r>
-            </a:p>
-          </p:txBody>
-        </p:sp>
-        <p:sp>
-          <p:nvSpPr>
-            <p:cNvPr id="73" name="tx73"/>
-            <p:cNvSpPr/>
-            <p:nvPr/>
-          </p:nvSpPr>
-          <p:spPr>
-            <a:xfrm>
-              <a:off x="1949979" y="3331846"/>
-              <a:ext cx="1014137" cy="98814"/>
-            </a:xfrm>
-            <a:prstGeom prst="rect">
-              <a:avLst/>
-            </a:prstGeom>
-            <a:noFill/>
-          </p:spPr>
-          <p:txBody>
-            <a:bodyPr lIns="0" rIns="0" tIns="0" bIns="0" anchorCtr="1" anchor="ctr" wrap="none"/>
-            <a:lstStyle/>
-            <a:p>
-              <a:pPr algn="l" marL="0" marR="0" indent="0">
-                <a:lnSpc>
-                  <a:spcPts val="840"/>
-                </a:lnSpc>
-                <a:spcBef>
-                  <a:spcPts val="0"/>
-                </a:spcBef>
-                <a:spcAft>
-                  <a:spcPts val="0"/>
-                </a:spcAft>
-              </a:pPr>
-              <a:r>
-                <a:rPr sz="840">
+                <a:rPr sz="816">
                   <a:solidFill>
                     <a:srgbClr val="1A1A1A">
                       <a:alpha val="100000"/>
@@ -5874,14 +4493,14 @@
         </p:sp>
         <p:sp>
           <p:nvSpPr>
-            <p:cNvPr id="74" name="tx74"/>
-            <p:cNvSpPr/>
-            <p:nvPr/>
-          </p:nvSpPr>
-          <p:spPr>
-            <a:xfrm>
-              <a:off x="1908880" y="2826582"/>
-              <a:ext cx="1055236" cy="100116"/>
+            <p:cNvPr id="38" name="tx38"/>
+            <p:cNvSpPr/>
+            <p:nvPr/>
+          </p:nvSpPr>
+          <p:spPr>
+            <a:xfrm>
+              <a:off x="1173344" y="2573469"/>
+              <a:ext cx="1025086" cy="97256"/>
             </a:xfrm>
             <a:prstGeom prst="rect">
               <a:avLst/>
@@ -5894,7 +4513,7 @@
             <a:p>
               <a:pPr algn="l" marL="0" marR="0" indent="0">
                 <a:lnSpc>
-                  <a:spcPts val="840"/>
+                  <a:spcPts val="816"/>
                 </a:lnSpc>
                 <a:spcBef>
                   <a:spcPts val="0"/>
@@ -5904,7 +4523,7 @@
                 </a:spcAft>
               </a:pPr>
               <a:r>
-                <a:rPr sz="840">
+                <a:rPr sz="816">
                   <a:solidFill>
                     <a:srgbClr val="1A1A1A">
                       <a:alpha val="100000"/>
@@ -5920,14 +4539,14 @@
         </p:sp>
         <p:sp>
           <p:nvSpPr>
-            <p:cNvPr id="75" name="tx75"/>
-            <p:cNvSpPr/>
-            <p:nvPr/>
-          </p:nvSpPr>
-          <p:spPr>
-            <a:xfrm>
-              <a:off x="2222982" y="2323870"/>
-              <a:ext cx="741134" cy="98866"/>
+            <p:cNvPr id="39" name="tx39"/>
+            <p:cNvSpPr/>
+            <p:nvPr/>
+          </p:nvSpPr>
+          <p:spPr>
+            <a:xfrm>
+              <a:off x="1478471" y="1923406"/>
+              <a:ext cx="719959" cy="96041"/>
             </a:xfrm>
             <a:prstGeom prst="rect">
               <a:avLst/>
@@ -5940,7 +4559,7 @@
             <a:p>
               <a:pPr algn="l" marL="0" marR="0" indent="0">
                 <a:lnSpc>
-                  <a:spcPts val="840"/>
+                  <a:spcPts val="816"/>
                 </a:lnSpc>
                 <a:spcBef>
                   <a:spcPts val="0"/>
@@ -5950,7 +4569,7 @@
                 </a:spcAft>
               </a:pPr>
               <a:r>
-                <a:rPr sz="840">
+                <a:rPr sz="816">
                   <a:solidFill>
                     <a:srgbClr val="1A1A1A">
                       <a:alpha val="100000"/>
@@ -5966,29 +4585,29 @@
         </p:sp>
         <p:sp>
           <p:nvSpPr>
-            <p:cNvPr id="76" name="pl76"/>
-            <p:cNvSpPr/>
-            <p:nvPr/>
-          </p:nvSpPr>
-          <p:spPr>
-            <a:xfrm>
-              <a:off x="2990687" y="4904366"/>
-              <a:ext cx="33212" cy="0"/>
+            <p:cNvPr id="40" name="pl40"/>
+            <p:cNvSpPr/>
+            <p:nvPr/>
+          </p:nvSpPr>
+          <p:spPr>
+            <a:xfrm>
+              <a:off x="2224241" y="4587467"/>
+              <a:ext cx="32264" cy="0"/>
             </a:xfrm>
             <a:custGeom>
               <a:avLst/>
               <a:pathLst>
-                <a:path w="33212" h="0">
+                <a:path w="32264" h="0">
                   <a:moveTo>
                     <a:pt x="0" y="0"/>
                   </a:moveTo>
                   <a:lnTo>
-                    <a:pt x="33212" y="0"/>
+                    <a:pt x="32264" y="0"/>
                   </a:lnTo>
                 </a:path>
               </a:pathLst>
             </a:custGeom>
-            <a:ln w="12934" cap="flat">
+            <a:ln w="12565" cap="flat">
               <a:solidFill>
                 <a:srgbClr val="000000">
                   <a:alpha val="100000"/>
@@ -6006,29 +4625,29 @@
         </p:sp>
         <p:sp>
           <p:nvSpPr>
-            <p:cNvPr id="77" name="pl77"/>
-            <p:cNvSpPr/>
-            <p:nvPr/>
-          </p:nvSpPr>
-          <p:spPr>
-            <a:xfrm>
-              <a:off x="2990687" y="4400403"/>
-              <a:ext cx="33212" cy="0"/>
+            <p:cNvPr id="41" name="pl41"/>
+            <p:cNvSpPr/>
+            <p:nvPr/>
+          </p:nvSpPr>
+          <p:spPr>
+            <a:xfrm>
+              <a:off x="2224241" y="3936190"/>
+              <a:ext cx="32264" cy="0"/>
             </a:xfrm>
             <a:custGeom>
               <a:avLst/>
               <a:pathLst>
-                <a:path w="33212" h="0">
+                <a:path w="32264" h="0">
                   <a:moveTo>
                     <a:pt x="0" y="0"/>
                   </a:moveTo>
                   <a:lnTo>
-                    <a:pt x="33212" y="0"/>
+                    <a:pt x="32264" y="0"/>
                   </a:lnTo>
                 </a:path>
               </a:pathLst>
             </a:custGeom>
-            <a:ln w="12934" cap="flat">
+            <a:ln w="12565" cap="flat">
               <a:solidFill>
                 <a:srgbClr val="000000">
                   <a:alpha val="100000"/>
@@ -6046,29 +4665,29 @@
         </p:sp>
         <p:sp>
           <p:nvSpPr>
-            <p:cNvPr id="78" name="pl78"/>
-            <p:cNvSpPr/>
-            <p:nvPr/>
-          </p:nvSpPr>
-          <p:spPr>
-            <a:xfrm>
-              <a:off x="2990687" y="3896441"/>
-              <a:ext cx="33212" cy="0"/>
+            <p:cNvPr id="42" name="pl42"/>
+            <p:cNvSpPr/>
+            <p:nvPr/>
+          </p:nvSpPr>
+          <p:spPr>
+            <a:xfrm>
+              <a:off x="2224241" y="3284912"/>
+              <a:ext cx="32264" cy="0"/>
             </a:xfrm>
             <a:custGeom>
               <a:avLst/>
               <a:pathLst>
-                <a:path w="33212" h="0">
+                <a:path w="32264" h="0">
                   <a:moveTo>
                     <a:pt x="0" y="0"/>
                   </a:moveTo>
                   <a:lnTo>
-                    <a:pt x="33212" y="0"/>
+                    <a:pt x="32264" y="0"/>
                   </a:lnTo>
                 </a:path>
               </a:pathLst>
             </a:custGeom>
-            <a:ln w="12934" cap="flat">
+            <a:ln w="12565" cap="flat">
               <a:solidFill>
                 <a:srgbClr val="000000">
                   <a:alpha val="100000"/>
@@ -6086,29 +4705,29 @@
         </p:sp>
         <p:sp>
           <p:nvSpPr>
-            <p:cNvPr id="79" name="pl79"/>
-            <p:cNvSpPr/>
-            <p:nvPr/>
-          </p:nvSpPr>
-          <p:spPr>
-            <a:xfrm>
-              <a:off x="2990687" y="3392479"/>
-              <a:ext cx="33212" cy="0"/>
+            <p:cNvPr id="43" name="pl43"/>
+            <p:cNvSpPr/>
+            <p:nvPr/>
+          </p:nvSpPr>
+          <p:spPr>
+            <a:xfrm>
+              <a:off x="2224241" y="2633635"/>
+              <a:ext cx="32264" cy="0"/>
             </a:xfrm>
             <a:custGeom>
               <a:avLst/>
               <a:pathLst>
-                <a:path w="33212" h="0">
+                <a:path w="32264" h="0">
                   <a:moveTo>
                     <a:pt x="0" y="0"/>
                   </a:moveTo>
                   <a:lnTo>
-                    <a:pt x="33212" y="0"/>
+                    <a:pt x="32264" y="0"/>
                   </a:lnTo>
                 </a:path>
               </a:pathLst>
             </a:custGeom>
-            <a:ln w="12934" cap="flat">
+            <a:ln w="12565" cap="flat">
               <a:solidFill>
                 <a:srgbClr val="000000">
                   <a:alpha val="100000"/>
@@ -6126,29 +4745,29 @@
         </p:sp>
         <p:sp>
           <p:nvSpPr>
-            <p:cNvPr id="80" name="pl80"/>
-            <p:cNvSpPr/>
-            <p:nvPr/>
-          </p:nvSpPr>
-          <p:spPr>
-            <a:xfrm>
-              <a:off x="2990687" y="2888517"/>
-              <a:ext cx="33212" cy="0"/>
+            <p:cNvPr id="44" name="pl44"/>
+            <p:cNvSpPr/>
+            <p:nvPr/>
+          </p:nvSpPr>
+          <p:spPr>
+            <a:xfrm>
+              <a:off x="2224241" y="1982357"/>
+              <a:ext cx="32264" cy="0"/>
             </a:xfrm>
             <a:custGeom>
               <a:avLst/>
               <a:pathLst>
-                <a:path w="33212" h="0">
+                <a:path w="32264" h="0">
                   <a:moveTo>
                     <a:pt x="0" y="0"/>
                   </a:moveTo>
                   <a:lnTo>
-                    <a:pt x="33212" y="0"/>
+                    <a:pt x="32264" y="0"/>
                   </a:lnTo>
                 </a:path>
               </a:pathLst>
             </a:custGeom>
-            <a:ln w="12934" cap="flat">
+            <a:ln w="12565" cap="flat">
               <a:solidFill>
                 <a:srgbClr val="000000">
                   <a:alpha val="100000"/>
@@ -6166,29 +4785,29 @@
         </p:sp>
         <p:sp>
           <p:nvSpPr>
-            <p:cNvPr id="81" name="pl81"/>
-            <p:cNvSpPr/>
-            <p:nvPr/>
-          </p:nvSpPr>
-          <p:spPr>
-            <a:xfrm>
-              <a:off x="2990687" y="2384555"/>
-              <a:ext cx="33212" cy="0"/>
+            <p:cNvPr id="45" name="pl45"/>
+            <p:cNvSpPr/>
+            <p:nvPr/>
+          </p:nvSpPr>
+          <p:spPr>
+            <a:xfrm>
+              <a:off x="2256505" y="4978234"/>
+              <a:ext cx="5218876" cy="0"/>
             </a:xfrm>
             <a:custGeom>
               <a:avLst/>
               <a:pathLst>
-                <a:path w="33212" h="0">
+                <a:path w="5218876" h="0">
                   <a:moveTo>
                     <a:pt x="0" y="0"/>
                   </a:moveTo>
                   <a:lnTo>
-                    <a:pt x="33212" y="0"/>
+                    <a:pt x="5218876" y="0"/>
                   </a:lnTo>
                 </a:path>
               </a:pathLst>
             </a:custGeom>
-            <a:ln w="12934" cap="flat">
+            <a:ln w="12565" cap="sq">
               <a:solidFill>
                 <a:srgbClr val="000000">
                   <a:alpha val="100000"/>
@@ -6206,29 +4825,29 @@
         </p:sp>
         <p:sp>
           <p:nvSpPr>
-            <p:cNvPr id="82" name="pl82"/>
-            <p:cNvSpPr/>
-            <p:nvPr/>
-          </p:nvSpPr>
-          <p:spPr>
-            <a:xfrm>
-              <a:off x="3023900" y="5206743"/>
-              <a:ext cx="4127598" cy="0"/>
+            <p:cNvPr id="46" name="pl46"/>
+            <p:cNvSpPr/>
+            <p:nvPr/>
+          </p:nvSpPr>
+          <p:spPr>
+            <a:xfrm>
+              <a:off x="2493727" y="4978234"/>
+              <a:ext cx="0" cy="32264"/>
             </a:xfrm>
             <a:custGeom>
               <a:avLst/>
               <a:pathLst>
-                <a:path w="4127598" h="0">
+                <a:path w="0" h="32264">
                   <a:moveTo>
-                    <a:pt x="0" y="0"/>
+                    <a:pt x="0" y="32264"/>
                   </a:moveTo>
                   <a:lnTo>
-                    <a:pt x="4127598" y="0"/>
+                    <a:pt x="0" y="0"/>
                   </a:lnTo>
                 </a:path>
               </a:pathLst>
             </a:custGeom>
-            <a:ln w="12934" cap="sq">
+            <a:ln w="12565" cap="flat">
               <a:solidFill>
                 <a:srgbClr val="000000">
                   <a:alpha val="100000"/>
@@ -6246,21 +4865,21 @@
         </p:sp>
         <p:sp>
           <p:nvSpPr>
-            <p:cNvPr id="83" name="pl83"/>
-            <p:cNvSpPr/>
-            <p:nvPr/>
-          </p:nvSpPr>
-          <p:spPr>
-            <a:xfrm>
-              <a:off x="4162149" y="5206743"/>
-              <a:ext cx="0" cy="33212"/>
+            <p:cNvPr id="47" name="pl47"/>
+            <p:cNvSpPr/>
+            <p:nvPr/>
+          </p:nvSpPr>
+          <p:spPr>
+            <a:xfrm>
+              <a:off x="3726958" y="4978234"/>
+              <a:ext cx="0" cy="32264"/>
             </a:xfrm>
             <a:custGeom>
               <a:avLst/>
               <a:pathLst>
-                <a:path w="0" h="33212">
+                <a:path w="0" h="32264">
                   <a:moveTo>
-                    <a:pt x="0" y="33212"/>
+                    <a:pt x="0" y="32264"/>
                   </a:moveTo>
                   <a:lnTo>
                     <a:pt x="0" y="0"/>
@@ -6268,7 +4887,7 @@
                 </a:path>
               </a:pathLst>
             </a:custGeom>
-            <a:ln w="12934" cap="flat">
+            <a:ln w="12565" cap="flat">
               <a:solidFill>
                 <a:srgbClr val="000000">
                   <a:alpha val="100000"/>
@@ -6286,21 +4905,21 @@
         </p:sp>
         <p:sp>
           <p:nvSpPr>
-            <p:cNvPr id="84" name="pl84"/>
-            <p:cNvSpPr/>
-            <p:nvPr/>
-          </p:nvSpPr>
-          <p:spPr>
-            <a:xfrm>
-              <a:off x="5683714" y="5206743"/>
-              <a:ext cx="0" cy="33212"/>
+            <p:cNvPr id="48" name="pl48"/>
+            <p:cNvSpPr/>
+            <p:nvPr/>
+          </p:nvSpPr>
+          <p:spPr>
+            <a:xfrm>
+              <a:off x="4960189" y="4978234"/>
+              <a:ext cx="0" cy="32264"/>
             </a:xfrm>
             <a:custGeom>
               <a:avLst/>
               <a:pathLst>
-                <a:path w="0" h="33212">
+                <a:path w="0" h="32264">
                   <a:moveTo>
-                    <a:pt x="0" y="33212"/>
+                    <a:pt x="0" y="32264"/>
                   </a:moveTo>
                   <a:lnTo>
                     <a:pt x="0" y="0"/>
@@ -6308,7 +4927,7 @@
                 </a:path>
               </a:pathLst>
             </a:custGeom>
-            <a:ln w="12934" cap="flat">
+            <a:ln w="12565" cap="flat">
               <a:solidFill>
                 <a:srgbClr val="000000">
                   <a:alpha val="100000"/>
@@ -6326,14 +4945,94 @@
         </p:sp>
         <p:sp>
           <p:nvSpPr>
-            <p:cNvPr id="85" name="tx85"/>
-            <p:cNvSpPr/>
-            <p:nvPr/>
-          </p:nvSpPr>
-          <p:spPr>
-            <a:xfrm>
-              <a:off x="4132484" y="5264912"/>
-              <a:ext cx="59330" cy="77978"/>
+            <p:cNvPr id="49" name="pl49"/>
+            <p:cNvSpPr/>
+            <p:nvPr/>
+          </p:nvSpPr>
+          <p:spPr>
+            <a:xfrm>
+              <a:off x="6193421" y="4978234"/>
+              <a:ext cx="0" cy="32264"/>
+            </a:xfrm>
+            <a:custGeom>
+              <a:avLst/>
+              <a:pathLst>
+                <a:path w="0" h="32264">
+                  <a:moveTo>
+                    <a:pt x="0" y="32264"/>
+                  </a:moveTo>
+                  <a:lnTo>
+                    <a:pt x="0" y="0"/>
+                  </a:lnTo>
+                </a:path>
+              </a:pathLst>
+            </a:custGeom>
+            <a:ln w="12565" cap="flat">
+              <a:solidFill>
+                <a:srgbClr val="000000">
+                  <a:alpha val="100000"/>
+                </a:srgbClr>
+              </a:solidFill>
+              <a:prstDash val="solid"/>
+              <a:round/>
+            </a:ln>
+          </p:spPr>
+          <p:txBody>
+            <a:bodyPr/>
+            <a:lstStyle/>
+            <a:p/>
+          </p:txBody>
+        </p:sp>
+        <p:sp>
+          <p:nvSpPr>
+            <p:cNvPr id="50" name="pl50"/>
+            <p:cNvSpPr/>
+            <p:nvPr/>
+          </p:nvSpPr>
+          <p:spPr>
+            <a:xfrm>
+              <a:off x="7426652" y="4978234"/>
+              <a:ext cx="0" cy="32264"/>
+            </a:xfrm>
+            <a:custGeom>
+              <a:avLst/>
+              <a:pathLst>
+                <a:path w="0" h="32264">
+                  <a:moveTo>
+                    <a:pt x="0" y="32264"/>
+                  </a:moveTo>
+                  <a:lnTo>
+                    <a:pt x="0" y="0"/>
+                  </a:lnTo>
+                </a:path>
+              </a:pathLst>
+            </a:custGeom>
+            <a:ln w="12565" cap="flat">
+              <a:solidFill>
+                <a:srgbClr val="000000">
+                  <a:alpha val="100000"/>
+                </a:srgbClr>
+              </a:solidFill>
+              <a:prstDash val="solid"/>
+              <a:round/>
+            </a:ln>
+          </p:spPr>
+          <p:txBody>
+            <a:bodyPr/>
+            <a:lstStyle/>
+            <a:p/>
+          </p:txBody>
+        </p:sp>
+        <p:sp>
+          <p:nvSpPr>
+            <p:cNvPr id="51" name="tx51"/>
+            <p:cNvSpPr/>
+            <p:nvPr/>
+          </p:nvSpPr>
+          <p:spPr>
+            <a:xfrm>
+              <a:off x="2464909" y="5034740"/>
+              <a:ext cx="57635" cy="75750"/>
             </a:xfrm>
             <a:prstGeom prst="rect">
               <a:avLst/>
@@ -6346,7 +5045,7 @@
             <a:p>
               <a:pPr algn="l" marL="0" marR="0" indent="0">
                 <a:lnSpc>
-                  <a:spcPts val="840"/>
+                  <a:spcPts val="816"/>
                 </a:lnSpc>
                 <a:spcBef>
                   <a:spcPts val="0"/>
@@ -6356,7 +5055,7 @@
                 </a:spcAft>
               </a:pPr>
               <a:r>
-                <a:rPr sz="840">
+                <a:rPr sz="816">
                   <a:solidFill>
                     <a:srgbClr val="1A1A1A">
                       <a:alpha val="100000"/>
@@ -6372,14 +5071,14 @@
         </p:sp>
         <p:sp>
           <p:nvSpPr>
-            <p:cNvPr id="86" name="tx86"/>
-            <p:cNvSpPr/>
-            <p:nvPr/>
-          </p:nvSpPr>
-          <p:spPr>
-            <a:xfrm>
-              <a:off x="5654049" y="5266266"/>
-              <a:ext cx="59330" cy="76624"/>
+            <p:cNvPr id="52" name="tx52"/>
+            <p:cNvSpPr/>
+            <p:nvPr/>
+          </p:nvSpPr>
+          <p:spPr>
+            <a:xfrm>
+              <a:off x="3669323" y="5034740"/>
+              <a:ext cx="115270" cy="75750"/>
             </a:xfrm>
             <a:prstGeom prst="rect">
               <a:avLst/>
@@ -6392,7 +5091,7 @@
             <a:p>
               <a:pPr algn="l" marL="0" marR="0" indent="0">
                 <a:lnSpc>
-                  <a:spcPts val="840"/>
+                  <a:spcPts val="816"/>
                 </a:lnSpc>
                 <a:spcBef>
                   <a:spcPts val="0"/>
@@ -6402,7 +5101,7 @@
                 </a:spcAft>
               </a:pPr>
               <a:r>
-                <a:rPr sz="840">
+                <a:rPr sz="816">
                   <a:solidFill>
                     <a:srgbClr val="1A1A1A">
                       <a:alpha val="100000"/>
@@ -6411,21 +5110,21 @@
                   <a:latin typeface="Arial"/>
                   <a:cs typeface="Arial"/>
                 </a:rPr>
-                <a:t>5</a:t>
+                <a:t>20</a:t>
               </a:r>
             </a:p>
           </p:txBody>
         </p:sp>
         <p:sp>
           <p:nvSpPr>
-            <p:cNvPr id="87" name="tx87"/>
-            <p:cNvSpPr/>
-            <p:nvPr/>
-          </p:nvSpPr>
-          <p:spPr>
-            <a:xfrm>
-              <a:off x="4454124" y="5395298"/>
-              <a:ext cx="1267150" cy="98710"/>
+            <p:cNvPr id="53" name="tx53"/>
+            <p:cNvSpPr/>
+            <p:nvPr/>
+          </p:nvSpPr>
+          <p:spPr>
+            <a:xfrm>
+              <a:off x="4902554" y="5034740"/>
+              <a:ext cx="115270" cy="75750"/>
             </a:xfrm>
             <a:prstGeom prst="rect">
               <a:avLst/>
@@ -6438,7 +5137,7 @@
             <a:p>
               <a:pPr algn="l" marL="0" marR="0" indent="0">
                 <a:lnSpc>
-                  <a:spcPts val="1050"/>
+                  <a:spcPts val="816"/>
                 </a:lnSpc>
                 <a:spcBef>
                   <a:spcPts val="0"/>
@@ -6448,255 +5147,30 @@
                 </a:spcAft>
               </a:pPr>
               <a:r>
-                <a:rPr sz="1050" b="1">
+                <a:rPr sz="816">
                   <a:solidFill>
-                    <a:srgbClr val="111111">
+                    <a:srgbClr val="1A1A1A">
                       <a:alpha val="100000"/>
                     </a:srgbClr>
                   </a:solidFill>
                   <a:latin typeface="Arial"/>
                   <a:cs typeface="Arial"/>
                 </a:rPr>
-                <a:t>Coefficient estimate</a:t>
+                <a:t>40</a:t>
               </a:r>
             </a:p>
           </p:txBody>
         </p:sp>
         <p:sp>
           <p:nvSpPr>
-            <p:cNvPr id="88" name="pt88"/>
-            <p:cNvSpPr/>
-            <p:nvPr/>
-          </p:nvSpPr>
-          <p:spPr>
-            <a:xfrm>
-              <a:off x="3278492" y="1730934"/>
-              <a:ext cx="84474" cy="84474"/>
-            </a:xfrm>
-            <a:prstGeom prst="ellipse">
-              <a:avLst/>
-            </a:prstGeom>
-            <a:solidFill>
-              <a:srgbClr val="FC8D59">
-                <a:alpha val="100000"/>
-              </a:srgbClr>
-            </a:solidFill>
-            <a:ln w="8590" cap="rnd">
-              <a:solidFill>
-                <a:srgbClr val="FC8D59">
-                  <a:alpha val="100000"/>
-                </a:srgbClr>
-              </a:solidFill>
-              <a:prstDash val="solid"/>
-              <a:round/>
-            </a:ln>
-          </p:spPr>
-          <p:txBody>
-            <a:bodyPr/>
-            <a:lstStyle/>
-            <a:p/>
-          </p:txBody>
-        </p:sp>
-        <p:sp>
-          <p:nvSpPr>
-            <p:cNvPr id="89" name="pl89"/>
-            <p:cNvSpPr/>
-            <p:nvPr/>
-          </p:nvSpPr>
-          <p:spPr>
-            <a:xfrm>
-              <a:off x="3232947" y="1773172"/>
-              <a:ext cx="175564" cy="0"/>
-            </a:xfrm>
-            <a:custGeom>
-              <a:avLst/>
-              <a:pathLst>
-                <a:path w="175564" h="0">
-                  <a:moveTo>
-                    <a:pt x="0" y="0"/>
-                  </a:moveTo>
-                  <a:lnTo>
-                    <a:pt x="175564" y="0"/>
-                  </a:lnTo>
-                </a:path>
-              </a:pathLst>
-            </a:custGeom>
-            <a:ln w="20325" cap="flat">
-              <a:solidFill>
-                <a:srgbClr val="FC8D59">
-                  <a:alpha val="100000"/>
-                </a:srgbClr>
-              </a:solidFill>
-              <a:prstDash val="solid"/>
-              <a:round/>
-            </a:ln>
-          </p:spPr>
-          <p:txBody>
-            <a:bodyPr/>
-            <a:lstStyle/>
-            <a:p/>
-          </p:txBody>
-        </p:sp>
-        <p:sp>
-          <p:nvSpPr>
-            <p:cNvPr id="90" name="pt90"/>
-            <p:cNvSpPr/>
-            <p:nvPr/>
-          </p:nvSpPr>
-          <p:spPr>
-            <a:xfrm>
-              <a:off x="4650615" y="1730934"/>
-              <a:ext cx="84474" cy="84474"/>
-            </a:xfrm>
-            <a:prstGeom prst="ellipse">
-              <a:avLst/>
-            </a:prstGeom>
-            <a:solidFill>
-              <a:srgbClr val="31A354">
-                <a:alpha val="100000"/>
-              </a:srgbClr>
-            </a:solidFill>
-            <a:ln w="8590" cap="rnd">
-              <a:solidFill>
-                <a:srgbClr val="31A354">
-                  <a:alpha val="100000"/>
-                </a:srgbClr>
-              </a:solidFill>
-              <a:prstDash val="solid"/>
-              <a:round/>
-            </a:ln>
-          </p:spPr>
-          <p:txBody>
-            <a:bodyPr/>
-            <a:lstStyle/>
-            <a:p/>
-          </p:txBody>
-        </p:sp>
-        <p:sp>
-          <p:nvSpPr>
-            <p:cNvPr id="91" name="pl91"/>
-            <p:cNvSpPr/>
-            <p:nvPr/>
-          </p:nvSpPr>
-          <p:spPr>
-            <a:xfrm>
-              <a:off x="4605070" y="1773172"/>
-              <a:ext cx="175564" cy="0"/>
-            </a:xfrm>
-            <a:custGeom>
-              <a:avLst/>
-              <a:pathLst>
-                <a:path w="175564" h="0">
-                  <a:moveTo>
-                    <a:pt x="0" y="0"/>
-                  </a:moveTo>
-                  <a:lnTo>
-                    <a:pt x="175564" y="0"/>
-                  </a:lnTo>
-                </a:path>
-              </a:pathLst>
-            </a:custGeom>
-            <a:ln w="20325" cap="flat">
-              <a:solidFill>
-                <a:srgbClr val="31A354">
-                  <a:alpha val="100000"/>
-                </a:srgbClr>
-              </a:solidFill>
-              <a:prstDash val="solid"/>
-              <a:round/>
-            </a:ln>
-          </p:spPr>
-          <p:txBody>
-            <a:bodyPr/>
-            <a:lstStyle/>
-            <a:p/>
-          </p:txBody>
-        </p:sp>
-        <p:sp>
-          <p:nvSpPr>
-            <p:cNvPr id="92" name="pt92"/>
-            <p:cNvSpPr/>
-            <p:nvPr/>
-          </p:nvSpPr>
-          <p:spPr>
-            <a:xfrm>
-              <a:off x="5791615" y="1730934"/>
-              <a:ext cx="84474" cy="84474"/>
-            </a:xfrm>
-            <a:prstGeom prst="ellipse">
-              <a:avLst/>
-            </a:prstGeom>
-            <a:solidFill>
-              <a:srgbClr val="2C7FB8">
-                <a:alpha val="100000"/>
-              </a:srgbClr>
-            </a:solidFill>
-            <a:ln w="8590" cap="rnd">
-              <a:solidFill>
-                <a:srgbClr val="2C7FB8">
-                  <a:alpha val="100000"/>
-                </a:srgbClr>
-              </a:solidFill>
-              <a:prstDash val="solid"/>
-              <a:round/>
-            </a:ln>
-          </p:spPr>
-          <p:txBody>
-            <a:bodyPr/>
-            <a:lstStyle/>
-            <a:p/>
-          </p:txBody>
-        </p:sp>
-        <p:sp>
-          <p:nvSpPr>
-            <p:cNvPr id="93" name="pl93"/>
-            <p:cNvSpPr/>
-            <p:nvPr/>
-          </p:nvSpPr>
-          <p:spPr>
-            <a:xfrm>
-              <a:off x="5746070" y="1773172"/>
-              <a:ext cx="175564" cy="0"/>
-            </a:xfrm>
-            <a:custGeom>
-              <a:avLst/>
-              <a:pathLst>
-                <a:path w="175564" h="0">
-                  <a:moveTo>
-                    <a:pt x="0" y="0"/>
-                  </a:moveTo>
-                  <a:lnTo>
-                    <a:pt x="175564" y="0"/>
-                  </a:lnTo>
-                </a:path>
-              </a:pathLst>
-            </a:custGeom>
-            <a:ln w="20325" cap="flat">
-              <a:solidFill>
-                <a:srgbClr val="2C7FB8">
-                  <a:alpha val="100000"/>
-                </a:srgbClr>
-              </a:solidFill>
-              <a:prstDash val="solid"/>
-              <a:round/>
-            </a:ln>
-          </p:spPr>
-          <p:txBody>
-            <a:bodyPr/>
-            <a:lstStyle/>
-            <a:p/>
-          </p:txBody>
-        </p:sp>
-        <p:sp>
-          <p:nvSpPr>
-            <p:cNvPr id="94" name="tx94"/>
-            <p:cNvSpPr/>
-            <p:nvPr/>
-          </p:nvSpPr>
-          <p:spPr>
-            <a:xfrm>
-              <a:off x="3496883" y="1732437"/>
-              <a:ext cx="1019814" cy="78916"/>
+            <p:cNvPr id="54" name="tx54"/>
+            <p:cNvSpPr/>
+            <p:nvPr/>
+          </p:nvSpPr>
+          <p:spPr>
+            <a:xfrm>
+              <a:off x="6135785" y="5034740"/>
+              <a:ext cx="115270" cy="75750"/>
             </a:xfrm>
             <a:prstGeom prst="rect">
               <a:avLst/>
@@ -6709,7 +5183,7 @@
             <a:p>
               <a:pPr algn="l" marL="0" marR="0" indent="0">
                 <a:lnSpc>
-                  <a:spcPts val="840"/>
+                  <a:spcPts val="816"/>
                 </a:lnSpc>
                 <a:spcBef>
                   <a:spcPts val="0"/>
@@ -6719,30 +5193,30 @@
                 </a:spcAft>
               </a:pPr>
               <a:r>
-                <a:rPr sz="840">
+                <a:rPr sz="816">
                   <a:solidFill>
-                    <a:srgbClr val="000000">
+                    <a:srgbClr val="1A1A1A">
                       <a:alpha val="100000"/>
                     </a:srgbClr>
                   </a:solidFill>
                   <a:latin typeface="Arial"/>
                   <a:cs typeface="Arial"/>
                 </a:rPr>
-                <a:t>Alternative user-effort</a:t>
+                <a:t>60</a:t>
               </a:r>
             </a:p>
           </p:txBody>
         </p:sp>
         <p:sp>
           <p:nvSpPr>
-            <p:cNvPr id="95" name="tx95"/>
-            <p:cNvSpPr/>
-            <p:nvPr/>
-          </p:nvSpPr>
-          <p:spPr>
-            <a:xfrm>
-              <a:off x="4869006" y="1732437"/>
-              <a:ext cx="788692" cy="78916"/>
+            <p:cNvPr id="55" name="tx55"/>
+            <p:cNvSpPr/>
+            <p:nvPr/>
+          </p:nvSpPr>
+          <p:spPr>
+            <a:xfrm>
+              <a:off x="7369017" y="5034740"/>
+              <a:ext cx="115270" cy="75750"/>
             </a:xfrm>
             <a:prstGeom prst="rect">
               <a:avLst/>
@@ -6755,7 +5229,7 @@
             <a:p>
               <a:pPr algn="l" marL="0" marR="0" indent="0">
                 <a:lnSpc>
-                  <a:spcPts val="840"/>
+                  <a:spcPts val="816"/>
                 </a:lnSpc>
                 <a:spcBef>
                   <a:spcPts val="0"/>
@@ -6765,30 +5239,30 @@
                 </a:spcAft>
               </a:pPr>
               <a:r>
-                <a:rPr sz="840">
+                <a:rPr sz="816">
                   <a:solidFill>
-                    <a:srgbClr val="000000">
+                    <a:srgbClr val="1A1A1A">
                       <a:alpha val="100000"/>
                     </a:srgbClr>
                   </a:solidFill>
                   <a:latin typeface="Arial"/>
                   <a:cs typeface="Arial"/>
                 </a:rPr>
-                <a:t>Influence-filtered</a:t>
+                <a:t>80</a:t>
               </a:r>
             </a:p>
           </p:txBody>
         </p:sp>
         <p:sp>
           <p:nvSpPr>
-            <p:cNvPr id="96" name="tx96"/>
-            <p:cNvSpPr/>
-            <p:nvPr/>
-          </p:nvSpPr>
-          <p:spPr>
-            <a:xfrm>
-              <a:off x="6010006" y="1711237"/>
-              <a:ext cx="954390" cy="100116"/>
+            <p:cNvPr id="56" name="tx56"/>
+            <p:cNvSpPr/>
+            <p:nvPr/>
+          </p:nvSpPr>
+          <p:spPr>
+            <a:xfrm>
+              <a:off x="3714252" y="5135721"/>
+              <a:ext cx="2303383" cy="121570"/>
             </a:xfrm>
             <a:prstGeom prst="rect">
               <a:avLst/>
@@ -6801,7 +5275,7 @@
             <a:p>
               <a:pPr algn="l" marL="0" marR="0" indent="0">
                 <a:lnSpc>
-                  <a:spcPts val="840"/>
+                  <a:spcPts val="1019"/>
                 </a:lnSpc>
                 <a:spcBef>
                   <a:spcPts val="0"/>
@@ -6811,30 +5285,30 @@
                 </a:spcAft>
               </a:pPr>
               <a:r>
-                <a:rPr sz="840">
+                <a:rPr sz="1019" b="1">
                   <a:solidFill>
-                    <a:srgbClr val="000000">
+                    <a:srgbClr val="111111">
                       <a:alpha val="100000"/>
                     </a:srgbClr>
                   </a:solidFill>
                   <a:latin typeface="Arial"/>
                   <a:cs typeface="Arial"/>
                 </a:rPr>
-                <a:t>Primary report-effort</a:t>
+                <a:t>Bootstrapped relative importance (%)</a:t>
               </a:r>
             </a:p>
           </p:txBody>
         </p:sp>
         <p:sp>
           <p:nvSpPr>
-            <p:cNvPr id="97" name="tx97"/>
-            <p:cNvSpPr/>
-            <p:nvPr/>
-          </p:nvSpPr>
-          <p:spPr>
-            <a:xfrm>
-              <a:off x="1827654" y="1502492"/>
-              <a:ext cx="81226" cy="79157"/>
+            <p:cNvPr id="57" name="tx57"/>
+            <p:cNvSpPr/>
+            <p:nvPr/>
+          </p:nvSpPr>
+          <p:spPr>
+            <a:xfrm>
+              <a:off x="1094237" y="1499531"/>
+              <a:ext cx="79107" cy="77092"/>
             </a:xfrm>
             <a:prstGeom prst="rect">
               <a:avLst/>
@@ -6847,7 +5321,7 @@
             <a:p>
               <a:pPr algn="l" marL="0" marR="0" indent="0">
                 <a:lnSpc>
-                  <a:spcPts val="1150"/>
+                  <a:spcPts val="1120"/>
                 </a:lnSpc>
                 <a:spcBef>
                   <a:spcPts val="0"/>
@@ -6857,7 +5331,7 @@
                 </a:spcAft>
               </a:pPr>
               <a:r>
-                <a:rPr sz="1150" b="1">
+                <a:rPr sz="1120" b="1">
                   <a:solidFill>
                     <a:srgbClr val="000000">
                       <a:alpha val="100000"/>
@@ -6873,14 +5347,14 @@
         </p:sp>
         <p:sp>
           <p:nvSpPr>
-            <p:cNvPr id="98" name="rc98"/>
-            <p:cNvSpPr/>
-            <p:nvPr/>
-          </p:nvSpPr>
-          <p:spPr>
-            <a:xfrm>
-              <a:off x="9129183" y="2082177"/>
-              <a:ext cx="4127598" cy="3124565"/>
+            <p:cNvPr id="58" name="rc58"/>
+            <p:cNvSpPr/>
+            <p:nvPr/>
+          </p:nvSpPr>
+          <p:spPr>
+            <a:xfrm>
+              <a:off x="8774486" y="1591591"/>
+              <a:ext cx="5218876" cy="3386642"/>
             </a:xfrm>
             <a:prstGeom prst="rect">
               <a:avLst/>
@@ -6899,161 +5373,383 @@
         </p:sp>
         <p:sp>
           <p:nvSpPr>
-            <p:cNvPr id="99" name="rc99"/>
-            <p:cNvSpPr/>
-            <p:nvPr/>
-          </p:nvSpPr>
-          <p:spPr>
-            <a:xfrm>
-              <a:off x="9316801" y="3012108"/>
-              <a:ext cx="837544" cy="520760"/>
+            <p:cNvPr id="59" name="pl59"/>
+            <p:cNvSpPr/>
+            <p:nvPr/>
+          </p:nvSpPr>
+          <p:spPr>
+            <a:xfrm>
+              <a:off x="9424727" y="1591591"/>
+              <a:ext cx="0" cy="3386642"/>
+            </a:xfrm>
+            <a:custGeom>
+              <a:avLst/>
+              <a:pathLst>
+                <a:path w="0" h="3386642">
+                  <a:moveTo>
+                    <a:pt x="0" y="3386642"/>
+                  </a:moveTo>
+                  <a:lnTo>
+                    <a:pt x="0" y="0"/>
+                  </a:lnTo>
+                  <a:lnTo>
+                    <a:pt x="0" y="0"/>
+                  </a:lnTo>
+                </a:path>
+              </a:pathLst>
+            </a:custGeom>
+            <a:ln w="8130" cap="flat">
+              <a:solidFill>
+                <a:srgbClr val="B0B0B0">
+                  <a:alpha val="34901"/>
+                </a:srgbClr>
+              </a:solidFill>
+              <a:prstDash val="solid"/>
+              <a:round/>
+            </a:ln>
+          </p:spPr>
+          <p:txBody>
+            <a:bodyPr/>
+            <a:lstStyle/>
+            <a:p/>
+          </p:txBody>
+        </p:sp>
+        <p:sp>
+          <p:nvSpPr>
+            <p:cNvPr id="60" name="pl60"/>
+            <p:cNvSpPr/>
+            <p:nvPr/>
+          </p:nvSpPr>
+          <p:spPr>
+            <a:xfrm>
+              <a:off x="10488768" y="1591591"/>
+              <a:ext cx="0" cy="3386642"/>
+            </a:xfrm>
+            <a:custGeom>
+              <a:avLst/>
+              <a:pathLst>
+                <a:path w="0" h="3386642">
+                  <a:moveTo>
+                    <a:pt x="0" y="3386642"/>
+                  </a:moveTo>
+                  <a:lnTo>
+                    <a:pt x="0" y="0"/>
+                  </a:lnTo>
+                  <a:lnTo>
+                    <a:pt x="0" y="0"/>
+                  </a:lnTo>
+                </a:path>
+              </a:pathLst>
+            </a:custGeom>
+            <a:ln w="8130" cap="flat">
+              <a:solidFill>
+                <a:srgbClr val="B0B0B0">
+                  <a:alpha val="34901"/>
+                </a:srgbClr>
+              </a:solidFill>
+              <a:prstDash val="solid"/>
+              <a:round/>
+            </a:ln>
+          </p:spPr>
+          <p:txBody>
+            <a:bodyPr/>
+            <a:lstStyle/>
+            <a:p/>
+          </p:txBody>
+        </p:sp>
+        <p:sp>
+          <p:nvSpPr>
+            <p:cNvPr id="61" name="pl61"/>
+            <p:cNvSpPr/>
+            <p:nvPr/>
+          </p:nvSpPr>
+          <p:spPr>
+            <a:xfrm>
+              <a:off x="11552808" y="1591591"/>
+              <a:ext cx="0" cy="3386642"/>
+            </a:xfrm>
+            <a:custGeom>
+              <a:avLst/>
+              <a:pathLst>
+                <a:path w="0" h="3386642">
+                  <a:moveTo>
+                    <a:pt x="0" y="3386642"/>
+                  </a:moveTo>
+                  <a:lnTo>
+                    <a:pt x="0" y="0"/>
+                  </a:lnTo>
+                  <a:lnTo>
+                    <a:pt x="0" y="0"/>
+                  </a:lnTo>
+                </a:path>
+              </a:pathLst>
+            </a:custGeom>
+            <a:ln w="8130" cap="flat">
+              <a:solidFill>
+                <a:srgbClr val="B0B0B0">
+                  <a:alpha val="34901"/>
+                </a:srgbClr>
+              </a:solidFill>
+              <a:prstDash val="solid"/>
+              <a:round/>
+            </a:ln>
+          </p:spPr>
+          <p:txBody>
+            <a:bodyPr/>
+            <a:lstStyle/>
+            <a:p/>
+          </p:txBody>
+        </p:sp>
+        <p:sp>
+          <p:nvSpPr>
+            <p:cNvPr id="62" name="pl62"/>
+            <p:cNvSpPr/>
+            <p:nvPr/>
+          </p:nvSpPr>
+          <p:spPr>
+            <a:xfrm>
+              <a:off x="12616849" y="1591591"/>
+              <a:ext cx="0" cy="3386642"/>
+            </a:xfrm>
+            <a:custGeom>
+              <a:avLst/>
+              <a:pathLst>
+                <a:path w="0" h="3386642">
+                  <a:moveTo>
+                    <a:pt x="0" y="3386642"/>
+                  </a:moveTo>
+                  <a:lnTo>
+                    <a:pt x="0" y="0"/>
+                  </a:lnTo>
+                  <a:lnTo>
+                    <a:pt x="0" y="0"/>
+                  </a:lnTo>
+                </a:path>
+              </a:pathLst>
+            </a:custGeom>
+            <a:ln w="8130" cap="flat">
+              <a:solidFill>
+                <a:srgbClr val="B0B0B0">
+                  <a:alpha val="34901"/>
+                </a:srgbClr>
+              </a:solidFill>
+              <a:prstDash val="solid"/>
+              <a:round/>
+            </a:ln>
+          </p:spPr>
+          <p:txBody>
+            <a:bodyPr/>
+            <a:lstStyle/>
+            <a:p/>
+          </p:txBody>
+        </p:sp>
+        <p:sp>
+          <p:nvSpPr>
+            <p:cNvPr id="63" name="pl63"/>
+            <p:cNvSpPr/>
+            <p:nvPr/>
+          </p:nvSpPr>
+          <p:spPr>
+            <a:xfrm>
+              <a:off x="13680890" y="1591591"/>
+              <a:ext cx="0" cy="3386642"/>
+            </a:xfrm>
+            <a:custGeom>
+              <a:avLst/>
+              <a:pathLst>
+                <a:path w="0" h="3386642">
+                  <a:moveTo>
+                    <a:pt x="0" y="3386642"/>
+                  </a:moveTo>
+                  <a:lnTo>
+                    <a:pt x="0" y="0"/>
+                  </a:lnTo>
+                  <a:lnTo>
+                    <a:pt x="0" y="0"/>
+                  </a:lnTo>
+                </a:path>
+              </a:pathLst>
+            </a:custGeom>
+            <a:ln w="8130" cap="flat">
+              <a:solidFill>
+                <a:srgbClr val="B0B0B0">
+                  <a:alpha val="34901"/>
+                </a:srgbClr>
+              </a:solidFill>
+              <a:prstDash val="solid"/>
+              <a:round/>
+            </a:ln>
+          </p:spPr>
+          <p:txBody>
+            <a:bodyPr/>
+            <a:lstStyle/>
+            <a:p/>
+          </p:txBody>
+        </p:sp>
+        <p:sp>
+          <p:nvSpPr>
+            <p:cNvPr id="64" name="pl64"/>
+            <p:cNvSpPr/>
+            <p:nvPr/>
+          </p:nvSpPr>
+          <p:spPr>
+            <a:xfrm>
+              <a:off x="12616849" y="1591591"/>
+              <a:ext cx="0" cy="3386642"/>
+            </a:xfrm>
+            <a:custGeom>
+              <a:avLst/>
+              <a:pathLst>
+                <a:path w="0" h="3386642">
+                  <a:moveTo>
+                    <a:pt x="0" y="3386642"/>
+                  </a:moveTo>
+                  <a:lnTo>
+                    <a:pt x="0" y="0"/>
+                  </a:lnTo>
+                  <a:lnTo>
+                    <a:pt x="0" y="0"/>
+                  </a:lnTo>
+                </a:path>
+              </a:pathLst>
+            </a:custGeom>
+            <a:ln w="21681" cap="flat">
+              <a:solidFill>
+                <a:srgbClr val="6E6E6E">
+                  <a:alpha val="100000"/>
+                </a:srgbClr>
+              </a:solidFill>
+              <a:prstDash val="dash"/>
+              <a:round/>
+            </a:ln>
+          </p:spPr>
+          <p:txBody>
+            <a:bodyPr/>
+            <a:lstStyle/>
+            <a:p/>
+          </p:txBody>
+        </p:sp>
+        <p:sp>
+          <p:nvSpPr>
+            <p:cNvPr id="65" name="rc65"/>
+            <p:cNvSpPr/>
+            <p:nvPr/>
+          </p:nvSpPr>
+          <p:spPr>
+            <a:xfrm>
+              <a:off x="12616849" y="2591457"/>
+              <a:ext cx="1120289" cy="580567"/>
             </a:xfrm>
             <a:prstGeom prst="rect">
               <a:avLst/>
             </a:prstGeom>
             <a:solidFill>
-              <a:srgbClr val="9ECAE1">
+              <a:srgbClr val="FC8D59">
                 <a:alpha val="100000"/>
               </a:srgbClr>
             </a:solidFill>
-            <a:ln w="12934" cap="flat">
-              <a:solidFill>
-                <a:srgbClr val="FFFFFF">
-                  <a:alpha val="100000"/>
-                </a:srgbClr>
-              </a:solidFill>
-              <a:prstDash val="solid"/>
-              <a:miter/>
-            </a:ln>
-          </p:spPr>
-          <p:txBody>
-            <a:bodyPr/>
-            <a:lstStyle/>
-            <a:p/>
-          </p:txBody>
-        </p:sp>
-        <p:sp>
-          <p:nvSpPr>
-            <p:cNvPr id="100" name="rc100"/>
-            <p:cNvSpPr/>
-            <p:nvPr/>
-          </p:nvSpPr>
-          <p:spPr>
-            <a:xfrm>
-              <a:off x="9316801" y="3756052"/>
-              <a:ext cx="823991" cy="520760"/>
+          </p:spPr>
+          <p:txBody>
+            <a:bodyPr/>
+            <a:lstStyle/>
+            <a:p/>
+          </p:txBody>
+        </p:sp>
+        <p:sp>
+          <p:nvSpPr>
+            <p:cNvPr id="66" name="rc66"/>
+            <p:cNvSpPr/>
+            <p:nvPr/>
+          </p:nvSpPr>
+          <p:spPr>
+            <a:xfrm>
+              <a:off x="9011707" y="1785113"/>
+              <a:ext cx="3605141" cy="580567"/>
             </a:xfrm>
             <a:prstGeom prst="rect">
               <a:avLst/>
             </a:prstGeom>
             <a:solidFill>
-              <a:srgbClr val="9ECAE1">
+              <a:srgbClr val="FC8D59">
                 <a:alpha val="100000"/>
               </a:srgbClr>
             </a:solidFill>
-            <a:ln w="12934" cap="flat">
-              <a:solidFill>
-                <a:srgbClr val="FFFFFF">
-                  <a:alpha val="100000"/>
-                </a:srgbClr>
-              </a:solidFill>
-              <a:prstDash val="solid"/>
-              <a:miter/>
-            </a:ln>
-          </p:spPr>
-          <p:txBody>
-            <a:bodyPr/>
-            <a:lstStyle/>
-            <a:p/>
-          </p:txBody>
-        </p:sp>
-        <p:sp>
-          <p:nvSpPr>
-            <p:cNvPr id="101" name="rc101"/>
-            <p:cNvSpPr/>
-            <p:nvPr/>
-          </p:nvSpPr>
-          <p:spPr>
-            <a:xfrm>
-              <a:off x="9316801" y="4499996"/>
-              <a:ext cx="652483" cy="520760"/>
+          </p:spPr>
+          <p:txBody>
+            <a:bodyPr/>
+            <a:lstStyle/>
+            <a:p/>
+          </p:txBody>
+        </p:sp>
+        <p:sp>
+          <p:nvSpPr>
+            <p:cNvPr id="67" name="rc67"/>
+            <p:cNvSpPr/>
+            <p:nvPr/>
+          </p:nvSpPr>
+          <p:spPr>
+            <a:xfrm>
+              <a:off x="12616849" y="4204144"/>
+              <a:ext cx="1130336" cy="580567"/>
             </a:xfrm>
             <a:prstGeom prst="rect">
               <a:avLst/>
             </a:prstGeom>
             <a:solidFill>
-              <a:srgbClr val="9ECAE1">
+              <a:srgbClr val="FC8D59">
                 <a:alpha val="100000"/>
               </a:srgbClr>
             </a:solidFill>
-            <a:ln w="12934" cap="flat">
-              <a:solidFill>
-                <a:srgbClr val="FFFFFF">
-                  <a:alpha val="100000"/>
-                </a:srgbClr>
-              </a:solidFill>
-              <a:prstDash val="solid"/>
-              <a:miter/>
-            </a:ln>
-          </p:spPr>
-          <p:txBody>
-            <a:bodyPr/>
-            <a:lstStyle/>
-            <a:p/>
-          </p:txBody>
-        </p:sp>
-        <p:sp>
-          <p:nvSpPr>
-            <p:cNvPr id="102" name="rc102"/>
-            <p:cNvSpPr/>
-            <p:nvPr/>
-          </p:nvSpPr>
-          <p:spPr>
-            <a:xfrm>
-              <a:off x="9316801" y="2268163"/>
-              <a:ext cx="3752361" cy="520760"/>
+          </p:spPr>
+          <p:txBody>
+            <a:bodyPr/>
+            <a:lstStyle/>
+            <a:p/>
+          </p:txBody>
+        </p:sp>
+        <p:sp>
+          <p:nvSpPr>
+            <p:cNvPr id="68" name="rc68"/>
+            <p:cNvSpPr/>
+            <p:nvPr/>
+          </p:nvSpPr>
+          <p:spPr>
+            <a:xfrm>
+              <a:off x="12616849" y="3397800"/>
+              <a:ext cx="1139291" cy="580567"/>
             </a:xfrm>
             <a:prstGeom prst="rect">
               <a:avLst/>
             </a:prstGeom>
             <a:solidFill>
-              <a:srgbClr val="FDD0A2">
+              <a:srgbClr val="FC8D59">
                 <a:alpha val="100000"/>
               </a:srgbClr>
             </a:solidFill>
-            <a:ln w="12934" cap="flat">
-              <a:solidFill>
-                <a:srgbClr val="FFFFFF">
-                  <a:alpha val="100000"/>
-                </a:srgbClr>
-              </a:solidFill>
-              <a:prstDash val="solid"/>
-              <a:miter/>
-            </a:ln>
-          </p:spPr>
-          <p:txBody>
-            <a:bodyPr/>
-            <a:lstStyle/>
-            <a:p/>
-          </p:txBody>
-        </p:sp>
-        <p:sp>
-          <p:nvSpPr>
-            <p:cNvPr id="103" name="pl103"/>
-            <p:cNvSpPr/>
-            <p:nvPr/>
-          </p:nvSpPr>
-          <p:spPr>
-            <a:xfrm>
-              <a:off x="9129183" y="2082177"/>
-              <a:ext cx="0" cy="3124565"/>
+          </p:spPr>
+          <p:txBody>
+            <a:bodyPr/>
+            <a:lstStyle/>
+            <a:p/>
+          </p:txBody>
+        </p:sp>
+        <p:sp>
+          <p:nvSpPr>
+            <p:cNvPr id="69" name="pl69"/>
+            <p:cNvSpPr/>
+            <p:nvPr/>
+          </p:nvSpPr>
+          <p:spPr>
+            <a:xfrm>
+              <a:off x="8774486" y="1591591"/>
+              <a:ext cx="0" cy="3386642"/>
             </a:xfrm>
             <a:custGeom>
               <a:avLst/>
               <a:pathLst>
-                <a:path w="0" h="3124565">
+                <a:path w="0" h="3386642">
                   <a:moveTo>
-                    <a:pt x="0" y="3124565"/>
+                    <a:pt x="0" y="3386642"/>
                   </a:moveTo>
                   <a:lnTo>
                     <a:pt x="0" y="0"/>
@@ -7061,7 +5757,7 @@
                 </a:path>
               </a:pathLst>
             </a:custGeom>
-            <a:ln w="12934" cap="sq">
+            <a:ln w="12565" cap="sq">
               <a:solidFill>
                 <a:srgbClr val="000000">
                   <a:alpha val="100000"/>
@@ -7079,14 +5775,14 @@
         </p:sp>
         <p:sp>
           <p:nvSpPr>
-            <p:cNvPr id="104" name="tx104"/>
-            <p:cNvSpPr/>
-            <p:nvPr/>
-          </p:nvSpPr>
-          <p:spPr>
-            <a:xfrm>
-              <a:off x="7373563" y="4699692"/>
-              <a:ext cx="1695836" cy="98866"/>
+            <p:cNvPr id="70" name="tx70"/>
+            <p:cNvSpPr/>
+            <p:nvPr/>
+          </p:nvSpPr>
+          <p:spPr>
+            <a:xfrm>
+              <a:off x="8497508" y="4456122"/>
+              <a:ext cx="218902" cy="75396"/>
             </a:xfrm>
             <a:prstGeom prst="rect">
               <a:avLst/>
@@ -7099,7 +5795,7 @@
             <a:p>
               <a:pPr algn="l" marL="0" marR="0" indent="0">
                 <a:lnSpc>
-                  <a:spcPts val="840"/>
+                  <a:spcPts val="816"/>
                 </a:lnSpc>
                 <a:spcBef>
                   <a:spcPts val="0"/>
@@ -7109,7 +5805,7 @@
                 </a:spcAft>
               </a:pPr>
               <a:r>
-                <a:rPr sz="840">
+                <a:rPr sz="816">
                   <a:solidFill>
                     <a:srgbClr val="1A1A1A">
                       <a:alpha val="100000"/>
@@ -7118,21 +5814,21 @@
                   <a:latin typeface="Arial"/>
                   <a:cs typeface="Arial"/>
                 </a:rPr>
-                <a:t>Influence-filtered report-effort model</a:t>
+                <a:t>Area</a:t>
               </a:r>
             </a:p>
           </p:txBody>
         </p:sp>
         <p:sp>
           <p:nvSpPr>
-            <p:cNvPr id="105" name="tx105"/>
-            <p:cNvSpPr/>
-            <p:nvPr/>
-          </p:nvSpPr>
-          <p:spPr>
-            <a:xfrm>
-              <a:off x="7729389" y="3975698"/>
-              <a:ext cx="1340011" cy="78916"/>
+            <p:cNvPr id="71" name="tx71"/>
+            <p:cNvSpPr/>
+            <p:nvPr/>
+          </p:nvSpPr>
+          <p:spPr>
+            <a:xfrm>
+              <a:off x="7731249" y="3629184"/>
+              <a:ext cx="985161" cy="95991"/>
             </a:xfrm>
             <a:prstGeom prst="rect">
               <a:avLst/>
@@ -7145,7 +5841,7 @@
             <a:p>
               <a:pPr algn="l" marL="0" marR="0" indent="0">
                 <a:lnSpc>
-                  <a:spcPts val="840"/>
+                  <a:spcPts val="816"/>
                 </a:lnSpc>
                 <a:spcBef>
                   <a:spcPts val="0"/>
@@ -7155,7 +5851,7 @@
                 </a:spcAft>
               </a:pPr>
               <a:r>
-                <a:rPr sz="840">
+                <a:rPr sz="816">
                   <a:solidFill>
                     <a:srgbClr val="1A1A1A">
                       <a:alpha val="100000"/>
@@ -7164,21 +5860,21 @@
                   <a:latin typeface="Arial"/>
                   <a:cs typeface="Arial"/>
                 </a:rPr>
-                <a:t>Alternative user-effort model</a:t>
+                <a:t>Habitat heterogeneity</a:t>
               </a:r>
             </a:p>
           </p:txBody>
         </p:sp>
         <p:sp>
           <p:nvSpPr>
-            <p:cNvPr id="106" name="tx106"/>
-            <p:cNvSpPr/>
-            <p:nvPr/>
-          </p:nvSpPr>
-          <p:spPr>
-            <a:xfrm>
-              <a:off x="7794814" y="3210553"/>
-              <a:ext cx="1274586" cy="100116"/>
+            <p:cNvPr id="72" name="tx72"/>
+            <p:cNvSpPr/>
+            <p:nvPr/>
+          </p:nvSpPr>
+          <p:spPr>
+            <a:xfrm>
+              <a:off x="7691324" y="2821575"/>
+              <a:ext cx="1025086" cy="97256"/>
             </a:xfrm>
             <a:prstGeom prst="rect">
               <a:avLst/>
@@ -7191,7 +5887,7 @@
             <a:p>
               <a:pPr algn="l" marL="0" marR="0" indent="0">
                 <a:lnSpc>
-                  <a:spcPts val="840"/>
+                  <a:spcPts val="816"/>
                 </a:lnSpc>
                 <a:spcBef>
                   <a:spcPts val="0"/>
@@ -7201,7 +5897,7 @@
                 </a:spcAft>
               </a:pPr>
               <a:r>
-                <a:rPr sz="840">
+                <a:rPr sz="816">
                   <a:solidFill>
                     <a:srgbClr val="1A1A1A">
                       <a:alpha val="100000"/>
@@ -7210,21 +5906,21 @@
                   <a:latin typeface="Arial"/>
                   <a:cs typeface="Arial"/>
                 </a:rPr>
-                <a:t>Primary report-effort model</a:t>
+                <a:t>Historical survey effort</a:t>
               </a:r>
             </a:p>
           </p:txBody>
         </p:sp>
         <p:sp>
           <p:nvSpPr>
-            <p:cNvPr id="107" name="tx107"/>
-            <p:cNvSpPr/>
-            <p:nvPr/>
-          </p:nvSpPr>
-          <p:spPr>
-            <a:xfrm>
-              <a:off x="7646305" y="2466609"/>
-              <a:ext cx="1423094" cy="100116"/>
+            <p:cNvPr id="73" name="tx73"/>
+            <p:cNvSpPr/>
+            <p:nvPr/>
+          </p:nvSpPr>
+          <p:spPr>
+            <a:xfrm>
+              <a:off x="7996451" y="2016446"/>
+              <a:ext cx="719959" cy="96041"/>
             </a:xfrm>
             <a:prstGeom prst="rect">
               <a:avLst/>
@@ -7237,7 +5933,7 @@
             <a:p>
               <a:pPr algn="l" marL="0" marR="0" indent="0">
                 <a:lnSpc>
-                  <a:spcPts val="840"/>
+                  <a:spcPts val="816"/>
                 </a:lnSpc>
                 <a:spcBef>
                   <a:spcPts val="0"/>
@@ -7247,7 +5943,7 @@
                 </a:spcAft>
               </a:pPr>
               <a:r>
-                <a:rPr sz="840">
+                <a:rPr sz="816">
                   <a:solidFill>
                     <a:srgbClr val="1A1A1A">
                       <a:alpha val="100000"/>
@@ -7256,36 +5952,36 @@
                   <a:latin typeface="Arial"/>
                   <a:cs typeface="Arial"/>
                 </a:rPr>
-                <a:t>Count-based sensitivity model</a:t>
+                <a:t>Per capita GDP</a:t>
               </a:r>
             </a:p>
           </p:txBody>
         </p:sp>
         <p:sp>
           <p:nvSpPr>
-            <p:cNvPr id="108" name="pl108"/>
-            <p:cNvSpPr/>
-            <p:nvPr/>
-          </p:nvSpPr>
-          <p:spPr>
-            <a:xfrm>
-              <a:off x="9095970" y="4760376"/>
-              <a:ext cx="33212" cy="0"/>
+            <p:cNvPr id="74" name="pl74"/>
+            <p:cNvSpPr/>
+            <p:nvPr/>
+          </p:nvSpPr>
+          <p:spPr>
+            <a:xfrm>
+              <a:off x="8742222" y="4494427"/>
+              <a:ext cx="32264" cy="0"/>
             </a:xfrm>
             <a:custGeom>
               <a:avLst/>
               <a:pathLst>
-                <a:path w="33212" h="0">
+                <a:path w="32264" h="0">
                   <a:moveTo>
                     <a:pt x="0" y="0"/>
                   </a:moveTo>
                   <a:lnTo>
-                    <a:pt x="33212" y="0"/>
+                    <a:pt x="32264" y="0"/>
                   </a:lnTo>
                 </a:path>
               </a:pathLst>
             </a:custGeom>
-            <a:ln w="12934" cap="flat">
+            <a:ln w="12565" cap="flat">
               <a:solidFill>
                 <a:srgbClr val="000000">
                   <a:alpha val="100000"/>
@@ -7303,29 +5999,29 @@
         </p:sp>
         <p:sp>
           <p:nvSpPr>
-            <p:cNvPr id="109" name="pl109"/>
-            <p:cNvSpPr/>
-            <p:nvPr/>
-          </p:nvSpPr>
-          <p:spPr>
-            <a:xfrm>
-              <a:off x="9095970" y="4016432"/>
-              <a:ext cx="33212" cy="0"/>
+            <p:cNvPr id="75" name="pl75"/>
+            <p:cNvSpPr/>
+            <p:nvPr/>
+          </p:nvSpPr>
+          <p:spPr>
+            <a:xfrm>
+              <a:off x="8742222" y="3688084"/>
+              <a:ext cx="32264" cy="0"/>
             </a:xfrm>
             <a:custGeom>
               <a:avLst/>
               <a:pathLst>
-                <a:path w="33212" h="0">
+                <a:path w="32264" h="0">
                   <a:moveTo>
                     <a:pt x="0" y="0"/>
                   </a:moveTo>
                   <a:lnTo>
-                    <a:pt x="33212" y="0"/>
+                    <a:pt x="32264" y="0"/>
                   </a:lnTo>
                 </a:path>
               </a:pathLst>
             </a:custGeom>
-            <a:ln w="12934" cap="flat">
+            <a:ln w="12565" cap="flat">
               <a:solidFill>
                 <a:srgbClr val="000000">
                   <a:alpha val="100000"/>
@@ -7343,29 +6039,29 @@
         </p:sp>
         <p:sp>
           <p:nvSpPr>
-            <p:cNvPr id="110" name="pl110"/>
-            <p:cNvSpPr/>
-            <p:nvPr/>
-          </p:nvSpPr>
-          <p:spPr>
-            <a:xfrm>
-              <a:off x="9095970" y="3272488"/>
-              <a:ext cx="33212" cy="0"/>
+            <p:cNvPr id="76" name="pl76"/>
+            <p:cNvSpPr/>
+            <p:nvPr/>
+          </p:nvSpPr>
+          <p:spPr>
+            <a:xfrm>
+              <a:off x="8742222" y="2881740"/>
+              <a:ext cx="32264" cy="0"/>
             </a:xfrm>
             <a:custGeom>
               <a:avLst/>
               <a:pathLst>
-                <a:path w="33212" h="0">
+                <a:path w="32264" h="0">
                   <a:moveTo>
                     <a:pt x="0" y="0"/>
                   </a:moveTo>
                   <a:lnTo>
-                    <a:pt x="33212" y="0"/>
+                    <a:pt x="32264" y="0"/>
                   </a:lnTo>
                 </a:path>
               </a:pathLst>
             </a:custGeom>
-            <a:ln w="12934" cap="flat">
+            <a:ln w="12565" cap="flat">
               <a:solidFill>
                 <a:srgbClr val="000000">
                   <a:alpha val="100000"/>
@@ -7383,29 +6079,29 @@
         </p:sp>
         <p:sp>
           <p:nvSpPr>
-            <p:cNvPr id="111" name="pl111"/>
-            <p:cNvSpPr/>
-            <p:nvPr/>
-          </p:nvSpPr>
-          <p:spPr>
-            <a:xfrm>
-              <a:off x="9095970" y="2528544"/>
-              <a:ext cx="33212" cy="0"/>
+            <p:cNvPr id="77" name="pl77"/>
+            <p:cNvSpPr/>
+            <p:nvPr/>
+          </p:nvSpPr>
+          <p:spPr>
+            <a:xfrm>
+              <a:off x="8742222" y="2075397"/>
+              <a:ext cx="32264" cy="0"/>
             </a:xfrm>
             <a:custGeom>
               <a:avLst/>
               <a:pathLst>
-                <a:path w="33212" h="0">
+                <a:path w="32264" h="0">
                   <a:moveTo>
                     <a:pt x="0" y="0"/>
                   </a:moveTo>
                   <a:lnTo>
-                    <a:pt x="33212" y="0"/>
+                    <a:pt x="32264" y="0"/>
                   </a:lnTo>
                 </a:path>
               </a:pathLst>
             </a:custGeom>
-            <a:ln w="12934" cap="flat">
+            <a:ln w="12565" cap="flat">
               <a:solidFill>
                 <a:srgbClr val="000000">
                   <a:alpha val="100000"/>
@@ -7423,29 +6119,29 @@
         </p:sp>
         <p:sp>
           <p:nvSpPr>
-            <p:cNvPr id="112" name="pl112"/>
-            <p:cNvSpPr/>
-            <p:nvPr/>
-          </p:nvSpPr>
-          <p:spPr>
-            <a:xfrm>
-              <a:off x="9129183" y="5206743"/>
-              <a:ext cx="4127598" cy="0"/>
+            <p:cNvPr id="78" name="pl78"/>
+            <p:cNvSpPr/>
+            <p:nvPr/>
+          </p:nvSpPr>
+          <p:spPr>
+            <a:xfrm>
+              <a:off x="8774486" y="4978234"/>
+              <a:ext cx="5218876" cy="0"/>
             </a:xfrm>
             <a:custGeom>
               <a:avLst/>
               <a:pathLst>
-                <a:path w="4127598" h="0">
+                <a:path w="5218876" h="0">
                   <a:moveTo>
                     <a:pt x="0" y="0"/>
                   </a:moveTo>
                   <a:lnTo>
-                    <a:pt x="4127598" y="0"/>
+                    <a:pt x="5218876" y="0"/>
                   </a:lnTo>
                 </a:path>
               </a:pathLst>
             </a:custGeom>
-            <a:ln w="12934" cap="sq">
+            <a:ln w="12565" cap="sq">
               <a:solidFill>
                 <a:srgbClr val="000000">
                   <a:alpha val="100000"/>
@@ -7463,21 +6159,21 @@
         </p:sp>
         <p:sp>
           <p:nvSpPr>
-            <p:cNvPr id="113" name="pl113"/>
-            <p:cNvSpPr/>
-            <p:nvPr/>
-          </p:nvSpPr>
-          <p:spPr>
-            <a:xfrm>
-              <a:off x="9316801" y="5206743"/>
-              <a:ext cx="0" cy="33212"/>
+            <p:cNvPr id="79" name="pl79"/>
+            <p:cNvSpPr/>
+            <p:nvPr/>
+          </p:nvSpPr>
+          <p:spPr>
+            <a:xfrm>
+              <a:off x="9424727" y="4978234"/>
+              <a:ext cx="0" cy="32264"/>
             </a:xfrm>
             <a:custGeom>
               <a:avLst/>
               <a:pathLst>
-                <a:path w="0" h="33212">
+                <a:path w="0" h="32264">
                   <a:moveTo>
-                    <a:pt x="0" y="33212"/>
+                    <a:pt x="0" y="32264"/>
                   </a:moveTo>
                   <a:lnTo>
                     <a:pt x="0" y="0"/>
@@ -7485,7 +6181,7 @@
                 </a:path>
               </a:pathLst>
             </a:custGeom>
-            <a:ln w="12934" cap="flat">
+            <a:ln w="12565" cap="flat">
               <a:solidFill>
                 <a:srgbClr val="000000">
                   <a:alpha val="100000"/>
@@ -7503,21 +6199,21 @@
         </p:sp>
         <p:sp>
           <p:nvSpPr>
-            <p:cNvPr id="114" name="pl114"/>
-            <p:cNvSpPr/>
-            <p:nvPr/>
-          </p:nvSpPr>
-          <p:spPr>
-            <a:xfrm>
-              <a:off x="10543213" y="5206743"/>
-              <a:ext cx="0" cy="33212"/>
+            <p:cNvPr id="80" name="pl80"/>
+            <p:cNvSpPr/>
+            <p:nvPr/>
+          </p:nvSpPr>
+          <p:spPr>
+            <a:xfrm>
+              <a:off x="10488768" y="4978234"/>
+              <a:ext cx="0" cy="32264"/>
             </a:xfrm>
             <a:custGeom>
               <a:avLst/>
               <a:pathLst>
-                <a:path w="0" h="33212">
+                <a:path w="0" h="32264">
                   <a:moveTo>
-                    <a:pt x="0" y="33212"/>
+                    <a:pt x="0" y="32264"/>
                   </a:moveTo>
                   <a:lnTo>
                     <a:pt x="0" y="0"/>
@@ -7525,7 +6221,7 @@
                 </a:path>
               </a:pathLst>
             </a:custGeom>
-            <a:ln w="12934" cap="flat">
+            <a:ln w="12565" cap="flat">
               <a:solidFill>
                 <a:srgbClr val="000000">
                   <a:alpha val="100000"/>
@@ -7543,21 +6239,21 @@
         </p:sp>
         <p:sp>
           <p:nvSpPr>
-            <p:cNvPr id="115" name="pl115"/>
-            <p:cNvSpPr/>
-            <p:nvPr/>
-          </p:nvSpPr>
-          <p:spPr>
-            <a:xfrm>
-              <a:off x="11769624" y="5206743"/>
-              <a:ext cx="0" cy="33212"/>
+            <p:cNvPr id="81" name="pl81"/>
+            <p:cNvSpPr/>
+            <p:nvPr/>
+          </p:nvSpPr>
+          <p:spPr>
+            <a:xfrm>
+              <a:off x="11552808" y="4978234"/>
+              <a:ext cx="0" cy="32264"/>
             </a:xfrm>
             <a:custGeom>
               <a:avLst/>
               <a:pathLst>
-                <a:path w="0" h="33212">
+                <a:path w="0" h="32264">
                   <a:moveTo>
-                    <a:pt x="0" y="33212"/>
+                    <a:pt x="0" y="32264"/>
                   </a:moveTo>
                   <a:lnTo>
                     <a:pt x="0" y="0"/>
@@ -7565,7 +6261,7 @@
                 </a:path>
               </a:pathLst>
             </a:custGeom>
-            <a:ln w="12934" cap="flat">
+            <a:ln w="12565" cap="flat">
               <a:solidFill>
                 <a:srgbClr val="000000">
                   <a:alpha val="100000"/>
@@ -7583,21 +6279,21 @@
         </p:sp>
         <p:sp>
           <p:nvSpPr>
-            <p:cNvPr id="116" name="pl116"/>
-            <p:cNvSpPr/>
-            <p:nvPr/>
-          </p:nvSpPr>
-          <p:spPr>
-            <a:xfrm>
-              <a:off x="12996036" y="5206743"/>
-              <a:ext cx="0" cy="33212"/>
+            <p:cNvPr id="82" name="pl82"/>
+            <p:cNvSpPr/>
+            <p:nvPr/>
+          </p:nvSpPr>
+          <p:spPr>
+            <a:xfrm>
+              <a:off x="12616849" y="4978234"/>
+              <a:ext cx="0" cy="32264"/>
             </a:xfrm>
             <a:custGeom>
               <a:avLst/>
               <a:pathLst>
-                <a:path w="0" h="33212">
+                <a:path w="0" h="32264">
                   <a:moveTo>
-                    <a:pt x="0" y="33212"/>
+                    <a:pt x="0" y="32264"/>
                   </a:moveTo>
                   <a:lnTo>
                     <a:pt x="0" y="0"/>
@@ -7605,7 +6301,7 @@
                 </a:path>
               </a:pathLst>
             </a:custGeom>
-            <a:ln w="12934" cap="flat">
+            <a:ln w="12565" cap="flat">
               <a:solidFill>
                 <a:srgbClr val="000000">
                   <a:alpha val="100000"/>
@@ -7623,14 +6319,54 @@
         </p:sp>
         <p:sp>
           <p:nvSpPr>
-            <p:cNvPr id="117" name="tx117"/>
-            <p:cNvSpPr/>
-            <p:nvPr/>
-          </p:nvSpPr>
-          <p:spPr>
-            <a:xfrm>
-              <a:off x="9287136" y="5264912"/>
-              <a:ext cx="59330" cy="77978"/>
+            <p:cNvPr id="83" name="pl83"/>
+            <p:cNvSpPr/>
+            <p:nvPr/>
+          </p:nvSpPr>
+          <p:spPr>
+            <a:xfrm>
+              <a:off x="13680890" y="4978234"/>
+              <a:ext cx="0" cy="32264"/>
+            </a:xfrm>
+            <a:custGeom>
+              <a:avLst/>
+              <a:pathLst>
+                <a:path w="0" h="32264">
+                  <a:moveTo>
+                    <a:pt x="0" y="32264"/>
+                  </a:moveTo>
+                  <a:lnTo>
+                    <a:pt x="0" y="0"/>
+                  </a:lnTo>
+                </a:path>
+              </a:pathLst>
+            </a:custGeom>
+            <a:ln w="12565" cap="flat">
+              <a:solidFill>
+                <a:srgbClr val="000000">
+                  <a:alpha val="100000"/>
+                </a:srgbClr>
+              </a:solidFill>
+              <a:prstDash val="solid"/>
+              <a:round/>
+            </a:ln>
+          </p:spPr>
+          <p:txBody>
+            <a:bodyPr/>
+            <a:lstStyle/>
+            <a:p/>
+          </p:txBody>
+        </p:sp>
+        <p:sp>
+          <p:nvSpPr>
+            <p:cNvPr id="84" name="tx84"/>
+            <p:cNvSpPr/>
+            <p:nvPr/>
+          </p:nvSpPr>
+          <p:spPr>
+            <a:xfrm>
+              <a:off x="9306623" y="5034690"/>
+              <a:ext cx="236208" cy="75801"/>
             </a:xfrm>
             <a:prstGeom prst="rect">
               <a:avLst/>
@@ -7643,7 +6379,7 @@
             <a:p>
               <a:pPr algn="l" marL="0" marR="0" indent="0">
                 <a:lnSpc>
-                  <a:spcPts val="840"/>
+                  <a:spcPts val="816"/>
                 </a:lnSpc>
                 <a:spcBef>
                   <a:spcPts val="0"/>
@@ -7653,7 +6389,1440 @@
                 </a:spcAft>
               </a:pPr>
               <a:r>
-                <a:rPr sz="840">
+                <a:rPr sz="816">
+                  <a:solidFill>
+                    <a:srgbClr val="1A1A1A">
+                      <a:alpha val="100000"/>
+                    </a:srgbClr>
+                  </a:solidFill>
+                  <a:latin typeface="Arial"/>
+                  <a:cs typeface="Arial"/>
+                </a:rPr>
+                <a:t>-0.03</a:t>
+              </a:r>
+            </a:p>
+          </p:txBody>
+        </p:sp>
+        <p:sp>
+          <p:nvSpPr>
+            <p:cNvPr id="85" name="tx85"/>
+            <p:cNvSpPr/>
+            <p:nvPr/>
+          </p:nvSpPr>
+          <p:spPr>
+            <a:xfrm>
+              <a:off x="10370664" y="5034740"/>
+              <a:ext cx="236208" cy="75750"/>
+            </a:xfrm>
+            <a:prstGeom prst="rect">
+              <a:avLst/>
+            </a:prstGeom>
+            <a:noFill/>
+          </p:spPr>
+          <p:txBody>
+            <a:bodyPr lIns="0" rIns="0" tIns="0" bIns="0" anchorCtr="1" anchor="ctr" wrap="none"/>
+            <a:lstStyle/>
+            <a:p>
+              <a:pPr algn="l" marL="0" marR="0" indent="0">
+                <a:lnSpc>
+                  <a:spcPts val="816"/>
+                </a:lnSpc>
+                <a:spcBef>
+                  <a:spcPts val="0"/>
+                </a:spcBef>
+                <a:spcAft>
+                  <a:spcPts val="0"/>
+                </a:spcAft>
+              </a:pPr>
+              <a:r>
+                <a:rPr sz="816">
+                  <a:solidFill>
+                    <a:srgbClr val="1A1A1A">
+                      <a:alpha val="100000"/>
+                    </a:srgbClr>
+                  </a:solidFill>
+                  <a:latin typeface="Arial"/>
+                  <a:cs typeface="Arial"/>
+                </a:rPr>
+                <a:t>-0.02</a:t>
+              </a:r>
+            </a:p>
+          </p:txBody>
+        </p:sp>
+        <p:sp>
+          <p:nvSpPr>
+            <p:cNvPr id="86" name="tx86"/>
+            <p:cNvSpPr/>
+            <p:nvPr/>
+          </p:nvSpPr>
+          <p:spPr>
+            <a:xfrm>
+              <a:off x="11434704" y="5034740"/>
+              <a:ext cx="236208" cy="75750"/>
+            </a:xfrm>
+            <a:prstGeom prst="rect">
+              <a:avLst/>
+            </a:prstGeom>
+            <a:noFill/>
+          </p:spPr>
+          <p:txBody>
+            <a:bodyPr lIns="0" rIns="0" tIns="0" bIns="0" anchorCtr="1" anchor="ctr" wrap="none"/>
+            <a:lstStyle/>
+            <a:p>
+              <a:pPr algn="l" marL="0" marR="0" indent="0">
+                <a:lnSpc>
+                  <a:spcPts val="816"/>
+                </a:lnSpc>
+                <a:spcBef>
+                  <a:spcPts val="0"/>
+                </a:spcBef>
+                <a:spcAft>
+                  <a:spcPts val="0"/>
+                </a:spcAft>
+              </a:pPr>
+              <a:r>
+                <a:rPr sz="816">
+                  <a:solidFill>
+                    <a:srgbClr val="1A1A1A">
+                      <a:alpha val="100000"/>
+                    </a:srgbClr>
+                  </a:solidFill>
+                  <a:latin typeface="Arial"/>
+                  <a:cs typeface="Arial"/>
+                </a:rPr>
+                <a:t>-0.01</a:t>
+              </a:r>
+            </a:p>
+          </p:txBody>
+        </p:sp>
+        <p:sp>
+          <p:nvSpPr>
+            <p:cNvPr id="87" name="tx87"/>
+            <p:cNvSpPr/>
+            <p:nvPr/>
+          </p:nvSpPr>
+          <p:spPr>
+            <a:xfrm>
+              <a:off x="12516000" y="5034740"/>
+              <a:ext cx="201697" cy="75750"/>
+            </a:xfrm>
+            <a:prstGeom prst="rect">
+              <a:avLst/>
+            </a:prstGeom>
+            <a:noFill/>
+          </p:spPr>
+          <p:txBody>
+            <a:bodyPr lIns="0" rIns="0" tIns="0" bIns="0" anchorCtr="1" anchor="ctr" wrap="none"/>
+            <a:lstStyle/>
+            <a:p>
+              <a:pPr algn="l" marL="0" marR="0" indent="0">
+                <a:lnSpc>
+                  <a:spcPts val="816"/>
+                </a:lnSpc>
+                <a:spcBef>
+                  <a:spcPts val="0"/>
+                </a:spcBef>
+                <a:spcAft>
+                  <a:spcPts val="0"/>
+                </a:spcAft>
+              </a:pPr>
+              <a:r>
+                <a:rPr sz="816">
+                  <a:solidFill>
+                    <a:srgbClr val="1A1A1A">
+                      <a:alpha val="100000"/>
+                    </a:srgbClr>
+                  </a:solidFill>
+                  <a:latin typeface="Arial"/>
+                  <a:cs typeface="Arial"/>
+                </a:rPr>
+                <a:t>0.00</a:t>
+              </a:r>
+            </a:p>
+          </p:txBody>
+        </p:sp>
+        <p:sp>
+          <p:nvSpPr>
+            <p:cNvPr id="88" name="tx88"/>
+            <p:cNvSpPr/>
+            <p:nvPr/>
+          </p:nvSpPr>
+          <p:spPr>
+            <a:xfrm>
+              <a:off x="13580041" y="5034740"/>
+              <a:ext cx="201697" cy="75750"/>
+            </a:xfrm>
+            <a:prstGeom prst="rect">
+              <a:avLst/>
+            </a:prstGeom>
+            <a:noFill/>
+          </p:spPr>
+          <p:txBody>
+            <a:bodyPr lIns="0" rIns="0" tIns="0" bIns="0" anchorCtr="1" anchor="ctr" wrap="none"/>
+            <a:lstStyle/>
+            <a:p>
+              <a:pPr algn="l" marL="0" marR="0" indent="0">
+                <a:lnSpc>
+                  <a:spcPts val="816"/>
+                </a:lnSpc>
+                <a:spcBef>
+                  <a:spcPts val="0"/>
+                </a:spcBef>
+                <a:spcAft>
+                  <a:spcPts val="0"/>
+                </a:spcAft>
+              </a:pPr>
+              <a:r>
+                <a:rPr sz="816">
+                  <a:solidFill>
+                    <a:srgbClr val="1A1A1A">
+                      <a:alpha val="100000"/>
+                    </a:srgbClr>
+                  </a:solidFill>
+                  <a:latin typeface="Arial"/>
+                  <a:cs typeface="Arial"/>
+                </a:rPr>
+                <a:t>0.01</a:t>
+              </a:r>
+            </a:p>
+          </p:txBody>
+        </p:sp>
+        <p:sp>
+          <p:nvSpPr>
+            <p:cNvPr id="89" name="tx89"/>
+            <p:cNvSpPr/>
+            <p:nvPr/>
+          </p:nvSpPr>
+          <p:spPr>
+            <a:xfrm>
+              <a:off x="10548935" y="5135721"/>
+              <a:ext cx="1669978" cy="121570"/>
+            </a:xfrm>
+            <a:prstGeom prst="rect">
+              <a:avLst/>
+            </a:prstGeom>
+            <a:noFill/>
+          </p:spPr>
+          <p:txBody>
+            <a:bodyPr lIns="0" rIns="0" tIns="0" bIns="0" anchorCtr="1" anchor="ctr" wrap="none"/>
+            <a:lstStyle/>
+            <a:p>
+              <a:pPr algn="l" marL="0" marR="0" indent="0">
+                <a:lnSpc>
+                  <a:spcPts val="1019"/>
+                </a:lnSpc>
+                <a:spcBef>
+                  <a:spcPts val="0"/>
+                </a:spcBef>
+                <a:spcAft>
+                  <a:spcPts val="0"/>
+                </a:spcAft>
+              </a:pPr>
+              <a:r>
+                <a:rPr sz="1019" b="1">
+                  <a:solidFill>
+                    <a:srgbClr val="111111">
+                      <a:alpha val="100000"/>
+                    </a:srgbClr>
+                  </a:solidFill>
+                  <a:latin typeface="Arial"/>
+                  <a:cs typeface="Arial"/>
+                </a:rPr>
+                <a:t>Delta (user effort - primary)</a:t>
+              </a:r>
+            </a:p>
+          </p:txBody>
+        </p:sp>
+        <p:sp>
+          <p:nvSpPr>
+            <p:cNvPr id="90" name="tx90"/>
+            <p:cNvSpPr/>
+            <p:nvPr/>
+          </p:nvSpPr>
+          <p:spPr>
+            <a:xfrm>
+              <a:off x="7604438" y="1473138"/>
+              <a:ext cx="86885" cy="103485"/>
+            </a:xfrm>
+            <a:prstGeom prst="rect">
+              <a:avLst/>
+            </a:prstGeom>
+            <a:noFill/>
+          </p:spPr>
+          <p:txBody>
+            <a:bodyPr lIns="0" rIns="0" tIns="0" bIns="0" anchorCtr="1" anchor="ctr" wrap="none"/>
+            <a:lstStyle/>
+            <a:p>
+              <a:pPr algn="l" marL="0" marR="0" indent="0">
+                <a:lnSpc>
+                  <a:spcPts val="1120"/>
+                </a:lnSpc>
+                <a:spcBef>
+                  <a:spcPts val="0"/>
+                </a:spcBef>
+                <a:spcAft>
+                  <a:spcPts val="0"/>
+                </a:spcAft>
+              </a:pPr>
+              <a:r>
+                <a:rPr sz="1120" b="1">
+                  <a:solidFill>
+                    <a:srgbClr val="000000">
+                      <a:alpha val="100000"/>
+                    </a:srgbClr>
+                  </a:solidFill>
+                  <a:latin typeface="Arial"/>
+                  <a:cs typeface="Arial"/>
+                </a:rPr>
+                <a:t>b</a:t>
+              </a:r>
+            </a:p>
+          </p:txBody>
+        </p:sp>
+        <p:sp>
+          <p:nvSpPr>
+            <p:cNvPr id="91" name="rc91"/>
+            <p:cNvSpPr/>
+            <p:nvPr/>
+          </p:nvSpPr>
+          <p:spPr>
+            <a:xfrm>
+              <a:off x="1029709" y="5349081"/>
+              <a:ext cx="6844146" cy="3953770"/>
+            </a:xfrm>
+            <a:prstGeom prst="rect">
+              <a:avLst/>
+            </a:prstGeom>
+            <a:solidFill>
+              <a:srgbClr val="FFFFFF">
+                <a:alpha val="100000"/>
+              </a:srgbClr>
+            </a:solidFill>
+            <a:ln w="12565" cap="rnd">
+              <a:solidFill>
+                <a:srgbClr val="FFFFFF">
+                  <a:alpha val="100000"/>
+                </a:srgbClr>
+              </a:solidFill>
+              <a:prstDash val="solid"/>
+              <a:round/>
+            </a:ln>
+          </p:spPr>
+          <p:txBody>
+            <a:bodyPr/>
+            <a:lstStyle/>
+            <a:p/>
+          </p:txBody>
+        </p:sp>
+        <p:sp>
+          <p:nvSpPr>
+            <p:cNvPr id="92" name="rc92"/>
+            <p:cNvSpPr/>
+            <p:nvPr/>
+          </p:nvSpPr>
+          <p:spPr>
+            <a:xfrm>
+              <a:off x="7873855" y="5349081"/>
+              <a:ext cx="6184035" cy="3953770"/>
+            </a:xfrm>
+            <a:prstGeom prst="rect">
+              <a:avLst/>
+            </a:prstGeom>
+            <a:solidFill>
+              <a:srgbClr val="FFFFFF">
+                <a:alpha val="100000"/>
+              </a:srgbClr>
+            </a:solidFill>
+            <a:ln w="12565" cap="rnd">
+              <a:solidFill>
+                <a:srgbClr val="FFFFFF">
+                  <a:alpha val="100000"/>
+                </a:srgbClr>
+              </a:solidFill>
+              <a:prstDash val="solid"/>
+              <a:round/>
+            </a:ln>
+          </p:spPr>
+          <p:txBody>
+            <a:bodyPr/>
+            <a:lstStyle/>
+            <a:p/>
+          </p:txBody>
+        </p:sp>
+        <p:sp>
+          <p:nvSpPr>
+            <p:cNvPr id="93" name="rc93"/>
+            <p:cNvSpPr/>
+            <p:nvPr/>
+          </p:nvSpPr>
+          <p:spPr>
+            <a:xfrm>
+              <a:off x="2256505" y="5545362"/>
+              <a:ext cx="5552821" cy="3386642"/>
+            </a:xfrm>
+            <a:prstGeom prst="rect">
+              <a:avLst/>
+            </a:prstGeom>
+            <a:solidFill>
+              <a:srgbClr val="FFFFFF">
+                <a:alpha val="100000"/>
+              </a:srgbClr>
+            </a:solidFill>
+          </p:spPr>
+          <p:txBody>
+            <a:bodyPr/>
+            <a:lstStyle/>
+            <a:p/>
+          </p:txBody>
+        </p:sp>
+        <p:sp>
+          <p:nvSpPr>
+            <p:cNvPr id="94" name="pl94"/>
+            <p:cNvSpPr/>
+            <p:nvPr/>
+          </p:nvSpPr>
+          <p:spPr>
+            <a:xfrm>
+              <a:off x="2796271" y="5545362"/>
+              <a:ext cx="0" cy="3386642"/>
+            </a:xfrm>
+            <a:custGeom>
+              <a:avLst/>
+              <a:pathLst>
+                <a:path w="0" h="3386642">
+                  <a:moveTo>
+                    <a:pt x="0" y="3386642"/>
+                  </a:moveTo>
+                  <a:lnTo>
+                    <a:pt x="0" y="0"/>
+                  </a:lnTo>
+                  <a:lnTo>
+                    <a:pt x="0" y="0"/>
+                  </a:lnTo>
+                </a:path>
+              </a:pathLst>
+            </a:custGeom>
+            <a:ln w="8130" cap="flat">
+              <a:solidFill>
+                <a:srgbClr val="B0B0B0">
+                  <a:alpha val="34901"/>
+                </a:srgbClr>
+              </a:solidFill>
+              <a:prstDash val="solid"/>
+              <a:round/>
+            </a:ln>
+          </p:spPr>
+          <p:txBody>
+            <a:bodyPr/>
+            <a:lstStyle/>
+            <a:p/>
+          </p:txBody>
+        </p:sp>
+        <p:sp>
+          <p:nvSpPr>
+            <p:cNvPr id="95" name="pl95"/>
+            <p:cNvSpPr/>
+            <p:nvPr/>
+          </p:nvSpPr>
+          <p:spPr>
+            <a:xfrm>
+              <a:off x="4394635" y="5545362"/>
+              <a:ext cx="0" cy="3386642"/>
+            </a:xfrm>
+            <a:custGeom>
+              <a:avLst/>
+              <a:pathLst>
+                <a:path w="0" h="3386642">
+                  <a:moveTo>
+                    <a:pt x="0" y="3386642"/>
+                  </a:moveTo>
+                  <a:lnTo>
+                    <a:pt x="0" y="0"/>
+                  </a:lnTo>
+                  <a:lnTo>
+                    <a:pt x="0" y="0"/>
+                  </a:lnTo>
+                </a:path>
+              </a:pathLst>
+            </a:custGeom>
+            <a:ln w="8130" cap="flat">
+              <a:solidFill>
+                <a:srgbClr val="B0B0B0">
+                  <a:alpha val="34901"/>
+                </a:srgbClr>
+              </a:solidFill>
+              <a:prstDash val="solid"/>
+              <a:round/>
+            </a:ln>
+          </p:spPr>
+          <p:txBody>
+            <a:bodyPr/>
+            <a:lstStyle/>
+            <a:p/>
+          </p:txBody>
+        </p:sp>
+        <p:sp>
+          <p:nvSpPr>
+            <p:cNvPr id="96" name="pl96"/>
+            <p:cNvSpPr/>
+            <p:nvPr/>
+          </p:nvSpPr>
+          <p:spPr>
+            <a:xfrm>
+              <a:off x="5992999" y="5545362"/>
+              <a:ext cx="0" cy="3386642"/>
+            </a:xfrm>
+            <a:custGeom>
+              <a:avLst/>
+              <a:pathLst>
+                <a:path w="0" h="3386642">
+                  <a:moveTo>
+                    <a:pt x="0" y="3386642"/>
+                  </a:moveTo>
+                  <a:lnTo>
+                    <a:pt x="0" y="0"/>
+                  </a:lnTo>
+                  <a:lnTo>
+                    <a:pt x="0" y="0"/>
+                  </a:lnTo>
+                </a:path>
+              </a:pathLst>
+            </a:custGeom>
+            <a:ln w="8130" cap="flat">
+              <a:solidFill>
+                <a:srgbClr val="B0B0B0">
+                  <a:alpha val="34901"/>
+                </a:srgbClr>
+              </a:solidFill>
+              <a:prstDash val="solid"/>
+              <a:round/>
+            </a:ln>
+          </p:spPr>
+          <p:txBody>
+            <a:bodyPr/>
+            <a:lstStyle/>
+            <a:p/>
+          </p:txBody>
+        </p:sp>
+        <p:sp>
+          <p:nvSpPr>
+            <p:cNvPr id="97" name="pl97"/>
+            <p:cNvSpPr/>
+            <p:nvPr/>
+          </p:nvSpPr>
+          <p:spPr>
+            <a:xfrm>
+              <a:off x="7591363" y="5545362"/>
+              <a:ext cx="0" cy="3386642"/>
+            </a:xfrm>
+            <a:custGeom>
+              <a:avLst/>
+              <a:pathLst>
+                <a:path w="0" h="3386642">
+                  <a:moveTo>
+                    <a:pt x="0" y="3386642"/>
+                  </a:moveTo>
+                  <a:lnTo>
+                    <a:pt x="0" y="0"/>
+                  </a:lnTo>
+                  <a:lnTo>
+                    <a:pt x="0" y="0"/>
+                  </a:lnTo>
+                </a:path>
+              </a:pathLst>
+            </a:custGeom>
+            <a:ln w="8130" cap="flat">
+              <a:solidFill>
+                <a:srgbClr val="B0B0B0">
+                  <a:alpha val="34901"/>
+                </a:srgbClr>
+              </a:solidFill>
+              <a:prstDash val="solid"/>
+              <a:round/>
+            </a:ln>
+          </p:spPr>
+          <p:txBody>
+            <a:bodyPr/>
+            <a:lstStyle/>
+            <a:p/>
+          </p:txBody>
+        </p:sp>
+        <p:sp>
+          <p:nvSpPr>
+            <p:cNvPr id="98" name="pl98"/>
+            <p:cNvSpPr/>
+            <p:nvPr/>
+          </p:nvSpPr>
+          <p:spPr>
+            <a:xfrm>
+              <a:off x="2796271" y="5545362"/>
+              <a:ext cx="0" cy="3386642"/>
+            </a:xfrm>
+            <a:custGeom>
+              <a:avLst/>
+              <a:pathLst>
+                <a:path w="0" h="3386642">
+                  <a:moveTo>
+                    <a:pt x="0" y="3386642"/>
+                  </a:moveTo>
+                  <a:lnTo>
+                    <a:pt x="0" y="0"/>
+                  </a:lnTo>
+                  <a:lnTo>
+                    <a:pt x="0" y="0"/>
+                  </a:lnTo>
+                </a:path>
+              </a:pathLst>
+            </a:custGeom>
+            <a:ln w="21681" cap="flat">
+              <a:solidFill>
+                <a:srgbClr val="6E6E6E">
+                  <a:alpha val="100000"/>
+                </a:srgbClr>
+              </a:solidFill>
+              <a:prstDash val="dash"/>
+              <a:round/>
+            </a:ln>
+          </p:spPr>
+          <p:txBody>
+            <a:bodyPr/>
+            <a:lstStyle/>
+            <a:p/>
+          </p:txBody>
+        </p:sp>
+        <p:sp>
+          <p:nvSpPr>
+            <p:cNvPr id="99" name="rc99"/>
+            <p:cNvSpPr/>
+            <p:nvPr/>
+          </p:nvSpPr>
+          <p:spPr>
+            <a:xfrm>
+              <a:off x="2796271" y="6352946"/>
+              <a:ext cx="4760655" cy="468919"/>
+            </a:xfrm>
+            <a:prstGeom prst="rect">
+              <a:avLst/>
+            </a:prstGeom>
+            <a:solidFill>
+              <a:srgbClr val="31A354">
+                <a:alpha val="100000"/>
+              </a:srgbClr>
+            </a:solidFill>
+          </p:spPr>
+          <p:txBody>
+            <a:bodyPr/>
+            <a:lstStyle/>
+            <a:p/>
+          </p:txBody>
+        </p:sp>
+        <p:sp>
+          <p:nvSpPr>
+            <p:cNvPr id="100" name="rc100"/>
+            <p:cNvSpPr/>
+            <p:nvPr/>
+          </p:nvSpPr>
+          <p:spPr>
+            <a:xfrm>
+              <a:off x="2796271" y="7655501"/>
+              <a:ext cx="252194" cy="468919"/>
+            </a:xfrm>
+            <a:prstGeom prst="rect">
+              <a:avLst/>
+            </a:prstGeom>
+            <a:solidFill>
+              <a:srgbClr val="31A354">
+                <a:alpha val="100000"/>
+              </a:srgbClr>
+            </a:solidFill>
+          </p:spPr>
+          <p:txBody>
+            <a:bodyPr/>
+            <a:lstStyle/>
+            <a:p/>
+          </p:txBody>
+        </p:sp>
+        <p:sp>
+          <p:nvSpPr>
+            <p:cNvPr id="101" name="rc101"/>
+            <p:cNvSpPr/>
+            <p:nvPr/>
+          </p:nvSpPr>
+          <p:spPr>
+            <a:xfrm>
+              <a:off x="2508906" y="5701668"/>
+              <a:ext cx="287364" cy="468919"/>
+            </a:xfrm>
+            <a:prstGeom prst="rect">
+              <a:avLst/>
+            </a:prstGeom>
+            <a:solidFill>
+              <a:srgbClr val="31A354">
+                <a:alpha val="100000"/>
+              </a:srgbClr>
+            </a:solidFill>
+          </p:spPr>
+          <p:txBody>
+            <a:bodyPr/>
+            <a:lstStyle/>
+            <a:p/>
+          </p:txBody>
+        </p:sp>
+        <p:sp>
+          <p:nvSpPr>
+            <p:cNvPr id="102" name="rc102"/>
+            <p:cNvSpPr/>
+            <p:nvPr/>
+          </p:nvSpPr>
+          <p:spPr>
+            <a:xfrm>
+              <a:off x="2793008" y="8306778"/>
+              <a:ext cx="3262" cy="468919"/>
+            </a:xfrm>
+            <a:prstGeom prst="rect">
+              <a:avLst/>
+            </a:prstGeom>
+            <a:solidFill>
+              <a:srgbClr val="31A354">
+                <a:alpha val="100000"/>
+              </a:srgbClr>
+            </a:solidFill>
+          </p:spPr>
+          <p:txBody>
+            <a:bodyPr/>
+            <a:lstStyle/>
+            <a:p/>
+          </p:txBody>
+        </p:sp>
+        <p:sp>
+          <p:nvSpPr>
+            <p:cNvPr id="103" name="rc103"/>
+            <p:cNvSpPr/>
+            <p:nvPr/>
+          </p:nvSpPr>
+          <p:spPr>
+            <a:xfrm>
+              <a:off x="2796271" y="7004223"/>
+              <a:ext cx="177257" cy="468919"/>
+            </a:xfrm>
+            <a:prstGeom prst="rect">
+              <a:avLst/>
+            </a:prstGeom>
+            <a:solidFill>
+              <a:srgbClr val="31A354">
+                <a:alpha val="100000"/>
+              </a:srgbClr>
+            </a:solidFill>
+          </p:spPr>
+          <p:txBody>
+            <a:bodyPr/>
+            <a:lstStyle/>
+            <a:p/>
+          </p:txBody>
+        </p:sp>
+        <p:sp>
+          <p:nvSpPr>
+            <p:cNvPr id="104" name="pl104"/>
+            <p:cNvSpPr/>
+            <p:nvPr/>
+          </p:nvSpPr>
+          <p:spPr>
+            <a:xfrm>
+              <a:off x="2256505" y="5545362"/>
+              <a:ext cx="0" cy="3386642"/>
+            </a:xfrm>
+            <a:custGeom>
+              <a:avLst/>
+              <a:pathLst>
+                <a:path w="0" h="3386642">
+                  <a:moveTo>
+                    <a:pt x="0" y="3386642"/>
+                  </a:moveTo>
+                  <a:lnTo>
+                    <a:pt x="0" y="0"/>
+                  </a:lnTo>
+                </a:path>
+              </a:pathLst>
+            </a:custGeom>
+            <a:ln w="12565" cap="sq">
+              <a:solidFill>
+                <a:srgbClr val="000000">
+                  <a:alpha val="100000"/>
+                </a:srgbClr>
+              </a:solidFill>
+              <a:prstDash val="solid"/>
+              <a:round/>
+            </a:ln>
+          </p:spPr>
+          <p:txBody>
+            <a:bodyPr/>
+            <a:lstStyle/>
+            <a:p/>
+          </p:txBody>
+        </p:sp>
+        <p:sp>
+          <p:nvSpPr>
+            <p:cNvPr id="105" name="tx105"/>
+            <p:cNvSpPr/>
+            <p:nvPr/>
+          </p:nvSpPr>
+          <p:spPr>
+            <a:xfrm>
+              <a:off x="1979528" y="8502933"/>
+              <a:ext cx="218902" cy="75396"/>
+            </a:xfrm>
+            <a:prstGeom prst="rect">
+              <a:avLst/>
+            </a:prstGeom>
+            <a:noFill/>
+          </p:spPr>
+          <p:txBody>
+            <a:bodyPr lIns="0" rIns="0" tIns="0" bIns="0" anchorCtr="1" anchor="ctr" wrap="none"/>
+            <a:lstStyle/>
+            <a:p>
+              <a:pPr algn="l" marL="0" marR="0" indent="0">
+                <a:lnSpc>
+                  <a:spcPts val="816"/>
+                </a:lnSpc>
+                <a:spcBef>
+                  <a:spcPts val="0"/>
+                </a:spcBef>
+                <a:spcAft>
+                  <a:spcPts val="0"/>
+                </a:spcAft>
+              </a:pPr>
+              <a:r>
+                <a:rPr sz="816">
+                  <a:solidFill>
+                    <a:srgbClr val="1A1A1A">
+                      <a:alpha val="100000"/>
+                    </a:srgbClr>
+                  </a:solidFill>
+                  <a:latin typeface="Arial"/>
+                  <a:cs typeface="Arial"/>
+                </a:rPr>
+                <a:t>Area</a:t>
+              </a:r>
+            </a:p>
+          </p:txBody>
+        </p:sp>
+        <p:sp>
+          <p:nvSpPr>
+            <p:cNvPr id="106" name="tx106"/>
+            <p:cNvSpPr/>
+            <p:nvPr/>
+          </p:nvSpPr>
+          <p:spPr>
+            <a:xfrm>
+              <a:off x="1253901" y="7829795"/>
+              <a:ext cx="944528" cy="97256"/>
+            </a:xfrm>
+            <a:prstGeom prst="rect">
+              <a:avLst/>
+            </a:prstGeom>
+            <a:noFill/>
+          </p:spPr>
+          <p:txBody>
+            <a:bodyPr lIns="0" rIns="0" tIns="0" bIns="0" anchorCtr="1" anchor="ctr" wrap="none"/>
+            <a:lstStyle/>
+            <a:p>
+              <a:pPr algn="l" marL="0" marR="0" indent="0">
+                <a:lnSpc>
+                  <a:spcPts val="816"/>
+                </a:lnSpc>
+                <a:spcBef>
+                  <a:spcPts val="0"/>
+                </a:spcBef>
+                <a:spcAft>
+                  <a:spcPts val="0"/>
+                </a:spcAft>
+              </a:pPr>
+              <a:r>
+                <a:rPr sz="816">
+                  <a:solidFill>
+                    <a:srgbClr val="1A1A1A">
+                      <a:alpha val="100000"/>
+                    </a:srgbClr>
+                  </a:solidFill>
+                  <a:latin typeface="Arial"/>
+                  <a:cs typeface="Arial"/>
+                </a:rPr>
+                <a:t>Current survey effort</a:t>
+              </a:r>
+            </a:p>
+          </p:txBody>
+        </p:sp>
+        <p:sp>
+          <p:nvSpPr>
+            <p:cNvPr id="107" name="tx107"/>
+            <p:cNvSpPr/>
+            <p:nvPr/>
+          </p:nvSpPr>
+          <p:spPr>
+            <a:xfrm>
+              <a:off x="1213268" y="7179783"/>
+              <a:ext cx="985161" cy="95991"/>
+            </a:xfrm>
+            <a:prstGeom prst="rect">
+              <a:avLst/>
+            </a:prstGeom>
+            <a:noFill/>
+          </p:spPr>
+          <p:txBody>
+            <a:bodyPr lIns="0" rIns="0" tIns="0" bIns="0" anchorCtr="1" anchor="ctr" wrap="none"/>
+            <a:lstStyle/>
+            <a:p>
+              <a:pPr algn="l" marL="0" marR="0" indent="0">
+                <a:lnSpc>
+                  <a:spcPts val="816"/>
+                </a:lnSpc>
+                <a:spcBef>
+                  <a:spcPts val="0"/>
+                </a:spcBef>
+                <a:spcAft>
+                  <a:spcPts val="0"/>
+                </a:spcAft>
+              </a:pPr>
+              <a:r>
+                <a:rPr sz="816">
+                  <a:solidFill>
+                    <a:srgbClr val="1A1A1A">
+                      <a:alpha val="100000"/>
+                    </a:srgbClr>
+                  </a:solidFill>
+                  <a:latin typeface="Arial"/>
+                  <a:cs typeface="Arial"/>
+                </a:rPr>
+                <a:t>Habitat heterogeneity</a:t>
+              </a:r>
+            </a:p>
+          </p:txBody>
+        </p:sp>
+        <p:sp>
+          <p:nvSpPr>
+            <p:cNvPr id="108" name="tx108"/>
+            <p:cNvSpPr/>
+            <p:nvPr/>
+          </p:nvSpPr>
+          <p:spPr>
+            <a:xfrm>
+              <a:off x="1173344" y="6527240"/>
+              <a:ext cx="1025086" cy="97256"/>
+            </a:xfrm>
+            <a:prstGeom prst="rect">
+              <a:avLst/>
+            </a:prstGeom>
+            <a:noFill/>
+          </p:spPr>
+          <p:txBody>
+            <a:bodyPr lIns="0" rIns="0" tIns="0" bIns="0" anchorCtr="1" anchor="ctr" wrap="none"/>
+            <a:lstStyle/>
+            <a:p>
+              <a:pPr algn="l" marL="0" marR="0" indent="0">
+                <a:lnSpc>
+                  <a:spcPts val="816"/>
+                </a:lnSpc>
+                <a:spcBef>
+                  <a:spcPts val="0"/>
+                </a:spcBef>
+                <a:spcAft>
+                  <a:spcPts val="0"/>
+                </a:spcAft>
+              </a:pPr>
+              <a:r>
+                <a:rPr sz="816">
+                  <a:solidFill>
+                    <a:srgbClr val="1A1A1A">
+                      <a:alpha val="100000"/>
+                    </a:srgbClr>
+                  </a:solidFill>
+                  <a:latin typeface="Arial"/>
+                  <a:cs typeface="Arial"/>
+                </a:rPr>
+                <a:t>Historical survey effort</a:t>
+              </a:r>
+            </a:p>
+          </p:txBody>
+        </p:sp>
+        <p:sp>
+          <p:nvSpPr>
+            <p:cNvPr id="109" name="tx109"/>
+            <p:cNvSpPr/>
+            <p:nvPr/>
+          </p:nvSpPr>
+          <p:spPr>
+            <a:xfrm>
+              <a:off x="1478471" y="5877177"/>
+              <a:ext cx="719959" cy="96041"/>
+            </a:xfrm>
+            <a:prstGeom prst="rect">
+              <a:avLst/>
+            </a:prstGeom>
+            <a:noFill/>
+          </p:spPr>
+          <p:txBody>
+            <a:bodyPr lIns="0" rIns="0" tIns="0" bIns="0" anchorCtr="1" anchor="ctr" wrap="none"/>
+            <a:lstStyle/>
+            <a:p>
+              <a:pPr algn="l" marL="0" marR="0" indent="0">
+                <a:lnSpc>
+                  <a:spcPts val="816"/>
+                </a:lnSpc>
+                <a:spcBef>
+                  <a:spcPts val="0"/>
+                </a:spcBef>
+                <a:spcAft>
+                  <a:spcPts val="0"/>
+                </a:spcAft>
+              </a:pPr>
+              <a:r>
+                <a:rPr sz="816">
+                  <a:solidFill>
+                    <a:srgbClr val="1A1A1A">
+                      <a:alpha val="100000"/>
+                    </a:srgbClr>
+                  </a:solidFill>
+                  <a:latin typeface="Arial"/>
+                  <a:cs typeface="Arial"/>
+                </a:rPr>
+                <a:t>Per capita GDP</a:t>
+              </a:r>
+            </a:p>
+          </p:txBody>
+        </p:sp>
+        <p:sp>
+          <p:nvSpPr>
+            <p:cNvPr id="110" name="pl110"/>
+            <p:cNvSpPr/>
+            <p:nvPr/>
+          </p:nvSpPr>
+          <p:spPr>
+            <a:xfrm>
+              <a:off x="2224241" y="8541238"/>
+              <a:ext cx="32264" cy="0"/>
+            </a:xfrm>
+            <a:custGeom>
+              <a:avLst/>
+              <a:pathLst>
+                <a:path w="32264" h="0">
+                  <a:moveTo>
+                    <a:pt x="0" y="0"/>
+                  </a:moveTo>
+                  <a:lnTo>
+                    <a:pt x="32264" y="0"/>
+                  </a:lnTo>
+                </a:path>
+              </a:pathLst>
+            </a:custGeom>
+            <a:ln w="12565" cap="flat">
+              <a:solidFill>
+                <a:srgbClr val="000000">
+                  <a:alpha val="100000"/>
+                </a:srgbClr>
+              </a:solidFill>
+              <a:prstDash val="solid"/>
+              <a:round/>
+            </a:ln>
+          </p:spPr>
+          <p:txBody>
+            <a:bodyPr/>
+            <a:lstStyle/>
+            <a:p/>
+          </p:txBody>
+        </p:sp>
+        <p:sp>
+          <p:nvSpPr>
+            <p:cNvPr id="111" name="pl111"/>
+            <p:cNvSpPr/>
+            <p:nvPr/>
+          </p:nvSpPr>
+          <p:spPr>
+            <a:xfrm>
+              <a:off x="2224241" y="7889961"/>
+              <a:ext cx="32264" cy="0"/>
+            </a:xfrm>
+            <a:custGeom>
+              <a:avLst/>
+              <a:pathLst>
+                <a:path w="32264" h="0">
+                  <a:moveTo>
+                    <a:pt x="0" y="0"/>
+                  </a:moveTo>
+                  <a:lnTo>
+                    <a:pt x="32264" y="0"/>
+                  </a:lnTo>
+                </a:path>
+              </a:pathLst>
+            </a:custGeom>
+            <a:ln w="12565" cap="flat">
+              <a:solidFill>
+                <a:srgbClr val="000000">
+                  <a:alpha val="100000"/>
+                </a:srgbClr>
+              </a:solidFill>
+              <a:prstDash val="solid"/>
+              <a:round/>
+            </a:ln>
+          </p:spPr>
+          <p:txBody>
+            <a:bodyPr/>
+            <a:lstStyle/>
+            <a:p/>
+          </p:txBody>
+        </p:sp>
+        <p:sp>
+          <p:nvSpPr>
+            <p:cNvPr id="112" name="pl112"/>
+            <p:cNvSpPr/>
+            <p:nvPr/>
+          </p:nvSpPr>
+          <p:spPr>
+            <a:xfrm>
+              <a:off x="2224241" y="7238683"/>
+              <a:ext cx="32264" cy="0"/>
+            </a:xfrm>
+            <a:custGeom>
+              <a:avLst/>
+              <a:pathLst>
+                <a:path w="32264" h="0">
+                  <a:moveTo>
+                    <a:pt x="0" y="0"/>
+                  </a:moveTo>
+                  <a:lnTo>
+                    <a:pt x="32264" y="0"/>
+                  </a:lnTo>
+                </a:path>
+              </a:pathLst>
+            </a:custGeom>
+            <a:ln w="12565" cap="flat">
+              <a:solidFill>
+                <a:srgbClr val="000000">
+                  <a:alpha val="100000"/>
+                </a:srgbClr>
+              </a:solidFill>
+              <a:prstDash val="solid"/>
+              <a:round/>
+            </a:ln>
+          </p:spPr>
+          <p:txBody>
+            <a:bodyPr/>
+            <a:lstStyle/>
+            <a:p/>
+          </p:txBody>
+        </p:sp>
+        <p:sp>
+          <p:nvSpPr>
+            <p:cNvPr id="113" name="pl113"/>
+            <p:cNvSpPr/>
+            <p:nvPr/>
+          </p:nvSpPr>
+          <p:spPr>
+            <a:xfrm>
+              <a:off x="2224241" y="6587406"/>
+              <a:ext cx="32264" cy="0"/>
+            </a:xfrm>
+            <a:custGeom>
+              <a:avLst/>
+              <a:pathLst>
+                <a:path w="32264" h="0">
+                  <a:moveTo>
+                    <a:pt x="0" y="0"/>
+                  </a:moveTo>
+                  <a:lnTo>
+                    <a:pt x="32264" y="0"/>
+                  </a:lnTo>
+                </a:path>
+              </a:pathLst>
+            </a:custGeom>
+            <a:ln w="12565" cap="flat">
+              <a:solidFill>
+                <a:srgbClr val="000000">
+                  <a:alpha val="100000"/>
+                </a:srgbClr>
+              </a:solidFill>
+              <a:prstDash val="solid"/>
+              <a:round/>
+            </a:ln>
+          </p:spPr>
+          <p:txBody>
+            <a:bodyPr/>
+            <a:lstStyle/>
+            <a:p/>
+          </p:txBody>
+        </p:sp>
+        <p:sp>
+          <p:nvSpPr>
+            <p:cNvPr id="114" name="pl114"/>
+            <p:cNvSpPr/>
+            <p:nvPr/>
+          </p:nvSpPr>
+          <p:spPr>
+            <a:xfrm>
+              <a:off x="2224241" y="5936128"/>
+              <a:ext cx="32264" cy="0"/>
+            </a:xfrm>
+            <a:custGeom>
+              <a:avLst/>
+              <a:pathLst>
+                <a:path w="32264" h="0">
+                  <a:moveTo>
+                    <a:pt x="0" y="0"/>
+                  </a:moveTo>
+                  <a:lnTo>
+                    <a:pt x="32264" y="0"/>
+                  </a:lnTo>
+                </a:path>
+              </a:pathLst>
+            </a:custGeom>
+            <a:ln w="12565" cap="flat">
+              <a:solidFill>
+                <a:srgbClr val="000000">
+                  <a:alpha val="100000"/>
+                </a:srgbClr>
+              </a:solidFill>
+              <a:prstDash val="solid"/>
+              <a:round/>
+            </a:ln>
+          </p:spPr>
+          <p:txBody>
+            <a:bodyPr/>
+            <a:lstStyle/>
+            <a:p/>
+          </p:txBody>
+        </p:sp>
+        <p:sp>
+          <p:nvSpPr>
+            <p:cNvPr id="115" name="pl115"/>
+            <p:cNvSpPr/>
+            <p:nvPr/>
+          </p:nvSpPr>
+          <p:spPr>
+            <a:xfrm>
+              <a:off x="2256505" y="8932005"/>
+              <a:ext cx="5552821" cy="0"/>
+            </a:xfrm>
+            <a:custGeom>
+              <a:avLst/>
+              <a:pathLst>
+                <a:path w="5552821" h="0">
+                  <a:moveTo>
+                    <a:pt x="0" y="0"/>
+                  </a:moveTo>
+                  <a:lnTo>
+                    <a:pt x="5552821" y="0"/>
+                  </a:lnTo>
+                </a:path>
+              </a:pathLst>
+            </a:custGeom>
+            <a:ln w="12565" cap="sq">
+              <a:solidFill>
+                <a:srgbClr val="000000">
+                  <a:alpha val="100000"/>
+                </a:srgbClr>
+              </a:solidFill>
+              <a:prstDash val="solid"/>
+              <a:round/>
+            </a:ln>
+          </p:spPr>
+          <p:txBody>
+            <a:bodyPr/>
+            <a:lstStyle/>
+            <a:p/>
+          </p:txBody>
+        </p:sp>
+        <p:sp>
+          <p:nvSpPr>
+            <p:cNvPr id="116" name="pl116"/>
+            <p:cNvSpPr/>
+            <p:nvPr/>
+          </p:nvSpPr>
+          <p:spPr>
+            <a:xfrm>
+              <a:off x="2796271" y="8932005"/>
+              <a:ext cx="0" cy="32264"/>
+            </a:xfrm>
+            <a:custGeom>
+              <a:avLst/>
+              <a:pathLst>
+                <a:path w="0" h="32264">
+                  <a:moveTo>
+                    <a:pt x="0" y="32264"/>
+                  </a:moveTo>
+                  <a:lnTo>
+                    <a:pt x="0" y="0"/>
+                  </a:lnTo>
+                </a:path>
+              </a:pathLst>
+            </a:custGeom>
+            <a:ln w="12565" cap="flat">
+              <a:solidFill>
+                <a:srgbClr val="000000">
+                  <a:alpha val="100000"/>
+                </a:srgbClr>
+              </a:solidFill>
+              <a:prstDash val="solid"/>
+              <a:round/>
+            </a:ln>
+          </p:spPr>
+          <p:txBody>
+            <a:bodyPr/>
+            <a:lstStyle/>
+            <a:p/>
+          </p:txBody>
+        </p:sp>
+        <p:sp>
+          <p:nvSpPr>
+            <p:cNvPr id="117" name="pl117"/>
+            <p:cNvSpPr/>
+            <p:nvPr/>
+          </p:nvSpPr>
+          <p:spPr>
+            <a:xfrm>
+              <a:off x="4394635" y="8932005"/>
+              <a:ext cx="0" cy="32264"/>
+            </a:xfrm>
+            <a:custGeom>
+              <a:avLst/>
+              <a:pathLst>
+                <a:path w="0" h="32264">
+                  <a:moveTo>
+                    <a:pt x="0" y="32264"/>
+                  </a:moveTo>
+                  <a:lnTo>
+                    <a:pt x="0" y="0"/>
+                  </a:lnTo>
+                </a:path>
+              </a:pathLst>
+            </a:custGeom>
+            <a:ln w="12565" cap="flat">
+              <a:solidFill>
+                <a:srgbClr val="000000">
+                  <a:alpha val="100000"/>
+                </a:srgbClr>
+              </a:solidFill>
+              <a:prstDash val="solid"/>
+              <a:round/>
+            </a:ln>
+          </p:spPr>
+          <p:txBody>
+            <a:bodyPr/>
+            <a:lstStyle/>
+            <a:p/>
+          </p:txBody>
+        </p:sp>
+        <p:sp>
+          <p:nvSpPr>
+            <p:cNvPr id="118" name="pl118"/>
+            <p:cNvSpPr/>
+            <p:nvPr/>
+          </p:nvSpPr>
+          <p:spPr>
+            <a:xfrm>
+              <a:off x="5992999" y="8932005"/>
+              <a:ext cx="0" cy="32264"/>
+            </a:xfrm>
+            <a:custGeom>
+              <a:avLst/>
+              <a:pathLst>
+                <a:path w="0" h="32264">
+                  <a:moveTo>
+                    <a:pt x="0" y="32264"/>
+                  </a:moveTo>
+                  <a:lnTo>
+                    <a:pt x="0" y="0"/>
+                  </a:lnTo>
+                </a:path>
+              </a:pathLst>
+            </a:custGeom>
+            <a:ln w="12565" cap="flat">
+              <a:solidFill>
+                <a:srgbClr val="000000">
+                  <a:alpha val="100000"/>
+                </a:srgbClr>
+              </a:solidFill>
+              <a:prstDash val="solid"/>
+              <a:round/>
+            </a:ln>
+          </p:spPr>
+          <p:txBody>
+            <a:bodyPr/>
+            <a:lstStyle/>
+            <a:p/>
+          </p:txBody>
+        </p:sp>
+        <p:sp>
+          <p:nvSpPr>
+            <p:cNvPr id="119" name="pl119"/>
+            <p:cNvSpPr/>
+            <p:nvPr/>
+          </p:nvSpPr>
+          <p:spPr>
+            <a:xfrm>
+              <a:off x="7591363" y="8932005"/>
+              <a:ext cx="0" cy="32264"/>
+            </a:xfrm>
+            <a:custGeom>
+              <a:avLst/>
+              <a:pathLst>
+                <a:path w="0" h="32264">
+                  <a:moveTo>
+                    <a:pt x="0" y="32264"/>
+                  </a:moveTo>
+                  <a:lnTo>
+                    <a:pt x="0" y="0"/>
+                  </a:lnTo>
+                </a:path>
+              </a:pathLst>
+            </a:custGeom>
+            <a:ln w="12565" cap="flat">
+              <a:solidFill>
+                <a:srgbClr val="000000">
+                  <a:alpha val="100000"/>
+                </a:srgbClr>
+              </a:solidFill>
+              <a:prstDash val="solid"/>
+              <a:round/>
+            </a:ln>
+          </p:spPr>
+          <p:txBody>
+            <a:bodyPr/>
+            <a:lstStyle/>
+            <a:p/>
+          </p:txBody>
+        </p:sp>
+        <p:sp>
+          <p:nvSpPr>
+            <p:cNvPr id="120" name="tx120"/>
+            <p:cNvSpPr/>
+            <p:nvPr/>
+          </p:nvSpPr>
+          <p:spPr>
+            <a:xfrm>
+              <a:off x="2767453" y="8988511"/>
+              <a:ext cx="57635" cy="75750"/>
+            </a:xfrm>
+            <a:prstGeom prst="rect">
+              <a:avLst/>
+            </a:prstGeom>
+            <a:noFill/>
+          </p:spPr>
+          <p:txBody>
+            <a:bodyPr lIns="0" rIns="0" tIns="0" bIns="0" anchorCtr="1" anchor="ctr" wrap="none"/>
+            <a:lstStyle/>
+            <a:p>
+              <a:pPr algn="l" marL="0" marR="0" indent="0">
+                <a:lnSpc>
+                  <a:spcPts val="816"/>
+                </a:lnSpc>
+                <a:spcBef>
+                  <a:spcPts val="0"/>
+                </a:spcBef>
+                <a:spcAft>
+                  <a:spcPts val="0"/>
+                </a:spcAft>
+              </a:pPr>
+              <a:r>
+                <a:rPr sz="816">
                   <a:solidFill>
                     <a:srgbClr val="1A1A1A">
                       <a:alpha val="100000"/>
@@ -7669,14 +7838,14 @@
         </p:sp>
         <p:sp>
           <p:nvSpPr>
-            <p:cNvPr id="118" name="tx118"/>
-            <p:cNvSpPr/>
-            <p:nvPr/>
-          </p:nvSpPr>
-          <p:spPr>
-            <a:xfrm>
-              <a:off x="10454217" y="5264912"/>
-              <a:ext cx="177990" cy="77978"/>
+            <p:cNvPr id="121" name="tx121"/>
+            <p:cNvSpPr/>
+            <p:nvPr/>
+          </p:nvSpPr>
+          <p:spPr>
+            <a:xfrm>
+              <a:off x="4365817" y="8989776"/>
+              <a:ext cx="57635" cy="74485"/>
             </a:xfrm>
             <a:prstGeom prst="rect">
               <a:avLst/>
@@ -7689,7 +7858,7 @@
             <a:p>
               <a:pPr algn="l" marL="0" marR="0" indent="0">
                 <a:lnSpc>
-                  <a:spcPts val="840"/>
+                  <a:spcPts val="816"/>
                 </a:lnSpc>
                 <a:spcBef>
                   <a:spcPts val="0"/>
@@ -7699,7 +7868,908 @@
                 </a:spcAft>
               </a:pPr>
               <a:r>
-                <a:rPr sz="840">
+                <a:rPr sz="816">
+                  <a:solidFill>
+                    <a:srgbClr val="1A1A1A">
+                      <a:alpha val="100000"/>
+                    </a:srgbClr>
+                  </a:solidFill>
+                  <a:latin typeface="Arial"/>
+                  <a:cs typeface="Arial"/>
+                </a:rPr>
+                <a:t>1</a:t>
+              </a:r>
+            </a:p>
+          </p:txBody>
+        </p:sp>
+        <p:sp>
+          <p:nvSpPr>
+            <p:cNvPr id="122" name="tx122"/>
+            <p:cNvSpPr/>
+            <p:nvPr/>
+          </p:nvSpPr>
+          <p:spPr>
+            <a:xfrm>
+              <a:off x="5964181" y="8989776"/>
+              <a:ext cx="57635" cy="74485"/>
+            </a:xfrm>
+            <a:prstGeom prst="rect">
+              <a:avLst/>
+            </a:prstGeom>
+            <a:noFill/>
+          </p:spPr>
+          <p:txBody>
+            <a:bodyPr lIns="0" rIns="0" tIns="0" bIns="0" anchorCtr="1" anchor="ctr" wrap="none"/>
+            <a:lstStyle/>
+            <a:p>
+              <a:pPr algn="l" marL="0" marR="0" indent="0">
+                <a:lnSpc>
+                  <a:spcPts val="816"/>
+                </a:lnSpc>
+                <a:spcBef>
+                  <a:spcPts val="0"/>
+                </a:spcBef>
+                <a:spcAft>
+                  <a:spcPts val="0"/>
+                </a:spcAft>
+              </a:pPr>
+              <a:r>
+                <a:rPr sz="816">
+                  <a:solidFill>
+                    <a:srgbClr val="1A1A1A">
+                      <a:alpha val="100000"/>
+                    </a:srgbClr>
+                  </a:solidFill>
+                  <a:latin typeface="Arial"/>
+                  <a:cs typeface="Arial"/>
+                </a:rPr>
+                <a:t>2</a:t>
+              </a:r>
+            </a:p>
+          </p:txBody>
+        </p:sp>
+        <p:sp>
+          <p:nvSpPr>
+            <p:cNvPr id="123" name="tx123"/>
+            <p:cNvSpPr/>
+            <p:nvPr/>
+          </p:nvSpPr>
+          <p:spPr>
+            <a:xfrm>
+              <a:off x="7562546" y="8988461"/>
+              <a:ext cx="57635" cy="75801"/>
+            </a:xfrm>
+            <a:prstGeom prst="rect">
+              <a:avLst/>
+            </a:prstGeom>
+            <a:noFill/>
+          </p:spPr>
+          <p:txBody>
+            <a:bodyPr lIns="0" rIns="0" tIns="0" bIns="0" anchorCtr="1" anchor="ctr" wrap="none"/>
+            <a:lstStyle/>
+            <a:p>
+              <a:pPr algn="l" marL="0" marR="0" indent="0">
+                <a:lnSpc>
+                  <a:spcPts val="816"/>
+                </a:lnSpc>
+                <a:spcBef>
+                  <a:spcPts val="0"/>
+                </a:spcBef>
+                <a:spcAft>
+                  <a:spcPts val="0"/>
+                </a:spcAft>
+              </a:pPr>
+              <a:r>
+                <a:rPr sz="816">
+                  <a:solidFill>
+                    <a:srgbClr val="1A1A1A">
+                      <a:alpha val="100000"/>
+                    </a:srgbClr>
+                  </a:solidFill>
+                  <a:latin typeface="Arial"/>
+                  <a:cs typeface="Arial"/>
+                </a:rPr>
+                <a:t>3</a:t>
+              </a:r>
+            </a:p>
+          </p:txBody>
+        </p:sp>
+        <p:sp>
+          <p:nvSpPr>
+            <p:cNvPr id="124" name="tx124"/>
+            <p:cNvSpPr/>
+            <p:nvPr/>
+          </p:nvSpPr>
+          <p:spPr>
+            <a:xfrm>
+              <a:off x="3996406" y="9089492"/>
+              <a:ext cx="2073019" cy="121570"/>
+            </a:xfrm>
+            <a:prstGeom prst="rect">
+              <a:avLst/>
+            </a:prstGeom>
+            <a:noFill/>
+          </p:spPr>
+          <p:txBody>
+            <a:bodyPr lIns="0" rIns="0" tIns="0" bIns="0" anchorCtr="1" anchor="ctr" wrap="none"/>
+            <a:lstStyle/>
+            <a:p>
+              <a:pPr algn="l" marL="0" marR="0" indent="0">
+                <a:lnSpc>
+                  <a:spcPts val="1019"/>
+                </a:lnSpc>
+                <a:spcBef>
+                  <a:spcPts val="0"/>
+                </a:spcBef>
+                <a:spcAft>
+                  <a:spcPts val="0"/>
+                </a:spcAft>
+              </a:pPr>
+              <a:r>
+                <a:rPr sz="1019" b="1">
+                  <a:solidFill>
+                    <a:srgbClr val="111111">
+                      <a:alpha val="100000"/>
+                    </a:srgbClr>
+                  </a:solidFill>
+                  <a:latin typeface="Arial"/>
+                  <a:cs typeface="Arial"/>
+                </a:rPr>
+                <a:t>Delta (influence-filtered - primary)</a:t>
+              </a:r>
+            </a:p>
+          </p:txBody>
+        </p:sp>
+        <p:sp>
+          <p:nvSpPr>
+            <p:cNvPr id="125" name="tx125"/>
+            <p:cNvSpPr/>
+            <p:nvPr/>
+          </p:nvSpPr>
+          <p:spPr>
+            <a:xfrm>
+              <a:off x="1094237" y="5453301"/>
+              <a:ext cx="79107" cy="77092"/>
+            </a:xfrm>
+            <a:prstGeom prst="rect">
+              <a:avLst/>
+            </a:prstGeom>
+            <a:noFill/>
+          </p:spPr>
+          <p:txBody>
+            <a:bodyPr lIns="0" rIns="0" tIns="0" bIns="0" anchorCtr="1" anchor="ctr" wrap="none"/>
+            <a:lstStyle/>
+            <a:p>
+              <a:pPr algn="l" marL="0" marR="0" indent="0">
+                <a:lnSpc>
+                  <a:spcPts val="1120"/>
+                </a:lnSpc>
+                <a:spcBef>
+                  <a:spcPts val="0"/>
+                </a:spcBef>
+                <a:spcAft>
+                  <a:spcPts val="0"/>
+                </a:spcAft>
+              </a:pPr>
+              <a:r>
+                <a:rPr sz="1120" b="1">
+                  <a:solidFill>
+                    <a:srgbClr val="000000">
+                      <a:alpha val="100000"/>
+                    </a:srgbClr>
+                  </a:solidFill>
+                  <a:latin typeface="Arial"/>
+                  <a:cs typeface="Arial"/>
+                </a:rPr>
+                <a:t>c</a:t>
+              </a:r>
+            </a:p>
+          </p:txBody>
+        </p:sp>
+        <p:sp>
+          <p:nvSpPr>
+            <p:cNvPr id="126" name="rc126"/>
+            <p:cNvSpPr/>
+            <p:nvPr/>
+          </p:nvSpPr>
+          <p:spPr>
+            <a:xfrm>
+              <a:off x="8440541" y="5545362"/>
+              <a:ext cx="5552821" cy="3386642"/>
+            </a:xfrm>
+            <a:prstGeom prst="rect">
+              <a:avLst/>
+            </a:prstGeom>
+            <a:solidFill>
+              <a:srgbClr val="FFFFFF">
+                <a:alpha val="100000"/>
+              </a:srgbClr>
+            </a:solidFill>
+          </p:spPr>
+          <p:txBody>
+            <a:bodyPr/>
+            <a:lstStyle/>
+            <a:p/>
+          </p:txBody>
+        </p:sp>
+        <p:sp>
+          <p:nvSpPr>
+            <p:cNvPr id="127" name="pl127"/>
+            <p:cNvSpPr/>
+            <p:nvPr/>
+          </p:nvSpPr>
+          <p:spPr>
+            <a:xfrm>
+              <a:off x="8692942" y="5545362"/>
+              <a:ext cx="0" cy="3386642"/>
+            </a:xfrm>
+            <a:custGeom>
+              <a:avLst/>
+              <a:pathLst>
+                <a:path w="0" h="3386642">
+                  <a:moveTo>
+                    <a:pt x="0" y="3386642"/>
+                  </a:moveTo>
+                  <a:lnTo>
+                    <a:pt x="0" y="0"/>
+                  </a:lnTo>
+                  <a:lnTo>
+                    <a:pt x="0" y="0"/>
+                  </a:lnTo>
+                </a:path>
+              </a:pathLst>
+            </a:custGeom>
+            <a:ln w="8130" cap="flat">
+              <a:solidFill>
+                <a:srgbClr val="B0B0B0">
+                  <a:alpha val="34901"/>
+                </a:srgbClr>
+              </a:solidFill>
+              <a:prstDash val="solid"/>
+              <a:round/>
+            </a:ln>
+          </p:spPr>
+          <p:txBody>
+            <a:bodyPr/>
+            <a:lstStyle/>
+            <a:p/>
+          </p:txBody>
+        </p:sp>
+        <p:sp>
+          <p:nvSpPr>
+            <p:cNvPr id="128" name="pl128"/>
+            <p:cNvSpPr/>
+            <p:nvPr/>
+          </p:nvSpPr>
+          <p:spPr>
+            <a:xfrm>
+              <a:off x="10659696" y="5545362"/>
+              <a:ext cx="0" cy="3386642"/>
+            </a:xfrm>
+            <a:custGeom>
+              <a:avLst/>
+              <a:pathLst>
+                <a:path w="0" h="3386642">
+                  <a:moveTo>
+                    <a:pt x="0" y="3386642"/>
+                  </a:moveTo>
+                  <a:lnTo>
+                    <a:pt x="0" y="0"/>
+                  </a:lnTo>
+                  <a:lnTo>
+                    <a:pt x="0" y="0"/>
+                  </a:lnTo>
+                </a:path>
+              </a:pathLst>
+            </a:custGeom>
+            <a:ln w="8130" cap="flat">
+              <a:solidFill>
+                <a:srgbClr val="B0B0B0">
+                  <a:alpha val="34901"/>
+                </a:srgbClr>
+              </a:solidFill>
+              <a:prstDash val="solid"/>
+              <a:round/>
+            </a:ln>
+          </p:spPr>
+          <p:txBody>
+            <a:bodyPr/>
+            <a:lstStyle/>
+            <a:p/>
+          </p:txBody>
+        </p:sp>
+        <p:sp>
+          <p:nvSpPr>
+            <p:cNvPr id="129" name="pl129"/>
+            <p:cNvSpPr/>
+            <p:nvPr/>
+          </p:nvSpPr>
+          <p:spPr>
+            <a:xfrm>
+              <a:off x="12626450" y="5545362"/>
+              <a:ext cx="0" cy="3386642"/>
+            </a:xfrm>
+            <a:custGeom>
+              <a:avLst/>
+              <a:pathLst>
+                <a:path w="0" h="3386642">
+                  <a:moveTo>
+                    <a:pt x="0" y="3386642"/>
+                  </a:moveTo>
+                  <a:lnTo>
+                    <a:pt x="0" y="0"/>
+                  </a:lnTo>
+                  <a:lnTo>
+                    <a:pt x="0" y="0"/>
+                  </a:lnTo>
+                </a:path>
+              </a:pathLst>
+            </a:custGeom>
+            <a:ln w="8130" cap="flat">
+              <a:solidFill>
+                <a:srgbClr val="B0B0B0">
+                  <a:alpha val="34901"/>
+                </a:srgbClr>
+              </a:solidFill>
+              <a:prstDash val="solid"/>
+              <a:round/>
+            </a:ln>
+          </p:spPr>
+          <p:txBody>
+            <a:bodyPr/>
+            <a:lstStyle/>
+            <a:p/>
+          </p:txBody>
+        </p:sp>
+        <p:sp>
+          <p:nvSpPr>
+            <p:cNvPr id="130" name="rc130"/>
+            <p:cNvSpPr/>
+            <p:nvPr/>
+          </p:nvSpPr>
+          <p:spPr>
+            <a:xfrm>
+              <a:off x="8692942" y="5914814"/>
+              <a:ext cx="5048019" cy="1108355"/>
+            </a:xfrm>
+            <a:prstGeom prst="rect">
+              <a:avLst/>
+            </a:prstGeom>
+            <a:solidFill>
+              <a:srgbClr val="B2182B">
+                <a:alpha val="100000"/>
+              </a:srgbClr>
+            </a:solidFill>
+          </p:spPr>
+          <p:txBody>
+            <a:bodyPr/>
+            <a:lstStyle/>
+            <a:p/>
+          </p:txBody>
+        </p:sp>
+        <p:sp>
+          <p:nvSpPr>
+            <p:cNvPr id="131" name="rc131"/>
+            <p:cNvSpPr/>
+            <p:nvPr/>
+          </p:nvSpPr>
+          <p:spPr>
+            <a:xfrm>
+              <a:off x="8692942" y="7454197"/>
+              <a:ext cx="12615" cy="1108355"/>
+            </a:xfrm>
+            <a:prstGeom prst="rect">
+              <a:avLst/>
+            </a:prstGeom>
+            <a:solidFill>
+              <a:srgbClr val="B2182B">
+                <a:alpha val="100000"/>
+              </a:srgbClr>
+            </a:solidFill>
+          </p:spPr>
+          <p:txBody>
+            <a:bodyPr/>
+            <a:lstStyle/>
+            <a:p/>
+          </p:txBody>
+        </p:sp>
+        <p:sp>
+          <p:nvSpPr>
+            <p:cNvPr id="132" name="pl132"/>
+            <p:cNvSpPr/>
+            <p:nvPr/>
+          </p:nvSpPr>
+          <p:spPr>
+            <a:xfrm>
+              <a:off x="8440541" y="5545362"/>
+              <a:ext cx="0" cy="3386642"/>
+            </a:xfrm>
+            <a:custGeom>
+              <a:avLst/>
+              <a:pathLst>
+                <a:path w="0" h="3386642">
+                  <a:moveTo>
+                    <a:pt x="0" y="3386642"/>
+                  </a:moveTo>
+                  <a:lnTo>
+                    <a:pt x="0" y="0"/>
+                  </a:lnTo>
+                </a:path>
+              </a:pathLst>
+            </a:custGeom>
+            <a:ln w="12565" cap="sq">
+              <a:solidFill>
+                <a:srgbClr val="000000">
+                  <a:alpha val="100000"/>
+                </a:srgbClr>
+              </a:solidFill>
+              <a:prstDash val="solid"/>
+              <a:round/>
+            </a:ln>
+          </p:spPr>
+          <p:txBody>
+            <a:bodyPr/>
+            <a:lstStyle/>
+            <a:p/>
+          </p:txBody>
+        </p:sp>
+        <p:sp>
+          <p:nvSpPr>
+            <p:cNvPr id="133" name="tx133"/>
+            <p:cNvSpPr/>
+            <p:nvPr/>
+          </p:nvSpPr>
+          <p:spPr>
+            <a:xfrm>
+              <a:off x="8077186" y="7949474"/>
+              <a:ext cx="305279" cy="95991"/>
+            </a:xfrm>
+            <a:prstGeom prst="rect">
+              <a:avLst/>
+            </a:prstGeom>
+            <a:noFill/>
+          </p:spPr>
+          <p:txBody>
+            <a:bodyPr lIns="0" rIns="0" tIns="0" bIns="0" anchorCtr="1" anchor="ctr" wrap="none"/>
+            <a:lstStyle/>
+            <a:p>
+              <a:pPr algn="l" marL="0" marR="0" indent="0">
+                <a:lnSpc>
+                  <a:spcPts val="816"/>
+                </a:lnSpc>
+                <a:spcBef>
+                  <a:spcPts val="0"/>
+                </a:spcBef>
+                <a:spcAft>
+                  <a:spcPts val="0"/>
+                </a:spcAft>
+              </a:pPr>
+              <a:r>
+                <a:rPr sz="816">
+                  <a:solidFill>
+                    <a:srgbClr val="1A1A1A">
+                      <a:alpha val="100000"/>
+                    </a:srgbClr>
+                  </a:solidFill>
+                  <a:latin typeface="Arial"/>
+                  <a:cs typeface="Arial"/>
+                </a:rPr>
+                <a:t>Tianjin</a:t>
+              </a:r>
+            </a:p>
+          </p:txBody>
+        </p:sp>
+        <p:sp>
+          <p:nvSpPr>
+            <p:cNvPr id="134" name="tx134"/>
+            <p:cNvSpPr/>
+            <p:nvPr/>
+          </p:nvSpPr>
+          <p:spPr>
+            <a:xfrm>
+              <a:off x="8025269" y="6410091"/>
+              <a:ext cx="357196" cy="95991"/>
+            </a:xfrm>
+            <a:prstGeom prst="rect">
+              <a:avLst/>
+            </a:prstGeom>
+            <a:noFill/>
+          </p:spPr>
+          <p:txBody>
+            <a:bodyPr lIns="0" rIns="0" tIns="0" bIns="0" anchorCtr="1" anchor="ctr" wrap="none"/>
+            <a:lstStyle/>
+            <a:p>
+              <a:pPr algn="l" marL="0" marR="0" indent="0">
+                <a:lnSpc>
+                  <a:spcPts val="816"/>
+                </a:lnSpc>
+                <a:spcBef>
+                  <a:spcPts val="0"/>
+                </a:spcBef>
+                <a:spcAft>
+                  <a:spcPts val="0"/>
+                </a:spcAft>
+              </a:pPr>
+              <a:r>
+                <a:rPr sz="816">
+                  <a:solidFill>
+                    <a:srgbClr val="1A1A1A">
+                      <a:alpha val="100000"/>
+                    </a:srgbClr>
+                  </a:solidFill>
+                  <a:latin typeface="Arial"/>
+                  <a:cs typeface="Arial"/>
+                </a:rPr>
+                <a:t>Jiangsu</a:t>
+              </a:r>
+            </a:p>
+          </p:txBody>
+        </p:sp>
+        <p:sp>
+          <p:nvSpPr>
+            <p:cNvPr id="135" name="pl135"/>
+            <p:cNvSpPr/>
+            <p:nvPr/>
+          </p:nvSpPr>
+          <p:spPr>
+            <a:xfrm>
+              <a:off x="8408277" y="8008375"/>
+              <a:ext cx="32264" cy="0"/>
+            </a:xfrm>
+            <a:custGeom>
+              <a:avLst/>
+              <a:pathLst>
+                <a:path w="32264" h="0">
+                  <a:moveTo>
+                    <a:pt x="0" y="0"/>
+                  </a:moveTo>
+                  <a:lnTo>
+                    <a:pt x="32264" y="0"/>
+                  </a:lnTo>
+                </a:path>
+              </a:pathLst>
+            </a:custGeom>
+            <a:ln w="12565" cap="flat">
+              <a:solidFill>
+                <a:srgbClr val="000000">
+                  <a:alpha val="100000"/>
+                </a:srgbClr>
+              </a:solidFill>
+              <a:prstDash val="solid"/>
+              <a:round/>
+            </a:ln>
+          </p:spPr>
+          <p:txBody>
+            <a:bodyPr/>
+            <a:lstStyle/>
+            <a:p/>
+          </p:txBody>
+        </p:sp>
+        <p:sp>
+          <p:nvSpPr>
+            <p:cNvPr id="136" name="pl136"/>
+            <p:cNvSpPr/>
+            <p:nvPr/>
+          </p:nvSpPr>
+          <p:spPr>
+            <a:xfrm>
+              <a:off x="8408277" y="6468992"/>
+              <a:ext cx="32264" cy="0"/>
+            </a:xfrm>
+            <a:custGeom>
+              <a:avLst/>
+              <a:pathLst>
+                <a:path w="32264" h="0">
+                  <a:moveTo>
+                    <a:pt x="0" y="0"/>
+                  </a:moveTo>
+                  <a:lnTo>
+                    <a:pt x="32264" y="0"/>
+                  </a:lnTo>
+                </a:path>
+              </a:pathLst>
+            </a:custGeom>
+            <a:ln w="12565" cap="flat">
+              <a:solidFill>
+                <a:srgbClr val="000000">
+                  <a:alpha val="100000"/>
+                </a:srgbClr>
+              </a:solidFill>
+              <a:prstDash val="solid"/>
+              <a:round/>
+            </a:ln>
+          </p:spPr>
+          <p:txBody>
+            <a:bodyPr/>
+            <a:lstStyle/>
+            <a:p/>
+          </p:txBody>
+        </p:sp>
+        <p:sp>
+          <p:nvSpPr>
+            <p:cNvPr id="137" name="pl137"/>
+            <p:cNvSpPr/>
+            <p:nvPr/>
+          </p:nvSpPr>
+          <p:spPr>
+            <a:xfrm>
+              <a:off x="8440541" y="8932005"/>
+              <a:ext cx="5552821" cy="0"/>
+            </a:xfrm>
+            <a:custGeom>
+              <a:avLst/>
+              <a:pathLst>
+                <a:path w="5552821" h="0">
+                  <a:moveTo>
+                    <a:pt x="0" y="0"/>
+                  </a:moveTo>
+                  <a:lnTo>
+                    <a:pt x="5552821" y="0"/>
+                  </a:lnTo>
+                </a:path>
+              </a:pathLst>
+            </a:custGeom>
+            <a:ln w="12565" cap="sq">
+              <a:solidFill>
+                <a:srgbClr val="000000">
+                  <a:alpha val="100000"/>
+                </a:srgbClr>
+              </a:solidFill>
+              <a:prstDash val="solid"/>
+              <a:round/>
+            </a:ln>
+          </p:spPr>
+          <p:txBody>
+            <a:bodyPr/>
+            <a:lstStyle/>
+            <a:p/>
+          </p:txBody>
+        </p:sp>
+        <p:sp>
+          <p:nvSpPr>
+            <p:cNvPr id="138" name="pl138"/>
+            <p:cNvSpPr/>
+            <p:nvPr/>
+          </p:nvSpPr>
+          <p:spPr>
+            <a:xfrm>
+              <a:off x="8692942" y="8932005"/>
+              <a:ext cx="0" cy="32264"/>
+            </a:xfrm>
+            <a:custGeom>
+              <a:avLst/>
+              <a:pathLst>
+                <a:path w="0" h="32264">
+                  <a:moveTo>
+                    <a:pt x="0" y="32264"/>
+                  </a:moveTo>
+                  <a:lnTo>
+                    <a:pt x="0" y="0"/>
+                  </a:lnTo>
+                </a:path>
+              </a:pathLst>
+            </a:custGeom>
+            <a:ln w="12565" cap="flat">
+              <a:solidFill>
+                <a:srgbClr val="000000">
+                  <a:alpha val="100000"/>
+                </a:srgbClr>
+              </a:solidFill>
+              <a:prstDash val="solid"/>
+              <a:round/>
+            </a:ln>
+          </p:spPr>
+          <p:txBody>
+            <a:bodyPr/>
+            <a:lstStyle/>
+            <a:p/>
+          </p:txBody>
+        </p:sp>
+        <p:sp>
+          <p:nvSpPr>
+            <p:cNvPr id="139" name="pl139"/>
+            <p:cNvSpPr/>
+            <p:nvPr/>
+          </p:nvSpPr>
+          <p:spPr>
+            <a:xfrm>
+              <a:off x="10659696" y="8932005"/>
+              <a:ext cx="0" cy="32264"/>
+            </a:xfrm>
+            <a:custGeom>
+              <a:avLst/>
+              <a:pathLst>
+                <a:path w="0" h="32264">
+                  <a:moveTo>
+                    <a:pt x="0" y="32264"/>
+                  </a:moveTo>
+                  <a:lnTo>
+                    <a:pt x="0" y="0"/>
+                  </a:lnTo>
+                </a:path>
+              </a:pathLst>
+            </a:custGeom>
+            <a:ln w="12565" cap="flat">
+              <a:solidFill>
+                <a:srgbClr val="000000">
+                  <a:alpha val="100000"/>
+                </a:srgbClr>
+              </a:solidFill>
+              <a:prstDash val="solid"/>
+              <a:round/>
+            </a:ln>
+          </p:spPr>
+          <p:txBody>
+            <a:bodyPr/>
+            <a:lstStyle/>
+            <a:p/>
+          </p:txBody>
+        </p:sp>
+        <p:sp>
+          <p:nvSpPr>
+            <p:cNvPr id="140" name="pl140"/>
+            <p:cNvSpPr/>
+            <p:nvPr/>
+          </p:nvSpPr>
+          <p:spPr>
+            <a:xfrm>
+              <a:off x="12626450" y="8932005"/>
+              <a:ext cx="0" cy="32264"/>
+            </a:xfrm>
+            <a:custGeom>
+              <a:avLst/>
+              <a:pathLst>
+                <a:path w="0" h="32264">
+                  <a:moveTo>
+                    <a:pt x="0" y="32264"/>
+                  </a:moveTo>
+                  <a:lnTo>
+                    <a:pt x="0" y="0"/>
+                  </a:lnTo>
+                </a:path>
+              </a:pathLst>
+            </a:custGeom>
+            <a:ln w="12565" cap="flat">
+              <a:solidFill>
+                <a:srgbClr val="000000">
+                  <a:alpha val="100000"/>
+                </a:srgbClr>
+              </a:solidFill>
+              <a:prstDash val="solid"/>
+              <a:round/>
+            </a:ln>
+          </p:spPr>
+          <p:txBody>
+            <a:bodyPr/>
+            <a:lstStyle/>
+            <a:p/>
+          </p:txBody>
+        </p:sp>
+        <p:sp>
+          <p:nvSpPr>
+            <p:cNvPr id="141" name="tx141"/>
+            <p:cNvSpPr/>
+            <p:nvPr/>
+          </p:nvSpPr>
+          <p:spPr>
+            <a:xfrm>
+              <a:off x="8664124" y="8988511"/>
+              <a:ext cx="57635" cy="75750"/>
+            </a:xfrm>
+            <a:prstGeom prst="rect">
+              <a:avLst/>
+            </a:prstGeom>
+            <a:noFill/>
+          </p:spPr>
+          <p:txBody>
+            <a:bodyPr lIns="0" rIns="0" tIns="0" bIns="0" anchorCtr="1" anchor="ctr" wrap="none"/>
+            <a:lstStyle/>
+            <a:p>
+              <a:pPr algn="l" marL="0" marR="0" indent="0">
+                <a:lnSpc>
+                  <a:spcPts val="816"/>
+                </a:lnSpc>
+                <a:spcBef>
+                  <a:spcPts val="0"/>
+                </a:spcBef>
+                <a:spcAft>
+                  <a:spcPts val="0"/>
+                </a:spcAft>
+              </a:pPr>
+              <a:r>
+                <a:rPr sz="816">
+                  <a:solidFill>
+                    <a:srgbClr val="1A1A1A">
+                      <a:alpha val="100000"/>
+                    </a:srgbClr>
+                  </a:solidFill>
+                  <a:latin typeface="Arial"/>
+                  <a:cs typeface="Arial"/>
+                </a:rPr>
+                <a:t>0</a:t>
+              </a:r>
+            </a:p>
+          </p:txBody>
+        </p:sp>
+        <p:sp>
+          <p:nvSpPr>
+            <p:cNvPr id="142" name="tx142"/>
+            <p:cNvSpPr/>
+            <p:nvPr/>
+          </p:nvSpPr>
+          <p:spPr>
+            <a:xfrm>
+              <a:off x="10602061" y="8988511"/>
+              <a:ext cx="115270" cy="75750"/>
+            </a:xfrm>
+            <a:prstGeom prst="rect">
+              <a:avLst/>
+            </a:prstGeom>
+            <a:noFill/>
+          </p:spPr>
+          <p:txBody>
+            <a:bodyPr lIns="0" rIns="0" tIns="0" bIns="0" anchorCtr="1" anchor="ctr" wrap="none"/>
+            <a:lstStyle/>
+            <a:p>
+              <a:pPr algn="l" marL="0" marR="0" indent="0">
+                <a:lnSpc>
+                  <a:spcPts val="816"/>
+                </a:lnSpc>
+                <a:spcBef>
+                  <a:spcPts val="0"/>
+                </a:spcBef>
+                <a:spcAft>
+                  <a:spcPts val="0"/>
+                </a:spcAft>
+              </a:pPr>
+              <a:r>
+                <a:rPr sz="816">
+                  <a:solidFill>
+                    <a:srgbClr val="1A1A1A">
+                      <a:alpha val="100000"/>
+                    </a:srgbClr>
+                  </a:solidFill>
+                  <a:latin typeface="Arial"/>
+                  <a:cs typeface="Arial"/>
+                </a:rPr>
+                <a:t>50</a:t>
+              </a:r>
+            </a:p>
+          </p:txBody>
+        </p:sp>
+        <p:sp>
+          <p:nvSpPr>
+            <p:cNvPr id="143" name="tx143"/>
+            <p:cNvSpPr/>
+            <p:nvPr/>
+          </p:nvSpPr>
+          <p:spPr>
+            <a:xfrm>
+              <a:off x="12539998" y="8988511"/>
+              <a:ext cx="172905" cy="75750"/>
+            </a:xfrm>
+            <a:prstGeom prst="rect">
+              <a:avLst/>
+            </a:prstGeom>
+            <a:noFill/>
+          </p:spPr>
+          <p:txBody>
+            <a:bodyPr lIns="0" rIns="0" tIns="0" bIns="0" anchorCtr="1" anchor="ctr" wrap="none"/>
+            <a:lstStyle/>
+            <a:p>
+              <a:pPr algn="l" marL="0" marR="0" indent="0">
+                <a:lnSpc>
+                  <a:spcPts val="816"/>
+                </a:lnSpc>
+                <a:spcBef>
+                  <a:spcPts val="0"/>
+                </a:spcBef>
+                <a:spcAft>
+                  <a:spcPts val="0"/>
+                </a:spcAft>
+              </a:pPr>
+              <a:r>
+                <a:rPr sz="816">
                   <a:solidFill>
                     <a:srgbClr val="1A1A1A">
                       <a:alpha val="100000"/>
@@ -7715,14 +8785,14 @@
         </p:sp>
         <p:sp>
           <p:nvSpPr>
-            <p:cNvPr id="119" name="tx119"/>
-            <p:cNvSpPr/>
-            <p:nvPr/>
-          </p:nvSpPr>
-          <p:spPr>
-            <a:xfrm>
-              <a:off x="11680629" y="5264912"/>
-              <a:ext cx="177990" cy="77978"/>
+            <p:cNvPr id="144" name="tx144"/>
+            <p:cNvSpPr/>
+            <p:nvPr/>
+          </p:nvSpPr>
+          <p:spPr>
+            <a:xfrm>
+              <a:off x="10722827" y="9115172"/>
+              <a:ext cx="988248" cy="95889"/>
             </a:xfrm>
             <a:prstGeom prst="rect">
               <a:avLst/>
@@ -7735,7 +8805,7 @@
             <a:p>
               <a:pPr algn="l" marL="0" marR="0" indent="0">
                 <a:lnSpc>
-                  <a:spcPts val="840"/>
+                  <a:spcPts val="1019"/>
                 </a:lnSpc>
                 <a:spcBef>
                   <a:spcPts val="0"/>
@@ -7745,1054 +8815,7 @@
                 </a:spcAft>
               </a:pPr>
               <a:r>
-                <a:rPr sz="840">
-                  <a:solidFill>
-                    <a:srgbClr val="1A1A1A">
-                      <a:alpha val="100000"/>
-                    </a:srgbClr>
-                  </a:solidFill>
-                  <a:latin typeface="Arial"/>
-                  <a:cs typeface="Arial"/>
-                </a:rPr>
-                <a:t>200</a:t>
-              </a:r>
-            </a:p>
-          </p:txBody>
-        </p:sp>
-        <p:sp>
-          <p:nvSpPr>
-            <p:cNvPr id="120" name="tx120"/>
-            <p:cNvSpPr/>
-            <p:nvPr/>
-          </p:nvSpPr>
-          <p:spPr>
-            <a:xfrm>
-              <a:off x="12907041" y="5264859"/>
-              <a:ext cx="177990" cy="78030"/>
-            </a:xfrm>
-            <a:prstGeom prst="rect">
-              <a:avLst/>
-            </a:prstGeom>
-            <a:noFill/>
-          </p:spPr>
-          <p:txBody>
-            <a:bodyPr lIns="0" rIns="0" tIns="0" bIns="0" anchorCtr="1" anchor="ctr" wrap="none"/>
-            <a:lstStyle/>
-            <a:p>
-              <a:pPr algn="l" marL="0" marR="0" indent="0">
-                <a:lnSpc>
-                  <a:spcPts val="840"/>
-                </a:lnSpc>
-                <a:spcBef>
-                  <a:spcPts val="0"/>
-                </a:spcBef>
-                <a:spcAft>
-                  <a:spcPts val="0"/>
-                </a:spcAft>
-              </a:pPr>
-              <a:r>
-                <a:rPr sz="840">
-                  <a:solidFill>
-                    <a:srgbClr val="1A1A1A">
-                      <a:alpha val="100000"/>
-                    </a:srgbClr>
-                  </a:solidFill>
-                  <a:latin typeface="Arial"/>
-                  <a:cs typeface="Arial"/>
-                </a:rPr>
-                <a:t>300</a:t>
-              </a:r>
-            </a:p>
-          </p:txBody>
-        </p:sp>
-        <p:sp>
-          <p:nvSpPr>
-            <p:cNvPr id="121" name="tx121"/>
-            <p:cNvSpPr/>
-            <p:nvPr/>
-          </p:nvSpPr>
-          <p:spPr>
-            <a:xfrm>
-              <a:off x="11078157" y="5395298"/>
-              <a:ext cx="229651" cy="98710"/>
-            </a:xfrm>
-            <a:prstGeom prst="rect">
-              <a:avLst/>
-            </a:prstGeom>
-            <a:noFill/>
-          </p:spPr>
-          <p:txBody>
-            <a:bodyPr lIns="0" rIns="0" tIns="0" bIns="0" anchorCtr="1" anchor="ctr" wrap="none"/>
-            <a:lstStyle/>
-            <a:p>
-              <a:pPr algn="l" marL="0" marR="0" indent="0">
-                <a:lnSpc>
-                  <a:spcPts val="1050"/>
-                </a:lnSpc>
-                <a:spcBef>
-                  <a:spcPts val="0"/>
-                </a:spcBef>
-                <a:spcAft>
-                  <a:spcPts val="0"/>
-                </a:spcAft>
-              </a:pPr>
-              <a:r>
-                <a:rPr sz="1050" b="1">
-                  <a:solidFill>
-                    <a:srgbClr val="111111">
-                      <a:alpha val="100000"/>
-                    </a:srgbClr>
-                  </a:solidFill>
-                  <a:latin typeface="Arial"/>
-                  <a:cs typeface="Arial"/>
-                </a:rPr>
-                <a:t>AIC</a:t>
-              </a:r>
-            </a:p>
-          </p:txBody>
-        </p:sp>
-        <p:sp>
-          <p:nvSpPr>
-            <p:cNvPr id="122" name="rc122"/>
-            <p:cNvSpPr/>
-            <p:nvPr/>
-          </p:nvSpPr>
-          <p:spPr>
-            <a:xfrm>
-              <a:off x="10144235" y="1672034"/>
-              <a:ext cx="202274" cy="202274"/>
-            </a:xfrm>
-            <a:prstGeom prst="rect">
-              <a:avLst/>
-            </a:prstGeom>
-            <a:solidFill>
-              <a:srgbClr val="9ECAE1">
-                <a:alpha val="100000"/>
-              </a:srgbClr>
-            </a:solidFill>
-            <a:ln w="12934" cap="flat">
-              <a:solidFill>
-                <a:srgbClr val="FFFFFF">
-                  <a:alpha val="100000"/>
-                </a:srgbClr>
-              </a:solidFill>
-              <a:prstDash val="solid"/>
-              <a:miter/>
-            </a:ln>
-          </p:spPr>
-          <p:txBody>
-            <a:bodyPr/>
-            <a:lstStyle/>
-            <a:p/>
-          </p:txBody>
-        </p:sp>
-        <p:sp>
-          <p:nvSpPr>
-            <p:cNvPr id="123" name="rc123"/>
-            <p:cNvSpPr/>
-            <p:nvPr/>
-          </p:nvSpPr>
-          <p:spPr>
-            <a:xfrm>
-              <a:off x="11125059" y="1672034"/>
-              <a:ext cx="202274" cy="202274"/>
-            </a:xfrm>
-            <a:prstGeom prst="rect">
-              <a:avLst/>
-            </a:prstGeom>
-            <a:solidFill>
-              <a:srgbClr val="FDD0A2">
-                <a:alpha val="100000"/>
-              </a:srgbClr>
-            </a:solidFill>
-            <a:ln w="12934" cap="flat">
-              <a:solidFill>
-                <a:srgbClr val="FFFFFF">
-                  <a:alpha val="100000"/>
-                </a:srgbClr>
-              </a:solidFill>
-              <a:prstDash val="solid"/>
-              <a:miter/>
-            </a:ln>
-          </p:spPr>
-          <p:txBody>
-            <a:bodyPr/>
-            <a:lstStyle/>
-            <a:p/>
-          </p:txBody>
-        </p:sp>
-        <p:sp>
-          <p:nvSpPr>
-            <p:cNvPr id="124" name="tx124"/>
-            <p:cNvSpPr/>
-            <p:nvPr/>
-          </p:nvSpPr>
-          <p:spPr>
-            <a:xfrm>
-              <a:off x="10421526" y="1732385"/>
-              <a:ext cx="628516" cy="78968"/>
-            </a:xfrm>
-            <a:prstGeom prst="rect">
-              <a:avLst/>
-            </a:prstGeom>
-            <a:noFill/>
-          </p:spPr>
-          <p:txBody>
-            <a:bodyPr lIns="0" rIns="0" tIns="0" bIns="0" anchorCtr="1" anchor="ctr" wrap="none"/>
-            <a:lstStyle/>
-            <a:p>
-              <a:pPr algn="l" marL="0" marR="0" indent="0">
-                <a:lnSpc>
-                  <a:spcPts val="840"/>
-                </a:lnSpc>
-                <a:spcBef>
-                  <a:spcPts val="0"/>
-                </a:spcBef>
-                <a:spcAft>
-                  <a:spcPts val="0"/>
-                </a:spcAft>
-              </a:pPr>
-              <a:r>
-                <a:rPr sz="840">
-                  <a:solidFill>
-                    <a:srgbClr val="000000">
-                      <a:alpha val="100000"/>
-                    </a:srgbClr>
-                  </a:solidFill>
-                  <a:latin typeface="Arial"/>
-                  <a:cs typeface="Arial"/>
-                </a:rPr>
-                <a:t>Gaussian LM</a:t>
-              </a:r>
-            </a:p>
-          </p:txBody>
-        </p:sp>
-        <p:sp>
-          <p:nvSpPr>
-            <p:cNvPr id="125" name="tx125"/>
-            <p:cNvSpPr/>
-            <p:nvPr/>
-          </p:nvSpPr>
-          <p:spPr>
-            <a:xfrm>
-              <a:off x="11402350" y="1712539"/>
-              <a:ext cx="847970" cy="98814"/>
-            </a:xfrm>
-            <a:prstGeom prst="rect">
-              <a:avLst/>
-            </a:prstGeom>
-            <a:noFill/>
-          </p:spPr>
-          <p:txBody>
-            <a:bodyPr lIns="0" rIns="0" tIns="0" bIns="0" anchorCtr="1" anchor="ctr" wrap="none"/>
-            <a:lstStyle/>
-            <a:p>
-              <a:pPr algn="l" marL="0" marR="0" indent="0">
-                <a:lnSpc>
-                  <a:spcPts val="840"/>
-                </a:lnSpc>
-                <a:spcBef>
-                  <a:spcPts val="0"/>
-                </a:spcBef>
-                <a:spcAft>
-                  <a:spcPts val="0"/>
-                </a:spcAft>
-              </a:pPr>
-              <a:r>
-                <a:rPr sz="840">
-                  <a:solidFill>
-                    <a:srgbClr val="000000">
-                      <a:alpha val="100000"/>
-                    </a:srgbClr>
-                  </a:solidFill>
-                  <a:latin typeface="Arial"/>
-                  <a:cs typeface="Arial"/>
-                </a:rPr>
-                <a:t>Negative binomial</a:t>
-              </a:r>
-            </a:p>
-          </p:txBody>
-        </p:sp>
-        <p:sp>
-          <p:nvSpPr>
-            <p:cNvPr id="126" name="tx126"/>
-            <p:cNvSpPr/>
-            <p:nvPr/>
-          </p:nvSpPr>
-          <p:spPr>
-            <a:xfrm>
-              <a:off x="7284350" y="1475392"/>
-              <a:ext cx="89213" cy="106257"/>
-            </a:xfrm>
-            <a:prstGeom prst="rect">
-              <a:avLst/>
-            </a:prstGeom>
-            <a:noFill/>
-          </p:spPr>
-          <p:txBody>
-            <a:bodyPr lIns="0" rIns="0" tIns="0" bIns="0" anchorCtr="1" anchor="ctr" wrap="none"/>
-            <a:lstStyle/>
-            <a:p>
-              <a:pPr algn="l" marL="0" marR="0" indent="0">
-                <a:lnSpc>
-                  <a:spcPts val="1150"/>
-                </a:lnSpc>
-                <a:spcBef>
-                  <a:spcPts val="0"/>
-                </a:spcBef>
-                <a:spcAft>
-                  <a:spcPts val="0"/>
-                </a:spcAft>
-              </a:pPr>
-              <a:r>
-                <a:rPr sz="1150" b="1">
-                  <a:solidFill>
-                    <a:srgbClr val="000000">
-                      <a:alpha val="100000"/>
-                    </a:srgbClr>
-                  </a:solidFill>
-                  <a:latin typeface="Arial"/>
-                  <a:cs typeface="Arial"/>
-                </a:rPr>
-                <a:t>b</a:t>
-              </a:r>
-            </a:p>
-          </p:txBody>
-        </p:sp>
-        <p:sp>
-          <p:nvSpPr>
-            <p:cNvPr id="127" name="rc127"/>
-            <p:cNvSpPr/>
-            <p:nvPr/>
-          </p:nvSpPr>
-          <p:spPr>
-            <a:xfrm>
-              <a:off x="8138759" y="5588498"/>
-              <a:ext cx="5187611" cy="3714354"/>
-            </a:xfrm>
-            <a:prstGeom prst="rect">
-              <a:avLst/>
-            </a:prstGeom>
-            <a:solidFill>
-              <a:srgbClr val="FFFFFF">
-                <a:alpha val="100000"/>
-              </a:srgbClr>
-            </a:solidFill>
-            <a:ln w="13550" cap="rnd">
-              <a:solidFill>
-                <a:srgbClr val="FFFFFF">
-                  <a:alpha val="100000"/>
-                </a:srgbClr>
-              </a:solidFill>
-              <a:prstDash val="solid"/>
-              <a:round/>
-            </a:ln>
-          </p:spPr>
-          <p:txBody>
-            <a:bodyPr/>
-            <a:lstStyle/>
-            <a:p/>
-          </p:txBody>
-        </p:sp>
-        <p:sp>
-          <p:nvSpPr>
-            <p:cNvPr id="128" name="rc128"/>
-            <p:cNvSpPr/>
-            <p:nvPr/>
-          </p:nvSpPr>
-          <p:spPr>
-            <a:xfrm>
-              <a:off x="1761229" y="5588498"/>
-              <a:ext cx="6377530" cy="3714354"/>
-            </a:xfrm>
-            <a:prstGeom prst="rect">
-              <a:avLst/>
-            </a:prstGeom>
-            <a:solidFill>
-              <a:srgbClr val="FFFFFF">
-                <a:alpha val="100000"/>
-              </a:srgbClr>
-            </a:solidFill>
-            <a:ln w="12934" cap="rnd">
-              <a:solidFill>
-                <a:srgbClr val="FFFFFF">
-                  <a:alpha val="100000"/>
-                </a:srgbClr>
-              </a:solidFill>
-              <a:prstDash val="solid"/>
-              <a:round/>
-            </a:ln>
-          </p:spPr>
-          <p:txBody>
-            <a:bodyPr/>
-            <a:lstStyle/>
-            <a:p/>
-          </p:txBody>
-        </p:sp>
-        <p:sp>
-          <p:nvSpPr>
-            <p:cNvPr id="129" name="rc129"/>
-            <p:cNvSpPr/>
-            <p:nvPr/>
-          </p:nvSpPr>
-          <p:spPr>
-            <a:xfrm>
-              <a:off x="3023900" y="5793368"/>
-              <a:ext cx="5048433" cy="3124565"/>
-            </a:xfrm>
-            <a:prstGeom prst="rect">
-              <a:avLst/>
-            </a:prstGeom>
-            <a:solidFill>
-              <a:srgbClr val="FFFFFF">
-                <a:alpha val="100000"/>
-              </a:srgbClr>
-            </a:solidFill>
-          </p:spPr>
-          <p:txBody>
-            <a:bodyPr/>
-            <a:lstStyle/>
-            <a:p/>
-          </p:txBody>
-        </p:sp>
-        <p:sp>
-          <p:nvSpPr>
-            <p:cNvPr id="130" name="rc130"/>
-            <p:cNvSpPr/>
-            <p:nvPr/>
-          </p:nvSpPr>
-          <p:spPr>
-            <a:xfrm>
-              <a:off x="3253374" y="6134230"/>
-              <a:ext cx="4589484" cy="1022585"/>
-            </a:xfrm>
-            <a:prstGeom prst="rect">
-              <a:avLst/>
-            </a:prstGeom>
-            <a:solidFill>
-              <a:srgbClr val="E34A33">
-                <a:alpha val="100000"/>
-              </a:srgbClr>
-            </a:solidFill>
-          </p:spPr>
-          <p:txBody>
-            <a:bodyPr/>
-            <a:lstStyle/>
-            <a:p/>
-          </p:txBody>
-        </p:sp>
-        <p:sp>
-          <p:nvSpPr>
-            <p:cNvPr id="131" name="rc131"/>
-            <p:cNvSpPr/>
-            <p:nvPr/>
-          </p:nvSpPr>
-          <p:spPr>
-            <a:xfrm>
-              <a:off x="3253374" y="7554487"/>
-              <a:ext cx="11469" cy="1022585"/>
-            </a:xfrm>
-            <a:prstGeom prst="rect">
-              <a:avLst/>
-            </a:prstGeom>
-            <a:solidFill>
-              <a:srgbClr val="E34A33">
-                <a:alpha val="100000"/>
-              </a:srgbClr>
-            </a:solidFill>
-          </p:spPr>
-          <p:txBody>
-            <a:bodyPr/>
-            <a:lstStyle/>
-            <a:p/>
-          </p:txBody>
-        </p:sp>
-        <p:sp>
-          <p:nvSpPr>
-            <p:cNvPr id="132" name="pl132"/>
-            <p:cNvSpPr/>
-            <p:nvPr/>
-          </p:nvSpPr>
-          <p:spPr>
-            <a:xfrm>
-              <a:off x="3257989" y="5793368"/>
-              <a:ext cx="0" cy="3124565"/>
-            </a:xfrm>
-            <a:custGeom>
-              <a:avLst/>
-              <a:pathLst>
-                <a:path w="0" h="3124565">
-                  <a:moveTo>
-                    <a:pt x="0" y="3124565"/>
-                  </a:moveTo>
-                  <a:lnTo>
-                    <a:pt x="0" y="0"/>
-                  </a:lnTo>
-                  <a:lnTo>
-                    <a:pt x="0" y="0"/>
-                  </a:lnTo>
-                </a:path>
-              </a:pathLst>
-            </a:custGeom>
-            <a:ln w="12934" cap="flat">
-              <a:solidFill>
-                <a:srgbClr val="333333">
-                  <a:alpha val="100000"/>
-                </a:srgbClr>
-              </a:solidFill>
-              <a:prstDash val="dash"/>
-              <a:round/>
-            </a:ln>
-          </p:spPr>
-          <p:txBody>
-            <a:bodyPr/>
-            <a:lstStyle/>
-            <a:p/>
-          </p:txBody>
-        </p:sp>
-        <p:sp>
-          <p:nvSpPr>
-            <p:cNvPr id="133" name="pl133"/>
-            <p:cNvSpPr/>
-            <p:nvPr/>
-          </p:nvSpPr>
-          <p:spPr>
-            <a:xfrm>
-              <a:off x="3023900" y="5793368"/>
-              <a:ext cx="0" cy="3124565"/>
-            </a:xfrm>
-            <a:custGeom>
-              <a:avLst/>
-              <a:pathLst>
-                <a:path w="0" h="3124565">
-                  <a:moveTo>
-                    <a:pt x="0" y="3124565"/>
-                  </a:moveTo>
-                  <a:lnTo>
-                    <a:pt x="0" y="0"/>
-                  </a:lnTo>
-                </a:path>
-              </a:pathLst>
-            </a:custGeom>
-            <a:ln w="12934" cap="sq">
-              <a:solidFill>
-                <a:srgbClr val="000000">
-                  <a:alpha val="100000"/>
-                </a:srgbClr>
-              </a:solidFill>
-              <a:prstDash val="solid"/>
-              <a:round/>
-            </a:ln>
-          </p:spPr>
-          <p:txBody>
-            <a:bodyPr/>
-            <a:lstStyle/>
-            <a:p/>
-          </p:txBody>
-        </p:sp>
-        <p:sp>
-          <p:nvSpPr>
-            <p:cNvPr id="134" name="tx134"/>
-            <p:cNvSpPr/>
-            <p:nvPr/>
-          </p:nvSpPr>
-          <p:spPr>
-            <a:xfrm>
-              <a:off x="2649859" y="8005147"/>
-              <a:ext cx="314258" cy="98814"/>
-            </a:xfrm>
-            <a:prstGeom prst="rect">
-              <a:avLst/>
-            </a:prstGeom>
-            <a:noFill/>
-          </p:spPr>
-          <p:txBody>
-            <a:bodyPr lIns="0" rIns="0" tIns="0" bIns="0" anchorCtr="1" anchor="ctr" wrap="none"/>
-            <a:lstStyle/>
-            <a:p>
-              <a:pPr algn="l" marL="0" marR="0" indent="0">
-                <a:lnSpc>
-                  <a:spcPts val="840"/>
-                </a:lnSpc>
-                <a:spcBef>
-                  <a:spcPts val="0"/>
-                </a:spcBef>
-                <a:spcAft>
-                  <a:spcPts val="0"/>
-                </a:spcAft>
-              </a:pPr>
-              <a:r>
-                <a:rPr sz="840">
-                  <a:solidFill>
-                    <a:srgbClr val="1A1A1A">
-                      <a:alpha val="100000"/>
-                    </a:srgbClr>
-                  </a:solidFill>
-                  <a:latin typeface="Arial"/>
-                  <a:cs typeface="Arial"/>
-                </a:rPr>
-                <a:t>Tianjin</a:t>
-              </a:r>
-            </a:p>
-          </p:txBody>
-        </p:sp>
-        <p:sp>
-          <p:nvSpPr>
-            <p:cNvPr id="135" name="tx135"/>
-            <p:cNvSpPr/>
-            <p:nvPr/>
-          </p:nvSpPr>
-          <p:spPr>
-            <a:xfrm>
-              <a:off x="2596414" y="6584890"/>
-              <a:ext cx="367702" cy="98814"/>
-            </a:xfrm>
-            <a:prstGeom prst="rect">
-              <a:avLst/>
-            </a:prstGeom>
-            <a:noFill/>
-          </p:spPr>
-          <p:txBody>
-            <a:bodyPr lIns="0" rIns="0" tIns="0" bIns="0" anchorCtr="1" anchor="ctr" wrap="none"/>
-            <a:lstStyle/>
-            <a:p>
-              <a:pPr algn="l" marL="0" marR="0" indent="0">
-                <a:lnSpc>
-                  <a:spcPts val="840"/>
-                </a:lnSpc>
-                <a:spcBef>
-                  <a:spcPts val="0"/>
-                </a:spcBef>
-                <a:spcAft>
-                  <a:spcPts val="0"/>
-                </a:spcAft>
-              </a:pPr>
-              <a:r>
-                <a:rPr sz="840">
-                  <a:solidFill>
-                    <a:srgbClr val="1A1A1A">
-                      <a:alpha val="100000"/>
-                    </a:srgbClr>
-                  </a:solidFill>
-                  <a:latin typeface="Arial"/>
-                  <a:cs typeface="Arial"/>
-                </a:rPr>
-                <a:t>Jiangsu</a:t>
-              </a:r>
-            </a:p>
-          </p:txBody>
-        </p:sp>
-        <p:sp>
-          <p:nvSpPr>
-            <p:cNvPr id="136" name="pl136"/>
-            <p:cNvSpPr/>
-            <p:nvPr/>
-          </p:nvSpPr>
-          <p:spPr>
-            <a:xfrm>
-              <a:off x="2990687" y="8065780"/>
-              <a:ext cx="33212" cy="0"/>
-            </a:xfrm>
-            <a:custGeom>
-              <a:avLst/>
-              <a:pathLst>
-                <a:path w="33212" h="0">
-                  <a:moveTo>
-                    <a:pt x="0" y="0"/>
-                  </a:moveTo>
-                  <a:lnTo>
-                    <a:pt x="33212" y="0"/>
-                  </a:lnTo>
-                </a:path>
-              </a:pathLst>
-            </a:custGeom>
-            <a:ln w="12934" cap="flat">
-              <a:solidFill>
-                <a:srgbClr val="000000">
-                  <a:alpha val="100000"/>
-                </a:srgbClr>
-              </a:solidFill>
-              <a:prstDash val="solid"/>
-              <a:round/>
-            </a:ln>
-          </p:spPr>
-          <p:txBody>
-            <a:bodyPr/>
-            <a:lstStyle/>
-            <a:p/>
-          </p:txBody>
-        </p:sp>
-        <p:sp>
-          <p:nvSpPr>
-            <p:cNvPr id="137" name="pl137"/>
-            <p:cNvSpPr/>
-            <p:nvPr/>
-          </p:nvSpPr>
-          <p:spPr>
-            <a:xfrm>
-              <a:off x="2990687" y="6645523"/>
-              <a:ext cx="33212" cy="0"/>
-            </a:xfrm>
-            <a:custGeom>
-              <a:avLst/>
-              <a:pathLst>
-                <a:path w="33212" h="0">
-                  <a:moveTo>
-                    <a:pt x="0" y="0"/>
-                  </a:moveTo>
-                  <a:lnTo>
-                    <a:pt x="33212" y="0"/>
-                  </a:lnTo>
-                </a:path>
-              </a:pathLst>
-            </a:custGeom>
-            <a:ln w="12934" cap="flat">
-              <a:solidFill>
-                <a:srgbClr val="000000">
-                  <a:alpha val="100000"/>
-                </a:srgbClr>
-              </a:solidFill>
-              <a:prstDash val="solid"/>
-              <a:round/>
-            </a:ln>
-          </p:spPr>
-          <p:txBody>
-            <a:bodyPr/>
-            <a:lstStyle/>
-            <a:p/>
-          </p:txBody>
-        </p:sp>
-        <p:sp>
-          <p:nvSpPr>
-            <p:cNvPr id="138" name="pl138"/>
-            <p:cNvSpPr/>
-            <p:nvPr/>
-          </p:nvSpPr>
-          <p:spPr>
-            <a:xfrm>
-              <a:off x="3023900" y="8917934"/>
-              <a:ext cx="5048433" cy="0"/>
-            </a:xfrm>
-            <a:custGeom>
-              <a:avLst/>
-              <a:pathLst>
-                <a:path w="5048433" h="0">
-                  <a:moveTo>
-                    <a:pt x="0" y="0"/>
-                  </a:moveTo>
-                  <a:lnTo>
-                    <a:pt x="5048433" y="0"/>
-                  </a:lnTo>
-                </a:path>
-              </a:pathLst>
-            </a:custGeom>
-            <a:ln w="12934" cap="sq">
-              <a:solidFill>
-                <a:srgbClr val="000000">
-                  <a:alpha val="100000"/>
-                </a:srgbClr>
-              </a:solidFill>
-              <a:prstDash val="solid"/>
-              <a:round/>
-            </a:ln>
-          </p:spPr>
-          <p:txBody>
-            <a:bodyPr/>
-            <a:lstStyle/>
-            <a:p/>
-          </p:txBody>
-        </p:sp>
-        <p:sp>
-          <p:nvSpPr>
-            <p:cNvPr id="139" name="pl139"/>
-            <p:cNvSpPr/>
-            <p:nvPr/>
-          </p:nvSpPr>
-          <p:spPr>
-            <a:xfrm>
-              <a:off x="3253374" y="8917934"/>
-              <a:ext cx="0" cy="33212"/>
-            </a:xfrm>
-            <a:custGeom>
-              <a:avLst/>
-              <a:pathLst>
-                <a:path w="0" h="33212">
-                  <a:moveTo>
-                    <a:pt x="0" y="33212"/>
-                  </a:moveTo>
-                  <a:lnTo>
-                    <a:pt x="0" y="0"/>
-                  </a:lnTo>
-                </a:path>
-              </a:pathLst>
-            </a:custGeom>
-            <a:ln w="12934" cap="flat">
-              <a:solidFill>
-                <a:srgbClr val="000000">
-                  <a:alpha val="100000"/>
-                </a:srgbClr>
-              </a:solidFill>
-              <a:prstDash val="solid"/>
-              <a:round/>
-            </a:ln>
-          </p:spPr>
-          <p:txBody>
-            <a:bodyPr/>
-            <a:lstStyle/>
-            <a:p/>
-          </p:txBody>
-        </p:sp>
-        <p:sp>
-          <p:nvSpPr>
-            <p:cNvPr id="140" name="pl140"/>
-            <p:cNvSpPr/>
-            <p:nvPr/>
-          </p:nvSpPr>
-          <p:spPr>
-            <a:xfrm>
-              <a:off x="5041479" y="8917934"/>
-              <a:ext cx="0" cy="33212"/>
-            </a:xfrm>
-            <a:custGeom>
-              <a:avLst/>
-              <a:pathLst>
-                <a:path w="0" h="33212">
-                  <a:moveTo>
-                    <a:pt x="0" y="33212"/>
-                  </a:moveTo>
-                  <a:lnTo>
-                    <a:pt x="0" y="0"/>
-                  </a:lnTo>
-                </a:path>
-              </a:pathLst>
-            </a:custGeom>
-            <a:ln w="12934" cap="flat">
-              <a:solidFill>
-                <a:srgbClr val="000000">
-                  <a:alpha val="100000"/>
-                </a:srgbClr>
-              </a:solidFill>
-              <a:prstDash val="solid"/>
-              <a:round/>
-            </a:ln>
-          </p:spPr>
-          <p:txBody>
-            <a:bodyPr/>
-            <a:lstStyle/>
-            <a:p/>
-          </p:txBody>
-        </p:sp>
-        <p:sp>
-          <p:nvSpPr>
-            <p:cNvPr id="141" name="pl141"/>
-            <p:cNvSpPr/>
-            <p:nvPr/>
-          </p:nvSpPr>
-          <p:spPr>
-            <a:xfrm>
-              <a:off x="6829584" y="8917934"/>
-              <a:ext cx="0" cy="33212"/>
-            </a:xfrm>
-            <a:custGeom>
-              <a:avLst/>
-              <a:pathLst>
-                <a:path w="0" h="33212">
-                  <a:moveTo>
-                    <a:pt x="0" y="33212"/>
-                  </a:moveTo>
-                  <a:lnTo>
-                    <a:pt x="0" y="0"/>
-                  </a:lnTo>
-                </a:path>
-              </a:pathLst>
-            </a:custGeom>
-            <a:ln w="12934" cap="flat">
-              <a:solidFill>
-                <a:srgbClr val="000000">
-                  <a:alpha val="100000"/>
-                </a:srgbClr>
-              </a:solidFill>
-              <a:prstDash val="solid"/>
-              <a:round/>
-            </a:ln>
-          </p:spPr>
-          <p:txBody>
-            <a:bodyPr/>
-            <a:lstStyle/>
-            <a:p/>
-          </p:txBody>
-        </p:sp>
-        <p:sp>
-          <p:nvSpPr>
-            <p:cNvPr id="142" name="tx142"/>
-            <p:cNvSpPr/>
-            <p:nvPr/>
-          </p:nvSpPr>
-          <p:spPr>
-            <a:xfrm>
-              <a:off x="3223709" y="8976103"/>
-              <a:ext cx="59330" cy="77978"/>
-            </a:xfrm>
-            <a:prstGeom prst="rect">
-              <a:avLst/>
-            </a:prstGeom>
-            <a:noFill/>
-          </p:spPr>
-          <p:txBody>
-            <a:bodyPr lIns="0" rIns="0" tIns="0" bIns="0" anchorCtr="1" anchor="ctr" wrap="none"/>
-            <a:lstStyle/>
-            <a:p>
-              <a:pPr algn="l" marL="0" marR="0" indent="0">
-                <a:lnSpc>
-                  <a:spcPts val="840"/>
-                </a:lnSpc>
-                <a:spcBef>
-                  <a:spcPts val="0"/>
-                </a:spcBef>
-                <a:spcAft>
-                  <a:spcPts val="0"/>
-                </a:spcAft>
-              </a:pPr>
-              <a:r>
-                <a:rPr sz="840">
-                  <a:solidFill>
-                    <a:srgbClr val="1A1A1A">
-                      <a:alpha val="100000"/>
-                    </a:srgbClr>
-                  </a:solidFill>
-                  <a:latin typeface="Arial"/>
-                  <a:cs typeface="Arial"/>
-                </a:rPr>
-                <a:t>0</a:t>
-              </a:r>
-            </a:p>
-          </p:txBody>
-        </p:sp>
-        <p:sp>
-          <p:nvSpPr>
-            <p:cNvPr id="143" name="tx143"/>
-            <p:cNvSpPr/>
-            <p:nvPr/>
-          </p:nvSpPr>
-          <p:spPr>
-            <a:xfrm>
-              <a:off x="4982149" y="8976103"/>
-              <a:ext cx="118660" cy="77978"/>
-            </a:xfrm>
-            <a:prstGeom prst="rect">
-              <a:avLst/>
-            </a:prstGeom>
-            <a:noFill/>
-          </p:spPr>
-          <p:txBody>
-            <a:bodyPr lIns="0" rIns="0" tIns="0" bIns="0" anchorCtr="1" anchor="ctr" wrap="none"/>
-            <a:lstStyle/>
-            <a:p>
-              <a:pPr algn="l" marL="0" marR="0" indent="0">
-                <a:lnSpc>
-                  <a:spcPts val="840"/>
-                </a:lnSpc>
-                <a:spcBef>
-                  <a:spcPts val="0"/>
-                </a:spcBef>
-                <a:spcAft>
-                  <a:spcPts val="0"/>
-                </a:spcAft>
-              </a:pPr>
-              <a:r>
-                <a:rPr sz="840">
-                  <a:solidFill>
-                    <a:srgbClr val="1A1A1A">
-                      <a:alpha val="100000"/>
-                    </a:srgbClr>
-                  </a:solidFill>
-                  <a:latin typeface="Arial"/>
-                  <a:cs typeface="Arial"/>
-                </a:rPr>
-                <a:t>50</a:t>
-              </a:r>
-            </a:p>
-          </p:txBody>
-        </p:sp>
-        <p:sp>
-          <p:nvSpPr>
-            <p:cNvPr id="144" name="tx144"/>
-            <p:cNvSpPr/>
-            <p:nvPr/>
-          </p:nvSpPr>
-          <p:spPr>
-            <a:xfrm>
-              <a:off x="6740588" y="8976103"/>
-              <a:ext cx="177990" cy="77978"/>
-            </a:xfrm>
-            <a:prstGeom prst="rect">
-              <a:avLst/>
-            </a:prstGeom>
-            <a:noFill/>
-          </p:spPr>
-          <p:txBody>
-            <a:bodyPr lIns="0" rIns="0" tIns="0" bIns="0" anchorCtr="1" anchor="ctr" wrap="none"/>
-            <a:lstStyle/>
-            <a:p>
-              <a:pPr algn="l" marL="0" marR="0" indent="0">
-                <a:lnSpc>
-                  <a:spcPts val="840"/>
-                </a:lnSpc>
-                <a:spcBef>
-                  <a:spcPts val="0"/>
-                </a:spcBef>
-                <a:spcAft>
-                  <a:spcPts val="0"/>
-                </a:spcAft>
-              </a:pPr>
-              <a:r>
-                <a:rPr sz="840">
-                  <a:solidFill>
-                    <a:srgbClr val="1A1A1A">
-                      <a:alpha val="100000"/>
-                    </a:srgbClr>
-                  </a:solidFill>
-                  <a:latin typeface="Arial"/>
-                  <a:cs typeface="Arial"/>
-                </a:rPr>
-                <a:t>100</a:t>
-              </a:r>
-            </a:p>
-          </p:txBody>
-        </p:sp>
-        <p:sp>
-          <p:nvSpPr>
-            <p:cNvPr id="145" name="tx145"/>
-            <p:cNvSpPr/>
-            <p:nvPr/>
-          </p:nvSpPr>
-          <p:spPr>
-            <a:xfrm>
-              <a:off x="5039459" y="9106489"/>
-              <a:ext cx="1017314" cy="98710"/>
-            </a:xfrm>
-            <a:prstGeom prst="rect">
-              <a:avLst/>
-            </a:prstGeom>
-            <a:noFill/>
-          </p:spPr>
-          <p:txBody>
-            <a:bodyPr lIns="0" rIns="0" tIns="0" bIns="0" anchorCtr="1" anchor="ctr" wrap="none"/>
-            <a:lstStyle/>
-            <a:p>
-              <a:pPr algn="l" marL="0" marR="0" indent="0">
-                <a:lnSpc>
-                  <a:spcPts val="1050"/>
-                </a:lnSpc>
-                <a:spcBef>
-                  <a:spcPts val="0"/>
-                </a:spcBef>
-                <a:spcAft>
-                  <a:spcPts val="0"/>
-                </a:spcAft>
-              </a:pPr>
-              <a:r>
-                <a:rPr sz="1050" b="1">
+                <a:rPr sz="1019" b="1">
                   <a:solidFill>
                     <a:srgbClr val="111111">
                       <a:alpha val="100000"/>
@@ -8808,14 +8831,14 @@
         </p:sp>
         <p:sp>
           <p:nvSpPr>
-            <p:cNvPr id="146" name="tx146"/>
-            <p:cNvSpPr/>
-            <p:nvPr/>
-          </p:nvSpPr>
-          <p:spPr>
-            <a:xfrm>
-              <a:off x="1827654" y="5698842"/>
-              <a:ext cx="81226" cy="79157"/>
+            <p:cNvPr id="145" name="tx145"/>
+            <p:cNvSpPr/>
+            <p:nvPr/>
+          </p:nvSpPr>
+          <p:spPr>
+            <a:xfrm>
+              <a:off x="7938383" y="5426909"/>
+              <a:ext cx="86885" cy="103485"/>
             </a:xfrm>
             <a:prstGeom prst="rect">
               <a:avLst/>
@@ -8828,7 +8851,7 @@
             <a:p>
               <a:pPr algn="l" marL="0" marR="0" indent="0">
                 <a:lnSpc>
-                  <a:spcPts val="1150"/>
+                  <a:spcPts val="1120"/>
                 </a:lnSpc>
                 <a:spcBef>
                   <a:spcPts val="0"/>
@@ -8838,7 +8861,7 @@
                 </a:spcAft>
               </a:pPr>
               <a:r>
-                <a:rPr sz="1150" b="1">
+                <a:rPr sz="1120" b="1">
                   <a:solidFill>
                     <a:srgbClr val="000000">
                       <a:alpha val="100000"/>
@@ -8847,7 +8870,7 @@
                   <a:latin typeface="Arial"/>
                   <a:cs typeface="Arial"/>
                 </a:rPr>
-                <a:t>c</a:t>
+                <a:t>d</a:t>
               </a:r>
             </a:p>
           </p:txBody>
